--- a/output/wordlabs-ex-prefix-3day.pptx
+++ b/output/wordlabs-ex-prefix-3day.pptx
@@ -4240,7 +4240,7 @@
                 <a:ea typeface="Calibri" pitchFamily="34" charset="-122"/>
                 <a:cs typeface="Calibri" pitchFamily="34" charset="-120"/>
               </a:rPr>
-              <a:t>"out, out of, beyond"</a:t>
+              <a:t>"out, out of, away"</a:t>
             </a:r>
             <a:endParaRPr lang="en-US" sz="2200" dirty="0"/>
           </a:p>
@@ -5288,7 +5288,7 @@
                 <a:ea typeface="Calibri" pitchFamily="34" charset="-122"/>
                 <a:cs typeface="Calibri" pitchFamily="34" charset="-120"/>
               </a:rPr>
-              <a:t>Word Labs  •  wordlabs.app  •  Prefix: 'ex-' = out, out of, beyond</a:t>
+              <a:t>Word Labs  •  wordlabs.app  •  Prefix: 'ex-' = out, out of, away</a:t>
             </a:r>
             <a:endParaRPr lang="en-US" sz="800" dirty="0"/>
           </a:p>
@@ -5928,7 +5928,7 @@
                 <a:ea typeface="Calibri" pitchFamily="34" charset="-122"/>
                 <a:cs typeface="Calibri" pitchFamily="34" charset="-120"/>
               </a:rPr>
-              <a:t>Word Labs  •  wordlabs.app  •  Prefix: 'ex-' = out, out of, beyond</a:t>
+              <a:t>Word Labs  •  wordlabs.app  •  Prefix: 'ex-' = out, out of, away</a:t>
             </a:r>
             <a:endParaRPr lang="en-US" sz="800" dirty="0"/>
           </a:p>
@@ -6040,7 +6040,7 @@
                 <a:ea typeface="Calibri" pitchFamily="34" charset="-122"/>
                 <a:cs typeface="Calibri" pitchFamily="34" charset="-120"/>
               </a:rPr>
-              <a:t>The students had to </a:t>
+              <a:t>She tried to </a:t>
             </a:r>
             <a:pPr algn="l" indent="0" marL="0">
               <a:buNone/>
@@ -6057,7 +6057,7 @@
                 <a:ea typeface="Calibri" pitchFamily="34" charset="-122"/>
                 <a:cs typeface="Calibri" pitchFamily="34" charset="-120"/>
               </a:rPr>
-              <a:t>expand</a:t>
+              <a:t>express</a:t>
             </a:r>
             <a:pPr algn="l" indent="0" marL="0">
               <a:buNone/>
@@ -6071,7 +6071,7 @@
                 <a:ea typeface="Calibri" pitchFamily="34" charset="-122"/>
                 <a:cs typeface="Calibri" pitchFamily="34" charset="-120"/>
               </a:rPr>
-              <a:t> their ideas and </a:t>
+              <a:t> her feelings clearly and then </a:t>
             </a:r>
             <a:pPr algn="l" indent="0" marL="0">
               <a:buNone/>
@@ -6088,7 +6088,7 @@
                 <a:ea typeface="Calibri" pitchFamily="34" charset="-122"/>
                 <a:cs typeface="Calibri" pitchFamily="34" charset="-120"/>
               </a:rPr>
-              <a:t>express</a:t>
+              <a:t>extend</a:t>
             </a:r>
             <a:pPr algn="l" indent="0" marL="0">
               <a:buNone/>
@@ -6102,7 +6102,7 @@
                 <a:ea typeface="Calibri" pitchFamily="34" charset="-122"/>
                 <a:cs typeface="Calibri" pitchFamily="34" charset="-120"/>
               </a:rPr>
-              <a:t> them clearly in writing.</a:t>
+              <a:t> her answer with more detail.</a:t>
             </a:r>
             <a:endParaRPr lang="en-US" sz="1800" dirty="0"/>
           </a:p>
@@ -6257,7 +6257,7 @@
                 <a:ea typeface="Trebuchet MS" pitchFamily="34" charset="-122"/>
                 <a:cs typeface="Trebuchet MS" pitchFamily="34" charset="-120"/>
               </a:rPr>
-              <a:t>expand</a:t>
+              <a:t>express</a:t>
             </a:r>
             <a:endParaRPr lang="en-US" sz="1400" dirty="0"/>
           </a:p>
@@ -6385,7 +6385,7 @@
                 <a:ea typeface="Trebuchet MS" pitchFamily="34" charset="-122"/>
                 <a:cs typeface="Trebuchet MS" pitchFamily="34" charset="-120"/>
               </a:rPr>
-              <a:t>express</a:t>
+              <a:t>extend</a:t>
             </a:r>
             <a:endParaRPr lang="en-US" sz="1400" dirty="0"/>
           </a:p>
@@ -6716,7 +6716,7 @@
                 <a:ea typeface="Calibri" pitchFamily="34" charset="-122"/>
                 <a:cs typeface="Calibri" pitchFamily="34" charset="-120"/>
               </a:rPr>
-              <a:t>Word Labs  •  wordlabs.app  •  Prefix: 'ex-' = out, out of, beyond</a:t>
+              <a:t>Word Labs  •  wordlabs.app  •  Prefix: 'ex-' = out, out of, away</a:t>
             </a:r>
             <a:endParaRPr lang="en-US" sz="800" dirty="0"/>
           </a:p>
@@ -6855,7 +6855,7 @@
                 <a:ea typeface="Trebuchet MS" pitchFamily="34" charset="-122"/>
                 <a:cs typeface="Trebuchet MS" pitchFamily="34" charset="-120"/>
               </a:rPr>
-              <a:t>expand</a:t>
+              <a:t>express</a:t>
             </a:r>
             <a:endParaRPr lang="en-US" sz="2800" dirty="0"/>
           </a:p>
@@ -7543,7 +7543,7 @@
                 <a:ea typeface="Calibri" pitchFamily="34" charset="-122"/>
                 <a:cs typeface="Calibri" pitchFamily="34" charset="-120"/>
               </a:rPr>
-              <a:t>Word Labs  •  wordlabs.app  •  Prefix: 'ex-' = out, out of, beyond</a:t>
+              <a:t>Word Labs  •  wordlabs.app  •  Prefix: 'ex-' = out, out of, away</a:t>
             </a:r>
             <a:endParaRPr lang="en-US" sz="800" dirty="0"/>
           </a:p>
@@ -7682,7 +7682,7 @@
                 <a:ea typeface="Trebuchet MS" pitchFamily="34" charset="-122"/>
                 <a:cs typeface="Trebuchet MS" pitchFamily="34" charset="-120"/>
               </a:rPr>
-              <a:t>expand</a:t>
+              <a:t>express</a:t>
             </a:r>
             <a:endParaRPr lang="en-US" sz="2800" dirty="0"/>
           </a:p>
@@ -7933,7 +7933,7 @@
                 <a:ea typeface="Trebuchet MS" pitchFamily="34" charset="-122"/>
                 <a:cs typeface="Trebuchet MS" pitchFamily="34" charset="-120"/>
               </a:rPr>
-              <a:t>pand</a:t>
+              <a:t>press</a:t>
             </a:r>
             <a:endParaRPr lang="en-US" sz="1300" dirty="0"/>
           </a:p>
@@ -7972,7 +7972,7 @@
                 <a:ea typeface="Calibri" pitchFamily="34" charset="-122"/>
                 <a:cs typeface="Calibri" pitchFamily="34" charset="-120"/>
               </a:rPr>
-              <a:t>spread</a:t>
+              <a:t>push</a:t>
             </a:r>
             <a:endParaRPr lang="en-US" sz="850" dirty="0"/>
           </a:p>
@@ -8528,7 +8528,7 @@
                 <a:ea typeface="Calibri" pitchFamily="34" charset="-122"/>
                 <a:cs typeface="Calibri" pitchFamily="34" charset="-120"/>
               </a:rPr>
-              <a:t>Word Labs  •  wordlabs.app  •  Prefix: 'ex-' = out, out of, beyond</a:t>
+              <a:t>Word Labs  •  wordlabs.app  •  Prefix: 'ex-' = out, out of, away</a:t>
             </a:r>
             <a:endParaRPr lang="en-US" sz="800" dirty="0"/>
           </a:p>
@@ -8667,7 +8667,7 @@
                 <a:ea typeface="Trebuchet MS" pitchFamily="34" charset="-122"/>
                 <a:cs typeface="Trebuchet MS" pitchFamily="34" charset="-120"/>
               </a:rPr>
-              <a:t>expand</a:t>
+              <a:t>express</a:t>
             </a:r>
             <a:endParaRPr lang="en-US" sz="2800" dirty="0"/>
           </a:p>
@@ -8918,7 +8918,7 @@
                 <a:ea typeface="Trebuchet MS" pitchFamily="34" charset="-122"/>
                 <a:cs typeface="Trebuchet MS" pitchFamily="34" charset="-120"/>
               </a:rPr>
-              <a:t>pand</a:t>
+              <a:t>press</a:t>
             </a:r>
             <a:endParaRPr lang="en-US" sz="1300" dirty="0"/>
           </a:p>
@@ -8957,7 +8957,7 @@
                 <a:ea typeface="Calibri" pitchFamily="34" charset="-122"/>
                 <a:cs typeface="Calibri" pitchFamily="34" charset="-120"/>
               </a:rPr>
-              <a:t>spread</a:t>
+              <a:t>push</a:t>
             </a:r>
             <a:endParaRPr lang="en-US" sz="850" dirty="0"/>
           </a:p>
@@ -9221,7 +9221,7 @@
                 <a:ea typeface="Trebuchet MS" pitchFamily="34" charset="-122"/>
                 <a:cs typeface="Trebuchet MS" pitchFamily="34" charset="-120"/>
               </a:rPr>
-              <a:t>pand</a:t>
+              <a:t>press</a:t>
             </a:r>
             <a:endParaRPr lang="en-US" sz="1400" dirty="0"/>
           </a:p>
@@ -9645,7 +9645,7 @@
                 <a:ea typeface="Calibri" pitchFamily="34" charset="-122"/>
                 <a:cs typeface="Calibri" pitchFamily="34" charset="-120"/>
               </a:rPr>
-              <a:t>Word Labs  •  wordlabs.app  •  Prefix: 'ex-' = out, out of, beyond</a:t>
+              <a:t>Word Labs  •  wordlabs.app  •  Prefix: 'ex-' = out, out of, away</a:t>
             </a:r>
             <a:endParaRPr lang="en-US" sz="800" dirty="0"/>
           </a:p>
@@ -9784,7 +9784,7 @@
                 <a:ea typeface="Trebuchet MS" pitchFamily="34" charset="-122"/>
                 <a:cs typeface="Trebuchet MS" pitchFamily="34" charset="-120"/>
               </a:rPr>
-              <a:t>expand</a:t>
+              <a:t>express</a:t>
             </a:r>
             <a:endParaRPr lang="en-US" sz="2800" dirty="0"/>
           </a:p>
@@ -10035,7 +10035,7 @@
                 <a:ea typeface="Trebuchet MS" pitchFamily="34" charset="-122"/>
                 <a:cs typeface="Trebuchet MS" pitchFamily="34" charset="-120"/>
               </a:rPr>
-              <a:t>pand</a:t>
+              <a:t>press</a:t>
             </a:r>
             <a:endParaRPr lang="en-US" sz="1300" dirty="0"/>
           </a:p>
@@ -10074,7 +10074,7 @@
                 <a:ea typeface="Calibri" pitchFamily="34" charset="-122"/>
                 <a:cs typeface="Calibri" pitchFamily="34" charset="-120"/>
               </a:rPr>
-              <a:t>spread</a:t>
+              <a:t>push</a:t>
             </a:r>
             <a:endParaRPr lang="en-US" sz="850" dirty="0"/>
           </a:p>
@@ -10338,7 +10338,7 @@
                 <a:ea typeface="Trebuchet MS" pitchFamily="34" charset="-122"/>
                 <a:cs typeface="Trebuchet MS" pitchFamily="34" charset="-120"/>
               </a:rPr>
-              <a:t>pand</a:t>
+              <a:t>press</a:t>
             </a:r>
             <a:endParaRPr lang="en-US" sz="1400" dirty="0"/>
           </a:p>
@@ -10695,7 +10695,7 @@
                 <a:ea typeface="Trebuchet MS" pitchFamily="34" charset="-122"/>
                 <a:cs typeface="Trebuchet MS" pitchFamily="34" charset="-120"/>
               </a:rPr>
-              <a:t>a</a:t>
+              <a:t>r</a:t>
             </a:r>
             <a:endParaRPr lang="en-US" sz="900" dirty="0"/>
           </a:p>
@@ -10761,7 +10761,7 @@
                 <a:ea typeface="Trebuchet MS" pitchFamily="34" charset="-122"/>
                 <a:cs typeface="Trebuchet MS" pitchFamily="34" charset="-120"/>
               </a:rPr>
-              <a:t>n</a:t>
+              <a:t>e</a:t>
             </a:r>
             <a:endParaRPr lang="en-US" sz="900" dirty="0"/>
           </a:p>
@@ -10827,7 +10827,7 @@
                 <a:ea typeface="Trebuchet MS" pitchFamily="34" charset="-122"/>
                 <a:cs typeface="Trebuchet MS" pitchFamily="34" charset="-120"/>
               </a:rPr>
-              <a:t>d</a:t>
+              <a:t>ss</a:t>
             </a:r>
             <a:endParaRPr lang="en-US" sz="900" dirty="0"/>
           </a:p>
@@ -11119,7 +11119,7 @@
                 <a:ea typeface="Calibri" pitchFamily="34" charset="-122"/>
                 <a:cs typeface="Calibri" pitchFamily="34" charset="-120"/>
               </a:rPr>
-              <a:t>Word Labs  •  wordlabs.app  •  Prefix: 'ex-' = out, out of, beyond</a:t>
+              <a:t>Word Labs  •  wordlabs.app  •  Prefix: 'ex-' = out, out of, away</a:t>
             </a:r>
             <a:endParaRPr lang="en-US" sz="800" dirty="0"/>
           </a:p>
@@ -11258,7 +11258,7 @@
                 <a:ea typeface="Trebuchet MS" pitchFamily="34" charset="-122"/>
                 <a:cs typeface="Trebuchet MS" pitchFamily="34" charset="-120"/>
               </a:rPr>
-              <a:t>express</a:t>
+              <a:t>extend</a:t>
             </a:r>
             <a:endParaRPr lang="en-US" sz="2800" dirty="0"/>
           </a:p>
@@ -11946,7 +11946,7 @@
                 <a:ea typeface="Calibri" pitchFamily="34" charset="-122"/>
                 <a:cs typeface="Calibri" pitchFamily="34" charset="-120"/>
               </a:rPr>
-              <a:t>Word Labs  •  wordlabs.app  •  Prefix: 'ex-' = out, out of, beyond</a:t>
+              <a:t>Word Labs  •  wordlabs.app  •  Prefix: 'ex-' = out, out of, away</a:t>
             </a:r>
             <a:endParaRPr lang="en-US" sz="800" dirty="0"/>
           </a:p>
@@ -12085,7 +12085,7 @@
                 <a:ea typeface="Trebuchet MS" pitchFamily="34" charset="-122"/>
                 <a:cs typeface="Trebuchet MS" pitchFamily="34" charset="-120"/>
               </a:rPr>
-              <a:t>express</a:t>
+              <a:t>extend</a:t>
             </a:r>
             <a:endParaRPr lang="en-US" sz="2800" dirty="0"/>
           </a:p>
@@ -12336,7 +12336,7 @@
                 <a:ea typeface="Trebuchet MS" pitchFamily="34" charset="-122"/>
                 <a:cs typeface="Trebuchet MS" pitchFamily="34" charset="-120"/>
               </a:rPr>
-              <a:t>press</a:t>
+              <a:t>tend</a:t>
             </a:r>
             <a:endParaRPr lang="en-US" sz="1300" dirty="0"/>
           </a:p>
@@ -12375,7 +12375,7 @@
                 <a:ea typeface="Calibri" pitchFamily="34" charset="-122"/>
                 <a:cs typeface="Calibri" pitchFamily="34" charset="-120"/>
               </a:rPr>
-              <a:t>push, press</a:t>
+              <a:t>stretch</a:t>
             </a:r>
             <a:endParaRPr lang="en-US" sz="850" dirty="0"/>
           </a:p>
@@ -12931,7 +12931,7 @@
                 <a:ea typeface="Calibri" pitchFamily="34" charset="-122"/>
                 <a:cs typeface="Calibri" pitchFamily="34" charset="-120"/>
               </a:rPr>
-              <a:t>Word Labs  •  wordlabs.app  •  Prefix: 'ex-' = out, out of, beyond</a:t>
+              <a:t>Word Labs  •  wordlabs.app  •  Prefix: 'ex-' = out, out of, away</a:t>
             </a:r>
             <a:endParaRPr lang="en-US" sz="800" dirty="0"/>
           </a:p>
@@ -13070,7 +13070,7 @@
                 <a:ea typeface="Trebuchet MS" pitchFamily="34" charset="-122"/>
                 <a:cs typeface="Trebuchet MS" pitchFamily="34" charset="-120"/>
               </a:rPr>
-              <a:t>express</a:t>
+              <a:t>extend</a:t>
             </a:r>
             <a:endParaRPr lang="en-US" sz="2800" dirty="0"/>
           </a:p>
@@ -13321,7 +13321,7 @@
                 <a:ea typeface="Trebuchet MS" pitchFamily="34" charset="-122"/>
                 <a:cs typeface="Trebuchet MS" pitchFamily="34" charset="-120"/>
               </a:rPr>
-              <a:t>press</a:t>
+              <a:t>tend</a:t>
             </a:r>
             <a:endParaRPr lang="en-US" sz="1300" dirty="0"/>
           </a:p>
@@ -13360,7 +13360,7 @@
                 <a:ea typeface="Calibri" pitchFamily="34" charset="-122"/>
                 <a:cs typeface="Calibri" pitchFamily="34" charset="-120"/>
               </a:rPr>
-              <a:t>push, press</a:t>
+              <a:t>stretch</a:t>
             </a:r>
             <a:endParaRPr lang="en-US" sz="850" dirty="0"/>
           </a:p>
@@ -13624,7 +13624,7 @@
                 <a:ea typeface="Trebuchet MS" pitchFamily="34" charset="-122"/>
                 <a:cs typeface="Trebuchet MS" pitchFamily="34" charset="-120"/>
               </a:rPr>
-              <a:t>press</a:t>
+              <a:t>tend</a:t>
             </a:r>
             <a:endParaRPr lang="en-US" sz="1400" dirty="0"/>
           </a:p>
@@ -13957,7 +13957,7 @@
                 <a:ea typeface="Calibri" pitchFamily="34" charset="-122"/>
                 <a:cs typeface="Calibri" pitchFamily="34" charset="-120"/>
               </a:rPr>
-              <a:t>Prefix 'ex-' — out, out of, beyond</a:t>
+              <a:t>Prefix 'ex-' — out, out of, away</a:t>
             </a:r>
             <a:endParaRPr lang="en-US" sz="1600" dirty="0"/>
           </a:p>
@@ -14313,7 +14313,7 @@
                 <a:ea typeface="Calibri" pitchFamily="34" charset="-122"/>
                 <a:cs typeface="Calibri" pitchFamily="34" charset="-120"/>
               </a:rPr>
-              <a:t>Word Labs  •  wordlabs.app  •  Prefix: 'ex-' = out, out of, beyond</a:t>
+              <a:t>Word Labs  •  wordlabs.app  •  Prefix: 'ex-' = out, out of, away</a:t>
             </a:r>
             <a:endParaRPr lang="en-US" sz="800" dirty="0"/>
           </a:p>
@@ -14452,7 +14452,7 @@
                 <a:ea typeface="Trebuchet MS" pitchFamily="34" charset="-122"/>
                 <a:cs typeface="Trebuchet MS" pitchFamily="34" charset="-120"/>
               </a:rPr>
-              <a:t>express</a:t>
+              <a:t>extend</a:t>
             </a:r>
             <a:endParaRPr lang="en-US" sz="2800" dirty="0"/>
           </a:p>
@@ -14703,7 +14703,7 @@
                 <a:ea typeface="Trebuchet MS" pitchFamily="34" charset="-122"/>
                 <a:cs typeface="Trebuchet MS" pitchFamily="34" charset="-120"/>
               </a:rPr>
-              <a:t>press</a:t>
+              <a:t>tend</a:t>
             </a:r>
             <a:endParaRPr lang="en-US" sz="1300" dirty="0"/>
           </a:p>
@@ -14742,7 +14742,7 @@
                 <a:ea typeface="Calibri" pitchFamily="34" charset="-122"/>
                 <a:cs typeface="Calibri" pitchFamily="34" charset="-120"/>
               </a:rPr>
-              <a:t>push, press</a:t>
+              <a:t>stretch</a:t>
             </a:r>
             <a:endParaRPr lang="en-US" sz="850" dirty="0"/>
           </a:p>
@@ -15006,7 +15006,7 @@
                 <a:ea typeface="Trebuchet MS" pitchFamily="34" charset="-122"/>
                 <a:cs typeface="Trebuchet MS" pitchFamily="34" charset="-120"/>
               </a:rPr>
-              <a:t>press</a:t>
+              <a:t>tend</a:t>
             </a:r>
             <a:endParaRPr lang="en-US" sz="1400" dirty="0"/>
           </a:p>
@@ -15297,7 +15297,7 @@
                 <a:ea typeface="Trebuchet MS" pitchFamily="34" charset="-122"/>
                 <a:cs typeface="Trebuchet MS" pitchFamily="34" charset="-120"/>
               </a:rPr>
-              <a:t>p</a:t>
+              <a:t>t</a:t>
             </a:r>
             <a:endParaRPr lang="en-US" sz="900" dirty="0"/>
           </a:p>
@@ -15363,7 +15363,7 @@
                 <a:ea typeface="Trebuchet MS" pitchFamily="34" charset="-122"/>
                 <a:cs typeface="Trebuchet MS" pitchFamily="34" charset="-120"/>
               </a:rPr>
-              <a:t>r</a:t>
+              <a:t>e</a:t>
             </a:r>
             <a:endParaRPr lang="en-US" sz="900" dirty="0"/>
           </a:p>
@@ -15429,7 +15429,7 @@
                 <a:ea typeface="Trebuchet MS" pitchFamily="34" charset="-122"/>
                 <a:cs typeface="Trebuchet MS" pitchFamily="34" charset="-120"/>
               </a:rPr>
-              <a:t>e</a:t>
+              <a:t>n</a:t>
             </a:r>
             <a:endParaRPr lang="en-US" sz="900" dirty="0"/>
           </a:p>
@@ -15495,7 +15495,7 @@
                 <a:ea typeface="Trebuchet MS" pitchFamily="34" charset="-122"/>
                 <a:cs typeface="Trebuchet MS" pitchFamily="34" charset="-120"/>
               </a:rPr>
-              <a:t>ss</a:t>
+              <a:t>d</a:t>
             </a:r>
             <a:endParaRPr lang="en-US" sz="900" dirty="0"/>
           </a:p>
@@ -16069,7 +16069,7 @@
                 <a:ea typeface="Calibri" pitchFamily="34" charset="-122"/>
                 <a:cs typeface="Calibri" pitchFamily="34" charset="-120"/>
               </a:rPr>
-              <a:t>Word Labs  •  wordlabs.app  •  Prefix: 'ex-' = out, out of, beyond</a:t>
+              <a:t>Word Labs  •  wordlabs.app  •  Prefix: 'ex-' = out, out of, away</a:t>
             </a:r>
             <a:endParaRPr lang="en-US" sz="800" dirty="0"/>
           </a:p>
@@ -16709,7 +16709,7 @@
                 <a:ea typeface="Calibri" pitchFamily="34" charset="-122"/>
                 <a:cs typeface="Calibri" pitchFamily="34" charset="-120"/>
               </a:rPr>
-              <a:t>Word Labs  •  wordlabs.app  •  Prefix: 'ex-' = out, out of, beyond</a:t>
+              <a:t>Word Labs  •  wordlabs.app  •  Prefix: 'ex-' = out, out of, away</a:t>
             </a:r>
             <a:endParaRPr lang="en-US" sz="800" dirty="0"/>
           </a:p>
@@ -16821,7 +16821,7 @@
                 <a:ea typeface="Calibri" pitchFamily="34" charset="-122"/>
                 <a:cs typeface="Calibri" pitchFamily="34" charset="-120"/>
               </a:rPr>
-              <a:t>The </a:t>
+              <a:t>The explorer decided to </a:t>
             </a:r>
             <a:pPr algn="l" indent="0" marL="0">
               <a:buNone/>
@@ -16838,7 +16838,7 @@
                 <a:ea typeface="Calibri" pitchFamily="34" charset="-122"/>
                 <a:cs typeface="Calibri" pitchFamily="34" charset="-120"/>
               </a:rPr>
-              <a:t>excited</a:t>
+              <a:t>exclaim</a:t>
             </a:r>
             <a:pPr algn="l" indent="0" marL="0">
               <a:buNone/>
@@ -16852,7 +16852,7 @@
                 <a:ea typeface="Calibri" pitchFamily="34" charset="-122"/>
                 <a:cs typeface="Calibri" pitchFamily="34" charset="-120"/>
               </a:rPr>
-              <a:t> explorer decided to </a:t>
+              <a:t> with excitement and then </a:t>
             </a:r>
             <a:pPr algn="l" indent="0" marL="0">
               <a:buNone/>
@@ -16869,7 +16869,7 @@
                 <a:ea typeface="Calibri" pitchFamily="34" charset="-122"/>
                 <a:cs typeface="Calibri" pitchFamily="34" charset="-120"/>
               </a:rPr>
-              <a:t>extend</a:t>
+              <a:t>export</a:t>
             </a:r>
             <a:pPr algn="l" indent="0" marL="0">
               <a:buNone/>
@@ -16883,7 +16883,7 @@
                 <a:ea typeface="Calibri" pitchFamily="34" charset="-122"/>
                 <a:cs typeface="Calibri" pitchFamily="34" charset="-120"/>
               </a:rPr>
-              <a:t> her journey and </a:t>
+              <a:t> her findings to </a:t>
             </a:r>
             <a:pPr algn="l" indent="0" marL="0">
               <a:buNone/>
@@ -16900,7 +16900,7 @@
                 <a:ea typeface="Calibri" pitchFamily="34" charset="-122"/>
                 <a:cs typeface="Calibri" pitchFamily="34" charset="-120"/>
               </a:rPr>
-              <a:t>exclaim</a:t>
+              <a:t>exclude</a:t>
             </a:r>
             <a:pPr algn="l" indent="0" marL="0">
               <a:buNone/>
@@ -16914,7 +16914,7 @@
                 <a:ea typeface="Calibri" pitchFamily="34" charset="-122"/>
                 <a:cs typeface="Calibri" pitchFamily="34" charset="-120"/>
               </a:rPr>
-              <a:t> her findings to the world.</a:t>
+              <a:t> any confusion.</a:t>
             </a:r>
             <a:endParaRPr lang="en-US" sz="1800" dirty="0"/>
           </a:p>
@@ -17069,7 +17069,7 @@
                 <a:ea typeface="Trebuchet MS" pitchFamily="34" charset="-122"/>
                 <a:cs typeface="Trebuchet MS" pitchFamily="34" charset="-120"/>
               </a:rPr>
-              <a:t>excited</a:t>
+              <a:t>exclaim</a:t>
             </a:r>
             <a:endParaRPr lang="en-US" sz="1400" dirty="0"/>
           </a:p>
@@ -17197,7 +17197,7 @@
                 <a:ea typeface="Trebuchet MS" pitchFamily="34" charset="-122"/>
                 <a:cs typeface="Trebuchet MS" pitchFamily="34" charset="-120"/>
               </a:rPr>
-              <a:t>extend</a:t>
+              <a:t>export</a:t>
             </a:r>
             <a:endParaRPr lang="en-US" sz="1400" dirty="0"/>
           </a:p>
@@ -17325,7 +17325,7 @@
                 <a:ea typeface="Trebuchet MS" pitchFamily="34" charset="-122"/>
                 <a:cs typeface="Trebuchet MS" pitchFamily="34" charset="-120"/>
               </a:rPr>
-              <a:t>exclaim</a:t>
+              <a:t>exclude</a:t>
             </a:r>
             <a:endParaRPr lang="en-US" sz="1400" dirty="0"/>
           </a:p>
@@ -17656,7 +17656,7 @@
                 <a:ea typeface="Calibri" pitchFamily="34" charset="-122"/>
                 <a:cs typeface="Calibri" pitchFamily="34" charset="-120"/>
               </a:rPr>
-              <a:t>Word Labs  •  wordlabs.app  •  Prefix: 'ex-' = out, out of, beyond</a:t>
+              <a:t>Word Labs  •  wordlabs.app  •  Prefix: 'ex-' = out, out of, away</a:t>
             </a:r>
             <a:endParaRPr lang="en-US" sz="800" dirty="0"/>
           </a:p>
@@ -17795,7 +17795,7 @@
                 <a:ea typeface="Trebuchet MS" pitchFamily="34" charset="-122"/>
                 <a:cs typeface="Trebuchet MS" pitchFamily="34" charset="-120"/>
               </a:rPr>
-              <a:t>excited</a:t>
+              <a:t>exclaim</a:t>
             </a:r>
             <a:endParaRPr lang="en-US" sz="2800" dirty="0"/>
           </a:p>
@@ -18483,7 +18483,7 @@
                 <a:ea typeface="Calibri" pitchFamily="34" charset="-122"/>
                 <a:cs typeface="Calibri" pitchFamily="34" charset="-120"/>
               </a:rPr>
-              <a:t>Word Labs  •  wordlabs.app  •  Prefix: 'ex-' = out, out of, beyond</a:t>
+              <a:t>Word Labs  •  wordlabs.app  •  Prefix: 'ex-' = out, out of, away</a:t>
             </a:r>
             <a:endParaRPr lang="en-US" sz="800" dirty="0"/>
           </a:p>
@@ -18622,7 +18622,7 @@
                 <a:ea typeface="Trebuchet MS" pitchFamily="34" charset="-122"/>
                 <a:cs typeface="Trebuchet MS" pitchFamily="34" charset="-120"/>
               </a:rPr>
-              <a:t>excited</a:t>
+              <a:t>exclaim</a:t>
             </a:r>
             <a:endParaRPr lang="en-US" sz="2800" dirty="0"/>
           </a:p>
@@ -18702,7 +18702,7 @@
         </p:nvSpPr>
         <p:spPr>
           <a:xfrm>
-            <a:off x="2221992" y="2258568"/>
+            <a:off x="2938272" y="2258568"/>
             <a:ext cx="1828800" cy="292608"/>
           </a:xfrm>
           <a:prstGeom prst="rect">
@@ -18736,7 +18736,7 @@
         </p:nvSpPr>
         <p:spPr>
           <a:xfrm>
-            <a:off x="2221992" y="2258568"/>
+            <a:off x="2938272" y="2258568"/>
             <a:ext cx="1828800" cy="292608"/>
           </a:xfrm>
           <a:prstGeom prst="rect">
@@ -18775,7 +18775,7 @@
         </p:nvSpPr>
         <p:spPr>
           <a:xfrm>
-            <a:off x="2221992" y="2569464"/>
+            <a:off x="2938272" y="2569464"/>
             <a:ext cx="1828800" cy="201168"/>
           </a:xfrm>
           <a:prstGeom prst="rect">
@@ -18814,7 +18814,7 @@
         </p:nvSpPr>
         <p:spPr>
           <a:xfrm>
-            <a:off x="4370832" y="2258568"/>
+            <a:off x="5803392" y="2258568"/>
             <a:ext cx="1828800" cy="292608"/>
           </a:xfrm>
           <a:prstGeom prst="rect">
@@ -18848,7 +18848,7 @@
         </p:nvSpPr>
         <p:spPr>
           <a:xfrm>
-            <a:off x="4370832" y="2258568"/>
+            <a:off x="5803392" y="2258568"/>
             <a:ext cx="1828800" cy="292608"/>
           </a:xfrm>
           <a:prstGeom prst="rect">
@@ -18873,7 +18873,7 @@
                 <a:ea typeface="Trebuchet MS" pitchFamily="34" charset="-122"/>
                 <a:cs typeface="Trebuchet MS" pitchFamily="34" charset="-120"/>
               </a:rPr>
-              <a:t>cit</a:t>
+              <a:t>claim</a:t>
             </a:r>
             <a:endParaRPr lang="en-US" sz="1300" dirty="0"/>
           </a:p>
@@ -18887,7 +18887,7 @@
         </p:nvSpPr>
         <p:spPr>
           <a:xfrm>
-            <a:off x="4370832" y="2569464"/>
+            <a:off x="5803392" y="2569464"/>
             <a:ext cx="1828800" cy="201168"/>
           </a:xfrm>
           <a:prstGeom prst="rect">
@@ -18912,7 +18912,7 @@
                 <a:ea typeface="Calibri" pitchFamily="34" charset="-122"/>
                 <a:cs typeface="Calibri" pitchFamily="34" charset="-120"/>
               </a:rPr>
-              <a:t>move, rouse</a:t>
+              <a:t>call out, shout</a:t>
             </a:r>
             <a:endParaRPr lang="en-US" sz="850" dirty="0"/>
           </a:p>
@@ -18926,30 +18926,23 @@
         </p:nvSpPr>
         <p:spPr>
           <a:xfrm>
-            <a:off x="6519672" y="2258568"/>
-            <a:ext cx="1828800" cy="292608"/>
+            <a:off x="365760" y="3273552"/>
+            <a:ext cx="1371600" cy="658368"/>
           </a:xfrm>
           <a:prstGeom prst="rect">
             <a:avLst>
-              <a:gd name="adj" fmla="val 25000"/>
+              <a:gd name="adj" fmla="val 8333"/>
             </a:avLst>
           </a:prstGeom>
           <a:solidFill>
-            <a:srgbClr val="FCE7F3"/>
-          </a:solidFill>
-          <a:ln w="19050">
-            <a:solidFill>
-              <a:srgbClr val="DB2777"/>
-            </a:solidFill>
-            <a:prstDash val="solid"/>
-          </a:ln>
-          <a:effectLst>
-            <a:outerShdw sx="100000" sy="100000" kx="0" ky="0" algn="bl" rotWithShape="0" blurRad="101600" dist="38100" dir="8100000">
-              <a:srgbClr val="000000">
-                <a:alpha val="12000"/>
-              </a:srgbClr>
-            </a:outerShdw>
-          </a:effectLst>
+            <a:srgbClr val="E2E8F0"/>
+          </a:solidFill>
+          <a:ln w="12700">
+            <a:solidFill>
+              <a:srgbClr val="E2E8F0"/>
+            </a:solidFill>
+            <a:prstDash val="solid"/>
+          </a:ln>
         </p:spPr>
       </p:sp>
       <p:sp>
@@ -18960,8 +18953,8 @@
         </p:nvSpPr>
         <p:spPr>
           <a:xfrm>
-            <a:off x="6519672" y="2258568"/>
-            <a:ext cx="1828800" cy="292608"/>
+            <a:off x="365760" y="3273552"/>
+            <a:ext cx="1371600" cy="658368"/>
           </a:xfrm>
           <a:prstGeom prst="rect">
             <a:avLst/>
@@ -18977,95 +18970,83 @@
               <a:buNone/>
             </a:pPr>
             <a:r>
-              <a:rPr lang="en-US" sz="1300" b="1" dirty="0">
-                <a:solidFill>
-                  <a:srgbClr val="9D174D"/>
+              <a:rPr lang="en-US" sz="1100" b="1" dirty="0">
+                <a:solidFill>
+                  <a:srgbClr val="475569"/>
                 </a:solidFill>
                 <a:latin typeface="Trebuchet MS" pitchFamily="34" charset="0"/>
                 <a:ea typeface="Trebuchet MS" pitchFamily="34" charset="-122"/>
                 <a:cs typeface="Trebuchet MS" pitchFamily="34" charset="-120"/>
               </a:rPr>
-              <a:t>ed</a:t>
-            </a:r>
-            <a:endParaRPr lang="en-US" sz="1300" dirty="0"/>
-          </a:p>
-        </p:txBody>
-      </p:sp>
-      <p:sp>
-        <p:nvSpPr>
-          <p:cNvPr id="24" name="Text 22"/>
-          <p:cNvSpPr/>
-          <p:nvPr/>
-        </p:nvSpPr>
-        <p:spPr>
-          <a:xfrm>
-            <a:off x="6519672" y="2569464"/>
-            <a:ext cx="1828800" cy="201168"/>
-          </a:xfrm>
-          <a:prstGeom prst="rect">
-            <a:avLst/>
-          </a:prstGeom>
-          <a:noFill/>
-          <a:ln/>
-        </p:spPr>
-        <p:txBody>
-          <a:bodyPr wrap="square" lIns="0" tIns="0" rIns="0" bIns="0" rtlCol="0" anchor="t"/>
-          <a:lstStyle/>
-          <a:p>
-            <a:pPr algn="ctr" indent="0" marL="0">
-              <a:buNone/>
-            </a:pPr>
-            <a:r>
-              <a:rPr lang="en-US" sz="850" dirty="0">
-                <a:solidFill>
-                  <a:srgbClr val="475569"/>
+              <a:t>Syllables</a:t>
+            </a:r>
+            <a:endParaRPr lang="en-US" sz="1100" dirty="0"/>
+          </a:p>
+        </p:txBody>
+      </p:sp>
+      <p:sp>
+        <p:nvSpPr>
+          <p:cNvPr id="24" name="Shape 22"/>
+          <p:cNvSpPr/>
+          <p:nvPr/>
+        </p:nvSpPr>
+        <p:spPr>
+          <a:xfrm>
+            <a:off x="1874520" y="3273552"/>
+            <a:ext cx="6903720" cy="658368"/>
+          </a:xfrm>
+          <a:prstGeom prst="rect">
+            <a:avLst>
+              <a:gd name="adj" fmla="val 8333"/>
+            </a:avLst>
+          </a:prstGeom>
+          <a:solidFill>
+            <a:srgbClr val="F8FAFC"/>
+          </a:solidFill>
+          <a:ln w="12700">
+            <a:solidFill>
+              <a:srgbClr val="E2E8F0"/>
+            </a:solidFill>
+            <a:prstDash val="dash"/>
+          </a:ln>
+        </p:spPr>
+      </p:sp>
+      <p:sp>
+        <p:nvSpPr>
+          <p:cNvPr id="25" name="Text 23"/>
+          <p:cNvSpPr/>
+          <p:nvPr/>
+        </p:nvSpPr>
+        <p:spPr>
+          <a:xfrm>
+            <a:off x="1874520" y="3273552"/>
+            <a:ext cx="6903720" cy="658368"/>
+          </a:xfrm>
+          <a:prstGeom prst="rect">
+            <a:avLst/>
+          </a:prstGeom>
+          <a:noFill/>
+          <a:ln/>
+        </p:spPr>
+        <p:txBody>
+          <a:bodyPr wrap="square" rtlCol="0" anchor="ctr"/>
+          <a:lstStyle/>
+          <a:p>
+            <a:pPr algn="ctr" indent="0" marL="0">
+              <a:buNone/>
+            </a:pPr>
+            <a:r>
+              <a:rPr lang="en-US" sz="1100" i="1" dirty="0">
+                <a:solidFill>
+                  <a:srgbClr val="CBD5E1"/>
                 </a:solidFill>
                 <a:latin typeface="Calibri" pitchFamily="34" charset="0"/>
                 <a:ea typeface="Calibri" pitchFamily="34" charset="-122"/>
                 <a:cs typeface="Calibri" pitchFamily="34" charset="-120"/>
               </a:rPr>
-              <a:t>past tense</a:t>
-            </a:r>
-            <a:endParaRPr lang="en-US" sz="850" dirty="0"/>
-          </a:p>
-        </p:txBody>
-      </p:sp>
-      <p:sp>
-        <p:nvSpPr>
-          <p:cNvPr id="25" name="Text 23"/>
-          <p:cNvSpPr/>
-          <p:nvPr/>
-        </p:nvSpPr>
-        <p:spPr>
-          <a:xfrm>
-            <a:off x="6519672" y="2752344"/>
-            <a:ext cx="1828800" cy="182880"/>
-          </a:xfrm>
-          <a:prstGeom prst="rect">
-            <a:avLst/>
-          </a:prstGeom>
-          <a:noFill/>
-          <a:ln/>
-        </p:spPr>
-        <p:txBody>
-          <a:bodyPr wrap="square" lIns="0" tIns="0" rIns="0" bIns="0" rtlCol="0" anchor="t"/>
-          <a:lstStyle/>
-          <a:p>
-            <a:pPr algn="ctr" indent="0" marL="0">
-              <a:buNone/>
-            </a:pPr>
-            <a:r>
-              <a:rPr lang="en-US" sz="700" i="1" dirty="0">
-                <a:solidFill>
-                  <a:srgbClr val="94A3B8"/>
-                </a:solidFill>
-                <a:latin typeface="Calibri" pitchFamily="34" charset="0"/>
-                <a:ea typeface="Calibri" pitchFamily="34" charset="-122"/>
-                <a:cs typeface="Calibri" pitchFamily="34" charset="-120"/>
-              </a:rPr>
-              <a:t>'e' dropped before vowel suffix</a:t>
-            </a:r>
-            <a:endParaRPr lang="en-US" sz="700" dirty="0"/>
+              <a:t>Write here...</a:t>
+            </a:r>
+            <a:endParaRPr lang="en-US" sz="1100" dirty="0"/>
           </a:p>
         </p:txBody>
       </p:sp>
@@ -19077,12 +19058,12 @@
         </p:nvSpPr>
         <p:spPr>
           <a:xfrm>
-            <a:off x="365760" y="3273552"/>
-            <a:ext cx="1371600" cy="658368"/>
+            <a:off x="365760" y="4096512"/>
+            <a:ext cx="1371600" cy="804672"/>
           </a:xfrm>
           <a:prstGeom prst="rect">
             <a:avLst>
-              <a:gd name="adj" fmla="val 8333"/>
+              <a:gd name="adj" fmla="val 6818"/>
             </a:avLst>
           </a:prstGeom>
           <a:solidFill>
@@ -19104,8 +19085,8 @@
         </p:nvSpPr>
         <p:spPr>
           <a:xfrm>
-            <a:off x="365760" y="3273552"/>
-            <a:ext cx="1371600" cy="658368"/>
+            <a:off x="365760" y="4096512"/>
+            <a:ext cx="1371600" cy="804672"/>
           </a:xfrm>
           <a:prstGeom prst="rect">
             <a:avLst/>
@@ -19129,7 +19110,7 @@
                 <a:ea typeface="Trebuchet MS" pitchFamily="34" charset="-122"/>
                 <a:cs typeface="Trebuchet MS" pitchFamily="34" charset="-120"/>
               </a:rPr>
-              <a:t>Syllables</a:t>
+              <a:t>Phonemes</a:t>
             </a:r>
             <a:endParaRPr lang="en-US" sz="1100" dirty="0"/>
           </a:p>
@@ -19143,74 +19124,8 @@
         </p:nvSpPr>
         <p:spPr>
           <a:xfrm>
-            <a:off x="1874520" y="3273552"/>
-            <a:ext cx="6903720" cy="658368"/>
-          </a:xfrm>
-          <a:prstGeom prst="rect">
-            <a:avLst>
-              <a:gd name="adj" fmla="val 8333"/>
-            </a:avLst>
-          </a:prstGeom>
-          <a:solidFill>
-            <a:srgbClr val="F8FAFC"/>
-          </a:solidFill>
-          <a:ln w="12700">
-            <a:solidFill>
-              <a:srgbClr val="E2E8F0"/>
-            </a:solidFill>
-            <a:prstDash val="dash"/>
-          </a:ln>
-        </p:spPr>
-      </p:sp>
-      <p:sp>
-        <p:nvSpPr>
-          <p:cNvPr id="29" name="Text 27"/>
-          <p:cNvSpPr/>
-          <p:nvPr/>
-        </p:nvSpPr>
-        <p:spPr>
-          <a:xfrm>
-            <a:off x="1874520" y="3273552"/>
-            <a:ext cx="6903720" cy="658368"/>
-          </a:xfrm>
-          <a:prstGeom prst="rect">
-            <a:avLst/>
-          </a:prstGeom>
-          <a:noFill/>
-          <a:ln/>
-        </p:spPr>
-        <p:txBody>
-          <a:bodyPr wrap="square" rtlCol="0" anchor="ctr"/>
-          <a:lstStyle/>
-          <a:p>
-            <a:pPr algn="ctr" indent="0" marL="0">
-              <a:buNone/>
-            </a:pPr>
-            <a:r>
-              <a:rPr lang="en-US" sz="1100" i="1" dirty="0">
-                <a:solidFill>
-                  <a:srgbClr val="CBD5E1"/>
-                </a:solidFill>
-                <a:latin typeface="Calibri" pitchFamily="34" charset="0"/>
-                <a:ea typeface="Calibri" pitchFamily="34" charset="-122"/>
-                <a:cs typeface="Calibri" pitchFamily="34" charset="-120"/>
-              </a:rPr>
-              <a:t>Write here...</a:t>
-            </a:r>
-            <a:endParaRPr lang="en-US" sz="1100" dirty="0"/>
-          </a:p>
-        </p:txBody>
-      </p:sp>
-      <p:sp>
-        <p:nvSpPr>
-          <p:cNvPr id="30" name="Shape 28"/>
-          <p:cNvSpPr/>
-          <p:nvPr/>
-        </p:nvSpPr>
-        <p:spPr>
-          <a:xfrm>
-            <a:off x="365760" y="4096512"/>
-            <a:ext cx="1371600" cy="804672"/>
+            <a:off x="1874520" y="4096512"/>
+            <a:ext cx="6903720" cy="804672"/>
           </a:xfrm>
           <a:prstGeom prst="rect">
             <a:avLst>
@@ -19218,85 +19133,19 @@
             </a:avLst>
           </a:prstGeom>
           <a:solidFill>
-            <a:srgbClr val="E2E8F0"/>
+            <a:srgbClr val="F8FAFC"/>
           </a:solidFill>
           <a:ln w="12700">
             <a:solidFill>
               <a:srgbClr val="E2E8F0"/>
             </a:solidFill>
-            <a:prstDash val="solid"/>
-          </a:ln>
-        </p:spPr>
-      </p:sp>
-      <p:sp>
-        <p:nvSpPr>
-          <p:cNvPr id="31" name="Text 29"/>
-          <p:cNvSpPr/>
-          <p:nvPr/>
-        </p:nvSpPr>
-        <p:spPr>
-          <a:xfrm>
-            <a:off x="365760" y="4096512"/>
-            <a:ext cx="1371600" cy="804672"/>
-          </a:xfrm>
-          <a:prstGeom prst="rect">
-            <a:avLst/>
-          </a:prstGeom>
-          <a:noFill/>
-          <a:ln/>
-        </p:spPr>
-        <p:txBody>
-          <a:bodyPr wrap="square" lIns="0" tIns="0" rIns="0" bIns="0" rtlCol="0" anchor="ctr"/>
-          <a:lstStyle/>
-          <a:p>
-            <a:pPr algn="ctr" indent="0" marL="0">
-              <a:buNone/>
-            </a:pPr>
-            <a:r>
-              <a:rPr lang="en-US" sz="1100" b="1" dirty="0">
-                <a:solidFill>
-                  <a:srgbClr val="475569"/>
-                </a:solidFill>
-                <a:latin typeface="Trebuchet MS" pitchFamily="34" charset="0"/>
-                <a:ea typeface="Trebuchet MS" pitchFamily="34" charset="-122"/>
-                <a:cs typeface="Trebuchet MS" pitchFamily="34" charset="-120"/>
-              </a:rPr>
-              <a:t>Phonemes</a:t>
-            </a:r>
-            <a:endParaRPr lang="en-US" sz="1100" dirty="0"/>
-          </a:p>
-        </p:txBody>
-      </p:sp>
-      <p:sp>
-        <p:nvSpPr>
-          <p:cNvPr id="32" name="Shape 30"/>
-          <p:cNvSpPr/>
-          <p:nvPr/>
-        </p:nvSpPr>
-        <p:spPr>
-          <a:xfrm>
-            <a:off x="1874520" y="4096512"/>
-            <a:ext cx="6903720" cy="804672"/>
-          </a:xfrm>
-          <a:prstGeom prst="rect">
-            <a:avLst>
-              <a:gd name="adj" fmla="val 6818"/>
-            </a:avLst>
-          </a:prstGeom>
-          <a:solidFill>
-            <a:srgbClr val="F8FAFC"/>
-          </a:solidFill>
-          <a:ln w="12700">
-            <a:solidFill>
-              <a:srgbClr val="E2E8F0"/>
-            </a:solidFill>
             <a:prstDash val="dash"/>
           </a:ln>
         </p:spPr>
       </p:sp>
       <p:sp>
         <p:nvSpPr>
-          <p:cNvPr id="33" name="Text 31"/>
+          <p:cNvPr id="29" name="Text 27"/>
           <p:cNvSpPr/>
           <p:nvPr/>
         </p:nvSpPr>
@@ -19619,7 +19468,7 @@
                 <a:ea typeface="Calibri" pitchFamily="34" charset="-122"/>
                 <a:cs typeface="Calibri" pitchFamily="34" charset="-120"/>
               </a:rPr>
-              <a:t>Word Labs  •  wordlabs.app  •  Prefix: 'ex-' = out, out of, beyond</a:t>
+              <a:t>Word Labs  •  wordlabs.app  •  Prefix: 'ex-' = out, out of, away</a:t>
             </a:r>
             <a:endParaRPr lang="en-US" sz="800" dirty="0"/>
           </a:p>
@@ -19758,7 +19607,7 @@
                 <a:ea typeface="Trebuchet MS" pitchFamily="34" charset="-122"/>
                 <a:cs typeface="Trebuchet MS" pitchFamily="34" charset="-120"/>
               </a:rPr>
-              <a:t>excited</a:t>
+              <a:t>exclaim</a:t>
             </a:r>
             <a:endParaRPr lang="en-US" sz="2800" dirty="0"/>
           </a:p>
@@ -19838,7 +19687,7 @@
         </p:nvSpPr>
         <p:spPr>
           <a:xfrm>
-            <a:off x="2221992" y="2258568"/>
+            <a:off x="2938272" y="2258568"/>
             <a:ext cx="1828800" cy="292608"/>
           </a:xfrm>
           <a:prstGeom prst="rect">
@@ -19872,7 +19721,7 @@
         </p:nvSpPr>
         <p:spPr>
           <a:xfrm>
-            <a:off x="2221992" y="2258568"/>
+            <a:off x="2938272" y="2258568"/>
             <a:ext cx="1828800" cy="292608"/>
           </a:xfrm>
           <a:prstGeom prst="rect">
@@ -19911,7 +19760,7 @@
         </p:nvSpPr>
         <p:spPr>
           <a:xfrm>
-            <a:off x="2221992" y="2569464"/>
+            <a:off x="2938272" y="2569464"/>
             <a:ext cx="1828800" cy="201168"/>
           </a:xfrm>
           <a:prstGeom prst="rect">
@@ -19950,7 +19799,7 @@
         </p:nvSpPr>
         <p:spPr>
           <a:xfrm>
-            <a:off x="4370832" y="2258568"/>
+            <a:off x="5803392" y="2258568"/>
             <a:ext cx="1828800" cy="292608"/>
           </a:xfrm>
           <a:prstGeom prst="rect">
@@ -19984,7 +19833,7 @@
         </p:nvSpPr>
         <p:spPr>
           <a:xfrm>
-            <a:off x="4370832" y="2258568"/>
+            <a:off x="5803392" y="2258568"/>
             <a:ext cx="1828800" cy="292608"/>
           </a:xfrm>
           <a:prstGeom prst="rect">
@@ -20009,7 +19858,7 @@
                 <a:ea typeface="Trebuchet MS" pitchFamily="34" charset="-122"/>
                 <a:cs typeface="Trebuchet MS" pitchFamily="34" charset="-120"/>
               </a:rPr>
-              <a:t>cit</a:t>
+              <a:t>claim</a:t>
             </a:r>
             <a:endParaRPr lang="en-US" sz="1300" dirty="0"/>
           </a:p>
@@ -20023,7 +19872,7 @@
         </p:nvSpPr>
         <p:spPr>
           <a:xfrm>
-            <a:off x="4370832" y="2569464"/>
+            <a:off x="5803392" y="2569464"/>
             <a:ext cx="1828800" cy="201168"/>
           </a:xfrm>
           <a:prstGeom prst="rect">
@@ -20048,7 +19897,7 @@
                 <a:ea typeface="Calibri" pitchFamily="34" charset="-122"/>
                 <a:cs typeface="Calibri" pitchFamily="34" charset="-120"/>
               </a:rPr>
-              <a:t>move, rouse</a:t>
+              <a:t>call out, shout</a:t>
             </a:r>
             <a:endParaRPr lang="en-US" sz="850" dirty="0"/>
           </a:p>
@@ -20062,30 +19911,23 @@
         </p:nvSpPr>
         <p:spPr>
           <a:xfrm>
-            <a:off x="6519672" y="2258568"/>
-            <a:ext cx="1828800" cy="292608"/>
+            <a:off x="365760" y="3273552"/>
+            <a:ext cx="1371600" cy="658368"/>
           </a:xfrm>
           <a:prstGeom prst="rect">
             <a:avLst>
-              <a:gd name="adj" fmla="val 25000"/>
+              <a:gd name="adj" fmla="val 8333"/>
             </a:avLst>
           </a:prstGeom>
           <a:solidFill>
-            <a:srgbClr val="FCE7F3"/>
-          </a:solidFill>
-          <a:ln w="19050">
-            <a:solidFill>
-              <a:srgbClr val="DB2777"/>
-            </a:solidFill>
-            <a:prstDash val="solid"/>
-          </a:ln>
-          <a:effectLst>
-            <a:outerShdw sx="100000" sy="100000" kx="0" ky="0" algn="bl" rotWithShape="0" blurRad="101600" dist="38100" dir="8100000">
-              <a:srgbClr val="000000">
-                <a:alpha val="12000"/>
-              </a:srgbClr>
-            </a:outerShdw>
-          </a:effectLst>
+            <a:srgbClr val="E2E8F0"/>
+          </a:solidFill>
+          <a:ln w="12700">
+            <a:solidFill>
+              <a:srgbClr val="E2E8F0"/>
+            </a:solidFill>
+            <a:prstDash val="solid"/>
+          </a:ln>
         </p:spPr>
       </p:sp>
       <p:sp>
@@ -20096,8 +19938,8 @@
         </p:nvSpPr>
         <p:spPr>
           <a:xfrm>
-            <a:off x="6519672" y="2258568"/>
-            <a:ext cx="1828800" cy="292608"/>
+            <a:off x="365760" y="3273552"/>
+            <a:ext cx="1371600" cy="658368"/>
           </a:xfrm>
           <a:prstGeom prst="rect">
             <a:avLst/>
@@ -20113,108 +19955,30 @@
               <a:buNone/>
             </a:pPr>
             <a:r>
-              <a:rPr lang="en-US" sz="1300" b="1" dirty="0">
-                <a:solidFill>
-                  <a:srgbClr val="9D174D"/>
+              <a:rPr lang="en-US" sz="1100" b="1" dirty="0">
+                <a:solidFill>
+                  <a:srgbClr val="475569"/>
                 </a:solidFill>
                 <a:latin typeface="Trebuchet MS" pitchFamily="34" charset="0"/>
                 <a:ea typeface="Trebuchet MS" pitchFamily="34" charset="-122"/>
                 <a:cs typeface="Trebuchet MS" pitchFamily="34" charset="-120"/>
               </a:rPr>
-              <a:t>ed</a:t>
-            </a:r>
-            <a:endParaRPr lang="en-US" sz="1300" dirty="0"/>
-          </a:p>
-        </p:txBody>
-      </p:sp>
-      <p:sp>
-        <p:nvSpPr>
-          <p:cNvPr id="24" name="Text 22"/>
-          <p:cNvSpPr/>
-          <p:nvPr/>
-        </p:nvSpPr>
-        <p:spPr>
-          <a:xfrm>
-            <a:off x="6519672" y="2569464"/>
-            <a:ext cx="1828800" cy="201168"/>
-          </a:xfrm>
-          <a:prstGeom prst="rect">
-            <a:avLst/>
-          </a:prstGeom>
-          <a:noFill/>
-          <a:ln/>
-        </p:spPr>
-        <p:txBody>
-          <a:bodyPr wrap="square" lIns="0" tIns="0" rIns="0" bIns="0" rtlCol="0" anchor="t"/>
-          <a:lstStyle/>
-          <a:p>
-            <a:pPr algn="ctr" indent="0" marL="0">
-              <a:buNone/>
-            </a:pPr>
-            <a:r>
-              <a:rPr lang="en-US" sz="850" dirty="0">
-                <a:solidFill>
-                  <a:srgbClr val="475569"/>
-                </a:solidFill>
-                <a:latin typeface="Calibri" pitchFamily="34" charset="0"/>
-                <a:ea typeface="Calibri" pitchFamily="34" charset="-122"/>
-                <a:cs typeface="Calibri" pitchFamily="34" charset="-120"/>
-              </a:rPr>
-              <a:t>past tense</a:t>
-            </a:r>
-            <a:endParaRPr lang="en-US" sz="850" dirty="0"/>
-          </a:p>
-        </p:txBody>
-      </p:sp>
-      <p:sp>
-        <p:nvSpPr>
-          <p:cNvPr id="25" name="Text 23"/>
-          <p:cNvSpPr/>
-          <p:nvPr/>
-        </p:nvSpPr>
-        <p:spPr>
-          <a:xfrm>
-            <a:off x="6519672" y="2752344"/>
-            <a:ext cx="1828800" cy="182880"/>
-          </a:xfrm>
-          <a:prstGeom prst="rect">
-            <a:avLst/>
-          </a:prstGeom>
-          <a:noFill/>
-          <a:ln/>
-        </p:spPr>
-        <p:txBody>
-          <a:bodyPr wrap="square" lIns="0" tIns="0" rIns="0" bIns="0" rtlCol="0" anchor="t"/>
-          <a:lstStyle/>
-          <a:p>
-            <a:pPr algn="ctr" indent="0" marL="0">
-              <a:buNone/>
-            </a:pPr>
-            <a:r>
-              <a:rPr lang="en-US" sz="700" i="1" dirty="0">
-                <a:solidFill>
-                  <a:srgbClr val="94A3B8"/>
-                </a:solidFill>
-                <a:latin typeface="Calibri" pitchFamily="34" charset="0"/>
-                <a:ea typeface="Calibri" pitchFamily="34" charset="-122"/>
-                <a:cs typeface="Calibri" pitchFamily="34" charset="-120"/>
-              </a:rPr>
-              <a:t>'e' dropped before vowel suffix</a:t>
-            </a:r>
-            <a:endParaRPr lang="en-US" sz="700" dirty="0"/>
-          </a:p>
-        </p:txBody>
-      </p:sp>
-      <p:sp>
-        <p:nvSpPr>
-          <p:cNvPr id="26" name="Shape 24"/>
-          <p:cNvSpPr/>
-          <p:nvPr/>
-        </p:nvSpPr>
-        <p:spPr>
-          <a:xfrm>
-            <a:off x="365760" y="3273552"/>
-            <a:ext cx="1371600" cy="658368"/>
+              <a:t>Syllables</a:t>
+            </a:r>
+            <a:endParaRPr lang="en-US" sz="1100" dirty="0"/>
+          </a:p>
+        </p:txBody>
+      </p:sp>
+      <p:sp>
+        <p:nvSpPr>
+          <p:cNvPr id="24" name="Shape 22"/>
+          <p:cNvSpPr/>
+          <p:nvPr/>
+        </p:nvSpPr>
+        <p:spPr>
+          <a:xfrm>
+            <a:off x="1874520" y="3273552"/>
+            <a:ext cx="6903720" cy="658368"/>
           </a:xfrm>
           <a:prstGeom prst="rect">
             <a:avLst>
@@ -20222,26 +19986,53 @@
             </a:avLst>
           </a:prstGeom>
           <a:solidFill>
-            <a:srgbClr val="E2E8F0"/>
-          </a:solidFill>
-          <a:ln w="12700">
-            <a:solidFill>
-              <a:srgbClr val="E2E8F0"/>
-            </a:solidFill>
-            <a:prstDash val="solid"/>
-          </a:ln>
-        </p:spPr>
-      </p:sp>
-      <p:sp>
-        <p:nvSpPr>
-          <p:cNvPr id="27" name="Text 25"/>
-          <p:cNvSpPr/>
-          <p:nvPr/>
-        </p:nvSpPr>
-        <p:spPr>
-          <a:xfrm>
-            <a:off x="365760" y="3273552"/>
-            <a:ext cx="1371600" cy="658368"/>
+            <a:srgbClr val="CCFBF1"/>
+          </a:solidFill>
+          <a:ln w="12700">
+            <a:solidFill>
+              <a:srgbClr val="0D9488"/>
+            </a:solidFill>
+            <a:prstDash val="solid"/>
+          </a:ln>
+        </p:spPr>
+      </p:sp>
+      <p:sp>
+        <p:nvSpPr>
+          <p:cNvPr id="25" name="Shape 23"/>
+          <p:cNvSpPr/>
+          <p:nvPr/>
+        </p:nvSpPr>
+        <p:spPr>
+          <a:xfrm>
+            <a:off x="2999232" y="3364992"/>
+            <a:ext cx="1645920" cy="475488"/>
+          </a:xfrm>
+          <a:prstGeom prst="rect">
+            <a:avLst>
+              <a:gd name="adj" fmla="val 9615"/>
+            </a:avLst>
+          </a:prstGeom>
+          <a:solidFill>
+            <a:srgbClr val="FFFFFF"/>
+          </a:solidFill>
+          <a:ln w="12700">
+            <a:solidFill>
+              <a:srgbClr val="0D9488"/>
+            </a:solidFill>
+            <a:prstDash val="solid"/>
+          </a:ln>
+        </p:spPr>
+      </p:sp>
+      <p:sp>
+        <p:nvSpPr>
+          <p:cNvPr id="26" name="Text 24"/>
+          <p:cNvSpPr/>
+          <p:nvPr/>
+        </p:nvSpPr>
+        <p:spPr>
+          <a:xfrm>
+            <a:off x="2999232" y="3364992"/>
+            <a:ext cx="1645920" cy="475488"/>
           </a:xfrm>
           <a:prstGeom prst="rect">
             <a:avLst/>
@@ -20257,17 +20048,56 @@
               <a:buNone/>
             </a:pPr>
             <a:r>
-              <a:rPr lang="en-US" sz="1100" b="1" dirty="0">
-                <a:solidFill>
-                  <a:srgbClr val="475569"/>
+              <a:rPr lang="en-US" sz="1400" b="1" dirty="0">
+                <a:solidFill>
+                  <a:srgbClr val="0D9488"/>
                 </a:solidFill>
                 <a:latin typeface="Trebuchet MS" pitchFamily="34" charset="0"/>
                 <a:ea typeface="Trebuchet MS" pitchFamily="34" charset="-122"/>
                 <a:cs typeface="Trebuchet MS" pitchFamily="34" charset="-120"/>
               </a:rPr>
-              <a:t>Syllables</a:t>
-            </a:r>
-            <a:endParaRPr lang="en-US" sz="1100" dirty="0"/>
+              <a:t>ex</a:t>
+            </a:r>
+            <a:endParaRPr lang="en-US" sz="1400" dirty="0"/>
+          </a:p>
+        </p:txBody>
+      </p:sp>
+      <p:sp>
+        <p:nvSpPr>
+          <p:cNvPr id="27" name="Text 25"/>
+          <p:cNvSpPr/>
+          <p:nvPr/>
+        </p:nvSpPr>
+        <p:spPr>
+          <a:xfrm>
+            <a:off x="4645152" y="3364992"/>
+            <a:ext cx="1097280" cy="475488"/>
+          </a:xfrm>
+          <a:prstGeom prst="rect">
+            <a:avLst/>
+          </a:prstGeom>
+          <a:noFill/>
+          <a:ln/>
+        </p:spPr>
+        <p:txBody>
+          <a:bodyPr wrap="square" lIns="0" tIns="0" rIns="0" bIns="0" rtlCol="0" anchor="ctr"/>
+          <a:lstStyle/>
+          <a:p>
+            <a:pPr algn="ctr" indent="0" marL="0">
+              <a:buNone/>
+            </a:pPr>
+            <a:r>
+              <a:rPr lang="en-US" sz="1600" b="1" dirty="0">
+                <a:solidFill>
+                  <a:srgbClr val="0D9488"/>
+                </a:solidFill>
+                <a:latin typeface="Trebuchet MS" pitchFamily="34" charset="0"/>
+                <a:ea typeface="Trebuchet MS" pitchFamily="34" charset="-122"/>
+                <a:cs typeface="Trebuchet MS" pitchFamily="34" charset="-120"/>
+              </a:rPr>
+              <a:t>·</a:t>
+            </a:r>
+            <a:endParaRPr lang="en-US" sz="1600" dirty="0"/>
           </a:p>
         </p:txBody>
       </p:sp>
@@ -20279,34 +20109,7 @@
         </p:nvSpPr>
         <p:spPr>
           <a:xfrm>
-            <a:off x="1874520" y="3273552"/>
-            <a:ext cx="6903720" cy="658368"/>
-          </a:xfrm>
-          <a:prstGeom prst="rect">
-            <a:avLst>
-              <a:gd name="adj" fmla="val 8333"/>
-            </a:avLst>
-          </a:prstGeom>
-          <a:solidFill>
-            <a:srgbClr val="CCFBF1"/>
-          </a:solidFill>
-          <a:ln w="12700">
-            <a:solidFill>
-              <a:srgbClr val="0D9488"/>
-            </a:solidFill>
-            <a:prstDash val="solid"/>
-          </a:ln>
-        </p:spPr>
-      </p:sp>
-      <p:sp>
-        <p:nvSpPr>
-          <p:cNvPr id="29" name="Shape 27"/>
-          <p:cNvSpPr/>
-          <p:nvPr/>
-        </p:nvSpPr>
-        <p:spPr>
-          <a:xfrm>
-            <a:off x="2313432" y="3364992"/>
+            <a:off x="5742432" y="3364992"/>
             <a:ext cx="1645920" cy="475488"/>
           </a:xfrm>
           <a:prstGeom prst="rect">
@@ -20327,13 +20130,13 @@
       </p:sp>
       <p:sp>
         <p:nvSpPr>
-          <p:cNvPr id="30" name="Text 28"/>
-          <p:cNvSpPr/>
-          <p:nvPr/>
-        </p:nvSpPr>
-        <p:spPr>
-          <a:xfrm>
-            <a:off x="2313432" y="3364992"/>
+          <p:cNvPr id="29" name="Text 27"/>
+          <p:cNvSpPr/>
+          <p:nvPr/>
+        </p:nvSpPr>
+        <p:spPr>
+          <a:xfrm>
+            <a:off x="5742432" y="3364992"/>
             <a:ext cx="1645920" cy="475488"/>
           </a:xfrm>
           <a:prstGeom prst="rect">
@@ -20358,7 +20161,7 @@
                 <a:ea typeface="Trebuchet MS" pitchFamily="34" charset="-122"/>
                 <a:cs typeface="Trebuchet MS" pitchFamily="34" charset="-120"/>
               </a:rPr>
-              <a:t>ex</a:t>
+              <a:t>claim</a:t>
             </a:r>
             <a:endParaRPr lang="en-US" sz="1400" dirty="0"/>
           </a:p>
@@ -20366,14 +20169,41 @@
       </p:sp>
       <p:sp>
         <p:nvSpPr>
+          <p:cNvPr id="30" name="Shape 28"/>
+          <p:cNvSpPr/>
+          <p:nvPr/>
+        </p:nvSpPr>
+        <p:spPr>
+          <a:xfrm>
+            <a:off x="365760" y="4096512"/>
+            <a:ext cx="1371600" cy="804672"/>
+          </a:xfrm>
+          <a:prstGeom prst="rect">
+            <a:avLst>
+              <a:gd name="adj" fmla="val 6818"/>
+            </a:avLst>
+          </a:prstGeom>
+          <a:solidFill>
+            <a:srgbClr val="E2E8F0"/>
+          </a:solidFill>
+          <a:ln w="12700">
+            <a:solidFill>
+              <a:srgbClr val="E2E8F0"/>
+            </a:solidFill>
+            <a:prstDash val="solid"/>
+          </a:ln>
+        </p:spPr>
+      </p:sp>
+      <p:sp>
+        <p:nvSpPr>
           <p:cNvPr id="31" name="Text 29"/>
           <p:cNvSpPr/>
           <p:nvPr/>
         </p:nvSpPr>
         <p:spPr>
           <a:xfrm>
-            <a:off x="3959352" y="3364992"/>
-            <a:ext cx="411480" cy="475488"/>
+            <a:off x="365760" y="4096512"/>
+            <a:ext cx="1371600" cy="804672"/>
           </a:xfrm>
           <a:prstGeom prst="rect">
             <a:avLst/>
@@ -20389,17 +20219,17 @@
               <a:buNone/>
             </a:pPr>
             <a:r>
-              <a:rPr lang="en-US" sz="1600" b="1" dirty="0">
-                <a:solidFill>
-                  <a:srgbClr val="0D9488"/>
+              <a:rPr lang="en-US" sz="1100" b="1" dirty="0">
+                <a:solidFill>
+                  <a:srgbClr val="475569"/>
                 </a:solidFill>
                 <a:latin typeface="Trebuchet MS" pitchFamily="34" charset="0"/>
                 <a:ea typeface="Trebuchet MS" pitchFamily="34" charset="-122"/>
                 <a:cs typeface="Trebuchet MS" pitchFamily="34" charset="-120"/>
               </a:rPr>
-              <a:t>·</a:t>
-            </a:r>
-            <a:endParaRPr lang="en-US" sz="1600" dirty="0"/>
+              <a:t>Phonemes</a:t>
+            </a:r>
+            <a:endParaRPr lang="en-US" sz="1100" dirty="0"/>
           </a:p>
         </p:txBody>
       </p:sp>
@@ -20411,179 +20241,8 @@
         </p:nvSpPr>
         <p:spPr>
           <a:xfrm>
-            <a:off x="4370832" y="3364992"/>
-            <a:ext cx="1645920" cy="475488"/>
-          </a:xfrm>
-          <a:prstGeom prst="rect">
-            <a:avLst>
-              <a:gd name="adj" fmla="val 9615"/>
-            </a:avLst>
-          </a:prstGeom>
-          <a:solidFill>
-            <a:srgbClr val="FFFFFF"/>
-          </a:solidFill>
-          <a:ln w="12700">
-            <a:solidFill>
-              <a:srgbClr val="0D9488"/>
-            </a:solidFill>
-            <a:prstDash val="solid"/>
-          </a:ln>
-        </p:spPr>
-      </p:sp>
-      <p:sp>
-        <p:nvSpPr>
-          <p:cNvPr id="33" name="Text 31"/>
-          <p:cNvSpPr/>
-          <p:nvPr/>
-        </p:nvSpPr>
-        <p:spPr>
-          <a:xfrm>
-            <a:off x="4370832" y="3364992"/>
-            <a:ext cx="1645920" cy="475488"/>
-          </a:xfrm>
-          <a:prstGeom prst="rect">
-            <a:avLst/>
-          </a:prstGeom>
-          <a:noFill/>
-          <a:ln/>
-        </p:spPr>
-        <p:txBody>
-          <a:bodyPr wrap="square" lIns="0" tIns="0" rIns="0" bIns="0" rtlCol="0" anchor="ctr"/>
-          <a:lstStyle/>
-          <a:p>
-            <a:pPr algn="ctr" indent="0" marL="0">
-              <a:buNone/>
-            </a:pPr>
-            <a:r>
-              <a:rPr lang="en-US" sz="1400" b="1" dirty="0">
-                <a:solidFill>
-                  <a:srgbClr val="0D9488"/>
-                </a:solidFill>
-                <a:latin typeface="Trebuchet MS" pitchFamily="34" charset="0"/>
-                <a:ea typeface="Trebuchet MS" pitchFamily="34" charset="-122"/>
-                <a:cs typeface="Trebuchet MS" pitchFamily="34" charset="-120"/>
-              </a:rPr>
-              <a:t>ci</a:t>
-            </a:r>
-            <a:endParaRPr lang="en-US" sz="1400" dirty="0"/>
-          </a:p>
-        </p:txBody>
-      </p:sp>
-      <p:sp>
-        <p:nvSpPr>
-          <p:cNvPr id="34" name="Text 32"/>
-          <p:cNvSpPr/>
-          <p:nvPr/>
-        </p:nvSpPr>
-        <p:spPr>
-          <a:xfrm>
-            <a:off x="6016752" y="3364992"/>
-            <a:ext cx="411480" cy="475488"/>
-          </a:xfrm>
-          <a:prstGeom prst="rect">
-            <a:avLst/>
-          </a:prstGeom>
-          <a:noFill/>
-          <a:ln/>
-        </p:spPr>
-        <p:txBody>
-          <a:bodyPr wrap="square" lIns="0" tIns="0" rIns="0" bIns="0" rtlCol="0" anchor="ctr"/>
-          <a:lstStyle/>
-          <a:p>
-            <a:pPr algn="ctr" indent="0" marL="0">
-              <a:buNone/>
-            </a:pPr>
-            <a:r>
-              <a:rPr lang="en-US" sz="1600" b="1" dirty="0">
-                <a:solidFill>
-                  <a:srgbClr val="0D9488"/>
-                </a:solidFill>
-                <a:latin typeface="Trebuchet MS" pitchFamily="34" charset="0"/>
-                <a:ea typeface="Trebuchet MS" pitchFamily="34" charset="-122"/>
-                <a:cs typeface="Trebuchet MS" pitchFamily="34" charset="-120"/>
-              </a:rPr>
-              <a:t>·</a:t>
-            </a:r>
-            <a:endParaRPr lang="en-US" sz="1600" dirty="0"/>
-          </a:p>
-        </p:txBody>
-      </p:sp>
-      <p:sp>
-        <p:nvSpPr>
-          <p:cNvPr id="35" name="Shape 33"/>
-          <p:cNvSpPr/>
-          <p:nvPr/>
-        </p:nvSpPr>
-        <p:spPr>
-          <a:xfrm>
-            <a:off x="6428232" y="3364992"/>
-            <a:ext cx="1645920" cy="475488"/>
-          </a:xfrm>
-          <a:prstGeom prst="rect">
-            <a:avLst>
-              <a:gd name="adj" fmla="val 9615"/>
-            </a:avLst>
-          </a:prstGeom>
-          <a:solidFill>
-            <a:srgbClr val="FFFFFF"/>
-          </a:solidFill>
-          <a:ln w="12700">
-            <a:solidFill>
-              <a:srgbClr val="0D9488"/>
-            </a:solidFill>
-            <a:prstDash val="solid"/>
-          </a:ln>
-        </p:spPr>
-      </p:sp>
-      <p:sp>
-        <p:nvSpPr>
-          <p:cNvPr id="36" name="Text 34"/>
-          <p:cNvSpPr/>
-          <p:nvPr/>
-        </p:nvSpPr>
-        <p:spPr>
-          <a:xfrm>
-            <a:off x="6428232" y="3364992"/>
-            <a:ext cx="1645920" cy="475488"/>
-          </a:xfrm>
-          <a:prstGeom prst="rect">
-            <a:avLst/>
-          </a:prstGeom>
-          <a:noFill/>
-          <a:ln/>
-        </p:spPr>
-        <p:txBody>
-          <a:bodyPr wrap="square" lIns="0" tIns="0" rIns="0" bIns="0" rtlCol="0" anchor="ctr"/>
-          <a:lstStyle/>
-          <a:p>
-            <a:pPr algn="ctr" indent="0" marL="0">
-              <a:buNone/>
-            </a:pPr>
-            <a:r>
-              <a:rPr lang="en-US" sz="1400" b="1" dirty="0">
-                <a:solidFill>
-                  <a:srgbClr val="0D9488"/>
-                </a:solidFill>
-                <a:latin typeface="Trebuchet MS" pitchFamily="34" charset="0"/>
-                <a:ea typeface="Trebuchet MS" pitchFamily="34" charset="-122"/>
-                <a:cs typeface="Trebuchet MS" pitchFamily="34" charset="-120"/>
-              </a:rPr>
-              <a:t>ted</a:t>
-            </a:r>
-            <a:endParaRPr lang="en-US" sz="1400" dirty="0"/>
-          </a:p>
-        </p:txBody>
-      </p:sp>
-      <p:sp>
-        <p:nvSpPr>
-          <p:cNvPr id="37" name="Shape 35"/>
-          <p:cNvSpPr/>
-          <p:nvPr/>
-        </p:nvSpPr>
-        <p:spPr>
-          <a:xfrm>
-            <a:off x="365760" y="4096512"/>
-            <a:ext cx="1371600" cy="804672"/>
+            <a:off x="1874520" y="4096512"/>
+            <a:ext cx="6903720" cy="804672"/>
           </a:xfrm>
           <a:prstGeom prst="rect">
             <a:avLst>
@@ -20591,85 +20250,19 @@
             </a:avLst>
           </a:prstGeom>
           <a:solidFill>
-            <a:srgbClr val="E2E8F0"/>
+            <a:srgbClr val="F8FAFC"/>
           </a:solidFill>
           <a:ln w="12700">
             <a:solidFill>
               <a:srgbClr val="E2E8F0"/>
             </a:solidFill>
-            <a:prstDash val="solid"/>
-          </a:ln>
-        </p:spPr>
-      </p:sp>
-      <p:sp>
-        <p:nvSpPr>
-          <p:cNvPr id="38" name="Text 36"/>
-          <p:cNvSpPr/>
-          <p:nvPr/>
-        </p:nvSpPr>
-        <p:spPr>
-          <a:xfrm>
-            <a:off x="365760" y="4096512"/>
-            <a:ext cx="1371600" cy="804672"/>
-          </a:xfrm>
-          <a:prstGeom prst="rect">
-            <a:avLst/>
-          </a:prstGeom>
-          <a:noFill/>
-          <a:ln/>
-        </p:spPr>
-        <p:txBody>
-          <a:bodyPr wrap="square" lIns="0" tIns="0" rIns="0" bIns="0" rtlCol="0" anchor="ctr"/>
-          <a:lstStyle/>
-          <a:p>
-            <a:pPr algn="ctr" indent="0" marL="0">
-              <a:buNone/>
-            </a:pPr>
-            <a:r>
-              <a:rPr lang="en-US" sz="1100" b="1" dirty="0">
-                <a:solidFill>
-                  <a:srgbClr val="475569"/>
-                </a:solidFill>
-                <a:latin typeface="Trebuchet MS" pitchFamily="34" charset="0"/>
-                <a:ea typeface="Trebuchet MS" pitchFamily="34" charset="-122"/>
-                <a:cs typeface="Trebuchet MS" pitchFamily="34" charset="-120"/>
-              </a:rPr>
-              <a:t>Phonemes</a:t>
-            </a:r>
-            <a:endParaRPr lang="en-US" sz="1100" dirty="0"/>
-          </a:p>
-        </p:txBody>
-      </p:sp>
-      <p:sp>
-        <p:nvSpPr>
-          <p:cNvPr id="39" name="Shape 37"/>
-          <p:cNvSpPr/>
-          <p:nvPr/>
-        </p:nvSpPr>
-        <p:spPr>
-          <a:xfrm>
-            <a:off x="1874520" y="4096512"/>
-            <a:ext cx="6903720" cy="804672"/>
-          </a:xfrm>
-          <a:prstGeom prst="rect">
-            <a:avLst>
-              <a:gd name="adj" fmla="val 6818"/>
-            </a:avLst>
-          </a:prstGeom>
-          <a:solidFill>
-            <a:srgbClr val="F8FAFC"/>
-          </a:solidFill>
-          <a:ln w="12700">
-            <a:solidFill>
-              <a:srgbClr val="E2E8F0"/>
-            </a:solidFill>
             <a:prstDash val="dash"/>
           </a:ln>
         </p:spPr>
       </p:sp>
       <p:sp>
         <p:nvSpPr>
-          <p:cNvPr id="40" name="Text 38"/>
+          <p:cNvPr id="33" name="Text 31"/>
           <p:cNvSpPr/>
           <p:nvPr/>
         </p:nvSpPr>
@@ -20992,7 +20585,7 @@
                 <a:ea typeface="Calibri" pitchFamily="34" charset="-122"/>
                 <a:cs typeface="Calibri" pitchFamily="34" charset="-120"/>
               </a:rPr>
-              <a:t>Word Labs  •  wordlabs.app  •  Prefix: 'ex-' = out, out of, beyond</a:t>
+              <a:t>Word Labs  •  wordlabs.app  •  Prefix: 'ex-' = out, out of, away</a:t>
             </a:r>
             <a:endParaRPr lang="en-US" sz="800" dirty="0"/>
           </a:p>
@@ -21131,7 +20724,7 @@
                 <a:ea typeface="Trebuchet MS" pitchFamily="34" charset="-122"/>
                 <a:cs typeface="Trebuchet MS" pitchFamily="34" charset="-120"/>
               </a:rPr>
-              <a:t>excited</a:t>
+              <a:t>exclaim</a:t>
             </a:r>
             <a:endParaRPr lang="en-US" sz="2800" dirty="0"/>
           </a:p>
@@ -21211,7 +20804,7 @@
         </p:nvSpPr>
         <p:spPr>
           <a:xfrm>
-            <a:off x="2221992" y="2258568"/>
+            <a:off x="2938272" y="2258568"/>
             <a:ext cx="1828800" cy="292608"/>
           </a:xfrm>
           <a:prstGeom prst="rect">
@@ -21245,7 +20838,7 @@
         </p:nvSpPr>
         <p:spPr>
           <a:xfrm>
-            <a:off x="2221992" y="2258568"/>
+            <a:off x="2938272" y="2258568"/>
             <a:ext cx="1828800" cy="292608"/>
           </a:xfrm>
           <a:prstGeom prst="rect">
@@ -21284,7 +20877,7 @@
         </p:nvSpPr>
         <p:spPr>
           <a:xfrm>
-            <a:off x="2221992" y="2569464"/>
+            <a:off x="2938272" y="2569464"/>
             <a:ext cx="1828800" cy="201168"/>
           </a:xfrm>
           <a:prstGeom prst="rect">
@@ -21323,7 +20916,7 @@
         </p:nvSpPr>
         <p:spPr>
           <a:xfrm>
-            <a:off x="4370832" y="2258568"/>
+            <a:off x="5803392" y="2258568"/>
             <a:ext cx="1828800" cy="292608"/>
           </a:xfrm>
           <a:prstGeom prst="rect">
@@ -21357,7 +20950,7 @@
         </p:nvSpPr>
         <p:spPr>
           <a:xfrm>
-            <a:off x="4370832" y="2258568"/>
+            <a:off x="5803392" y="2258568"/>
             <a:ext cx="1828800" cy="292608"/>
           </a:xfrm>
           <a:prstGeom prst="rect">
@@ -21382,7 +20975,7 @@
                 <a:ea typeface="Trebuchet MS" pitchFamily="34" charset="-122"/>
                 <a:cs typeface="Trebuchet MS" pitchFamily="34" charset="-120"/>
               </a:rPr>
-              <a:t>cit</a:t>
+              <a:t>claim</a:t>
             </a:r>
             <a:endParaRPr lang="en-US" sz="1300" dirty="0"/>
           </a:p>
@@ -21396,7 +20989,7 @@
         </p:nvSpPr>
         <p:spPr>
           <a:xfrm>
-            <a:off x="4370832" y="2569464"/>
+            <a:off x="5803392" y="2569464"/>
             <a:ext cx="1828800" cy="201168"/>
           </a:xfrm>
           <a:prstGeom prst="rect">
@@ -21421,7 +21014,7 @@
                 <a:ea typeface="Calibri" pitchFamily="34" charset="-122"/>
                 <a:cs typeface="Calibri" pitchFamily="34" charset="-120"/>
               </a:rPr>
-              <a:t>move, rouse</a:t>
+              <a:t>call out, shout</a:t>
             </a:r>
             <a:endParaRPr lang="en-US" sz="850" dirty="0"/>
           </a:p>
@@ -21435,30 +21028,23 @@
         </p:nvSpPr>
         <p:spPr>
           <a:xfrm>
-            <a:off x="6519672" y="2258568"/>
-            <a:ext cx="1828800" cy="292608"/>
+            <a:off x="365760" y="3273552"/>
+            <a:ext cx="1371600" cy="658368"/>
           </a:xfrm>
           <a:prstGeom prst="rect">
             <a:avLst>
-              <a:gd name="adj" fmla="val 25000"/>
+              <a:gd name="adj" fmla="val 8333"/>
             </a:avLst>
           </a:prstGeom>
           <a:solidFill>
-            <a:srgbClr val="FCE7F3"/>
-          </a:solidFill>
-          <a:ln w="19050">
-            <a:solidFill>
-              <a:srgbClr val="DB2777"/>
-            </a:solidFill>
-            <a:prstDash val="solid"/>
-          </a:ln>
-          <a:effectLst>
-            <a:outerShdw sx="100000" sy="100000" kx="0" ky="0" algn="bl" rotWithShape="0" blurRad="101600" dist="38100" dir="8100000">
-              <a:srgbClr val="000000">
-                <a:alpha val="12000"/>
-              </a:srgbClr>
-            </a:outerShdw>
-          </a:effectLst>
+            <a:srgbClr val="E2E8F0"/>
+          </a:solidFill>
+          <a:ln w="12700">
+            <a:solidFill>
+              <a:srgbClr val="E2E8F0"/>
+            </a:solidFill>
+            <a:prstDash val="solid"/>
+          </a:ln>
         </p:spPr>
       </p:sp>
       <p:sp>
@@ -21469,8 +21055,8 @@
         </p:nvSpPr>
         <p:spPr>
           <a:xfrm>
-            <a:off x="6519672" y="2258568"/>
-            <a:ext cx="1828800" cy="292608"/>
+            <a:off x="365760" y="3273552"/>
+            <a:ext cx="1371600" cy="658368"/>
           </a:xfrm>
           <a:prstGeom prst="rect">
             <a:avLst/>
@@ -21486,108 +21072,30 @@
               <a:buNone/>
             </a:pPr>
             <a:r>
-              <a:rPr lang="en-US" sz="1300" b="1" dirty="0">
-                <a:solidFill>
-                  <a:srgbClr val="9D174D"/>
+              <a:rPr lang="en-US" sz="1100" b="1" dirty="0">
+                <a:solidFill>
+                  <a:srgbClr val="475569"/>
                 </a:solidFill>
                 <a:latin typeface="Trebuchet MS" pitchFamily="34" charset="0"/>
                 <a:ea typeface="Trebuchet MS" pitchFamily="34" charset="-122"/>
                 <a:cs typeface="Trebuchet MS" pitchFamily="34" charset="-120"/>
               </a:rPr>
-              <a:t>ed</a:t>
-            </a:r>
-            <a:endParaRPr lang="en-US" sz="1300" dirty="0"/>
-          </a:p>
-        </p:txBody>
-      </p:sp>
-      <p:sp>
-        <p:nvSpPr>
-          <p:cNvPr id="24" name="Text 22"/>
-          <p:cNvSpPr/>
-          <p:nvPr/>
-        </p:nvSpPr>
-        <p:spPr>
-          <a:xfrm>
-            <a:off x="6519672" y="2569464"/>
-            <a:ext cx="1828800" cy="201168"/>
-          </a:xfrm>
-          <a:prstGeom prst="rect">
-            <a:avLst/>
-          </a:prstGeom>
-          <a:noFill/>
-          <a:ln/>
-        </p:spPr>
-        <p:txBody>
-          <a:bodyPr wrap="square" lIns="0" tIns="0" rIns="0" bIns="0" rtlCol="0" anchor="t"/>
-          <a:lstStyle/>
-          <a:p>
-            <a:pPr algn="ctr" indent="0" marL="0">
-              <a:buNone/>
-            </a:pPr>
-            <a:r>
-              <a:rPr lang="en-US" sz="850" dirty="0">
-                <a:solidFill>
-                  <a:srgbClr val="475569"/>
-                </a:solidFill>
-                <a:latin typeface="Calibri" pitchFamily="34" charset="0"/>
-                <a:ea typeface="Calibri" pitchFamily="34" charset="-122"/>
-                <a:cs typeface="Calibri" pitchFamily="34" charset="-120"/>
-              </a:rPr>
-              <a:t>past tense</a:t>
-            </a:r>
-            <a:endParaRPr lang="en-US" sz="850" dirty="0"/>
-          </a:p>
-        </p:txBody>
-      </p:sp>
-      <p:sp>
-        <p:nvSpPr>
-          <p:cNvPr id="25" name="Text 23"/>
-          <p:cNvSpPr/>
-          <p:nvPr/>
-        </p:nvSpPr>
-        <p:spPr>
-          <a:xfrm>
-            <a:off x="6519672" y="2752344"/>
-            <a:ext cx="1828800" cy="182880"/>
-          </a:xfrm>
-          <a:prstGeom prst="rect">
-            <a:avLst/>
-          </a:prstGeom>
-          <a:noFill/>
-          <a:ln/>
-        </p:spPr>
-        <p:txBody>
-          <a:bodyPr wrap="square" lIns="0" tIns="0" rIns="0" bIns="0" rtlCol="0" anchor="t"/>
-          <a:lstStyle/>
-          <a:p>
-            <a:pPr algn="ctr" indent="0" marL="0">
-              <a:buNone/>
-            </a:pPr>
-            <a:r>
-              <a:rPr lang="en-US" sz="700" i="1" dirty="0">
-                <a:solidFill>
-                  <a:srgbClr val="94A3B8"/>
-                </a:solidFill>
-                <a:latin typeface="Calibri" pitchFamily="34" charset="0"/>
-                <a:ea typeface="Calibri" pitchFamily="34" charset="-122"/>
-                <a:cs typeface="Calibri" pitchFamily="34" charset="-120"/>
-              </a:rPr>
-              <a:t>'e' dropped before vowel suffix</a:t>
-            </a:r>
-            <a:endParaRPr lang="en-US" sz="700" dirty="0"/>
-          </a:p>
-        </p:txBody>
-      </p:sp>
-      <p:sp>
-        <p:nvSpPr>
-          <p:cNvPr id="26" name="Shape 24"/>
-          <p:cNvSpPr/>
-          <p:nvPr/>
-        </p:nvSpPr>
-        <p:spPr>
-          <a:xfrm>
-            <a:off x="365760" y="3273552"/>
-            <a:ext cx="1371600" cy="658368"/>
+              <a:t>Syllables</a:t>
+            </a:r>
+            <a:endParaRPr lang="en-US" sz="1100" dirty="0"/>
+          </a:p>
+        </p:txBody>
+      </p:sp>
+      <p:sp>
+        <p:nvSpPr>
+          <p:cNvPr id="24" name="Shape 22"/>
+          <p:cNvSpPr/>
+          <p:nvPr/>
+        </p:nvSpPr>
+        <p:spPr>
+          <a:xfrm>
+            <a:off x="1874520" y="3273552"/>
+            <a:ext cx="6903720" cy="658368"/>
           </a:xfrm>
           <a:prstGeom prst="rect">
             <a:avLst>
@@ -21595,26 +21103,53 @@
             </a:avLst>
           </a:prstGeom>
           <a:solidFill>
-            <a:srgbClr val="E2E8F0"/>
-          </a:solidFill>
-          <a:ln w="12700">
-            <a:solidFill>
-              <a:srgbClr val="E2E8F0"/>
-            </a:solidFill>
-            <a:prstDash val="solid"/>
-          </a:ln>
-        </p:spPr>
-      </p:sp>
-      <p:sp>
-        <p:nvSpPr>
-          <p:cNvPr id="27" name="Text 25"/>
-          <p:cNvSpPr/>
-          <p:nvPr/>
-        </p:nvSpPr>
-        <p:spPr>
-          <a:xfrm>
-            <a:off x="365760" y="3273552"/>
-            <a:ext cx="1371600" cy="658368"/>
+            <a:srgbClr val="CCFBF1"/>
+          </a:solidFill>
+          <a:ln w="12700">
+            <a:solidFill>
+              <a:srgbClr val="0D9488"/>
+            </a:solidFill>
+            <a:prstDash val="solid"/>
+          </a:ln>
+        </p:spPr>
+      </p:sp>
+      <p:sp>
+        <p:nvSpPr>
+          <p:cNvPr id="25" name="Shape 23"/>
+          <p:cNvSpPr/>
+          <p:nvPr/>
+        </p:nvSpPr>
+        <p:spPr>
+          <a:xfrm>
+            <a:off x="2999232" y="3364992"/>
+            <a:ext cx="1645920" cy="475488"/>
+          </a:xfrm>
+          <a:prstGeom prst="rect">
+            <a:avLst>
+              <a:gd name="adj" fmla="val 9615"/>
+            </a:avLst>
+          </a:prstGeom>
+          <a:solidFill>
+            <a:srgbClr val="FFFFFF"/>
+          </a:solidFill>
+          <a:ln w="12700">
+            <a:solidFill>
+              <a:srgbClr val="0D9488"/>
+            </a:solidFill>
+            <a:prstDash val="solid"/>
+          </a:ln>
+        </p:spPr>
+      </p:sp>
+      <p:sp>
+        <p:nvSpPr>
+          <p:cNvPr id="26" name="Text 24"/>
+          <p:cNvSpPr/>
+          <p:nvPr/>
+        </p:nvSpPr>
+        <p:spPr>
+          <a:xfrm>
+            <a:off x="2999232" y="3364992"/>
+            <a:ext cx="1645920" cy="475488"/>
           </a:xfrm>
           <a:prstGeom prst="rect">
             <a:avLst/>
@@ -21630,15 +21165,186 @@
               <a:buNone/>
             </a:pPr>
             <a:r>
-              <a:rPr lang="en-US" sz="1100" b="1" dirty="0">
-                <a:solidFill>
-                  <a:srgbClr val="475569"/>
+              <a:rPr lang="en-US" sz="1400" b="1" dirty="0">
+                <a:solidFill>
+                  <a:srgbClr val="0D9488"/>
                 </a:solidFill>
                 <a:latin typeface="Trebuchet MS" pitchFamily="34" charset="0"/>
                 <a:ea typeface="Trebuchet MS" pitchFamily="34" charset="-122"/>
                 <a:cs typeface="Trebuchet MS" pitchFamily="34" charset="-120"/>
               </a:rPr>
-              <a:t>Syllables</a:t>
+              <a:t>ex</a:t>
+            </a:r>
+            <a:endParaRPr lang="en-US" sz="1400" dirty="0"/>
+          </a:p>
+        </p:txBody>
+      </p:sp>
+      <p:sp>
+        <p:nvSpPr>
+          <p:cNvPr id="27" name="Text 25"/>
+          <p:cNvSpPr/>
+          <p:nvPr/>
+        </p:nvSpPr>
+        <p:spPr>
+          <a:xfrm>
+            <a:off x="4645152" y="3364992"/>
+            <a:ext cx="1097280" cy="475488"/>
+          </a:xfrm>
+          <a:prstGeom prst="rect">
+            <a:avLst/>
+          </a:prstGeom>
+          <a:noFill/>
+          <a:ln/>
+        </p:spPr>
+        <p:txBody>
+          <a:bodyPr wrap="square" lIns="0" tIns="0" rIns="0" bIns="0" rtlCol="0" anchor="ctr"/>
+          <a:lstStyle/>
+          <a:p>
+            <a:pPr algn="ctr" indent="0" marL="0">
+              <a:buNone/>
+            </a:pPr>
+            <a:r>
+              <a:rPr lang="en-US" sz="1600" b="1" dirty="0">
+                <a:solidFill>
+                  <a:srgbClr val="0D9488"/>
+                </a:solidFill>
+                <a:latin typeface="Trebuchet MS" pitchFamily="34" charset="0"/>
+                <a:ea typeface="Trebuchet MS" pitchFamily="34" charset="-122"/>
+                <a:cs typeface="Trebuchet MS" pitchFamily="34" charset="-120"/>
+              </a:rPr>
+              <a:t>·</a:t>
+            </a:r>
+            <a:endParaRPr lang="en-US" sz="1600" dirty="0"/>
+          </a:p>
+        </p:txBody>
+      </p:sp>
+      <p:sp>
+        <p:nvSpPr>
+          <p:cNvPr id="28" name="Shape 26"/>
+          <p:cNvSpPr/>
+          <p:nvPr/>
+        </p:nvSpPr>
+        <p:spPr>
+          <a:xfrm>
+            <a:off x="5742432" y="3364992"/>
+            <a:ext cx="1645920" cy="475488"/>
+          </a:xfrm>
+          <a:prstGeom prst="rect">
+            <a:avLst>
+              <a:gd name="adj" fmla="val 9615"/>
+            </a:avLst>
+          </a:prstGeom>
+          <a:solidFill>
+            <a:srgbClr val="FFFFFF"/>
+          </a:solidFill>
+          <a:ln w="12700">
+            <a:solidFill>
+              <a:srgbClr val="0D9488"/>
+            </a:solidFill>
+            <a:prstDash val="solid"/>
+          </a:ln>
+        </p:spPr>
+      </p:sp>
+      <p:sp>
+        <p:nvSpPr>
+          <p:cNvPr id="29" name="Text 27"/>
+          <p:cNvSpPr/>
+          <p:nvPr/>
+        </p:nvSpPr>
+        <p:spPr>
+          <a:xfrm>
+            <a:off x="5742432" y="3364992"/>
+            <a:ext cx="1645920" cy="475488"/>
+          </a:xfrm>
+          <a:prstGeom prst="rect">
+            <a:avLst/>
+          </a:prstGeom>
+          <a:noFill/>
+          <a:ln/>
+        </p:spPr>
+        <p:txBody>
+          <a:bodyPr wrap="square" lIns="0" tIns="0" rIns="0" bIns="0" rtlCol="0" anchor="ctr"/>
+          <a:lstStyle/>
+          <a:p>
+            <a:pPr algn="ctr" indent="0" marL="0">
+              <a:buNone/>
+            </a:pPr>
+            <a:r>
+              <a:rPr lang="en-US" sz="1400" b="1" dirty="0">
+                <a:solidFill>
+                  <a:srgbClr val="0D9488"/>
+                </a:solidFill>
+                <a:latin typeface="Trebuchet MS" pitchFamily="34" charset="0"/>
+                <a:ea typeface="Trebuchet MS" pitchFamily="34" charset="-122"/>
+                <a:cs typeface="Trebuchet MS" pitchFamily="34" charset="-120"/>
+              </a:rPr>
+              <a:t>claim</a:t>
+            </a:r>
+            <a:endParaRPr lang="en-US" sz="1400" dirty="0"/>
+          </a:p>
+        </p:txBody>
+      </p:sp>
+      <p:sp>
+        <p:nvSpPr>
+          <p:cNvPr id="30" name="Shape 28"/>
+          <p:cNvSpPr/>
+          <p:nvPr/>
+        </p:nvSpPr>
+        <p:spPr>
+          <a:xfrm>
+            <a:off x="365760" y="4096512"/>
+            <a:ext cx="1371600" cy="804672"/>
+          </a:xfrm>
+          <a:prstGeom prst="rect">
+            <a:avLst>
+              <a:gd name="adj" fmla="val 6818"/>
+            </a:avLst>
+          </a:prstGeom>
+          <a:solidFill>
+            <a:srgbClr val="E2E8F0"/>
+          </a:solidFill>
+          <a:ln w="12700">
+            <a:solidFill>
+              <a:srgbClr val="E2E8F0"/>
+            </a:solidFill>
+            <a:prstDash val="solid"/>
+          </a:ln>
+        </p:spPr>
+      </p:sp>
+      <p:sp>
+        <p:nvSpPr>
+          <p:cNvPr id="31" name="Text 29"/>
+          <p:cNvSpPr/>
+          <p:nvPr/>
+        </p:nvSpPr>
+        <p:spPr>
+          <a:xfrm>
+            <a:off x="365760" y="4096512"/>
+            <a:ext cx="1371600" cy="804672"/>
+          </a:xfrm>
+          <a:prstGeom prst="rect">
+            <a:avLst/>
+          </a:prstGeom>
+          <a:noFill/>
+          <a:ln/>
+        </p:spPr>
+        <p:txBody>
+          <a:bodyPr wrap="square" lIns="0" tIns="0" rIns="0" bIns="0" rtlCol="0" anchor="ctr"/>
+          <a:lstStyle/>
+          <a:p>
+            <a:pPr algn="ctr" indent="0" marL="0">
+              <a:buNone/>
+            </a:pPr>
+            <a:r>
+              <a:rPr lang="en-US" sz="1100" b="1" dirty="0">
+                <a:solidFill>
+                  <a:srgbClr val="475569"/>
+                </a:solidFill>
+                <a:latin typeface="Trebuchet MS" pitchFamily="34" charset="0"/>
+                <a:ea typeface="Trebuchet MS" pitchFamily="34" charset="-122"/>
+                <a:cs typeface="Trebuchet MS" pitchFamily="34" charset="-120"/>
+              </a:rPr>
+              <a:t>Phonemes</a:t>
             </a:r>
             <a:endParaRPr lang="en-US" sz="1100" dirty="0"/>
           </a:p>
@@ -21646,13 +21352,13 @@
       </p:sp>
       <p:sp>
         <p:nvSpPr>
-          <p:cNvPr id="28" name="Shape 26"/>
-          <p:cNvSpPr/>
-          <p:nvPr/>
-        </p:nvSpPr>
-        <p:spPr>
-          <a:xfrm>
-            <a:off x="1874520" y="3273552"/>
+          <p:cNvPr id="32" name="Shape 30"/>
+          <p:cNvSpPr/>
+          <p:nvPr/>
+        </p:nvSpPr>
+        <p:spPr>
+          <a:xfrm>
+            <a:off x="1874520" y="4096512"/>
             <a:ext cx="6903720" cy="658368"/>
           </a:xfrm>
           <a:prstGeom prst="rect">
@@ -21661,30 +21367,30 @@
             </a:avLst>
           </a:prstGeom>
           <a:solidFill>
-            <a:srgbClr val="CCFBF1"/>
-          </a:solidFill>
-          <a:ln w="12700">
-            <a:solidFill>
-              <a:srgbClr val="0D9488"/>
-            </a:solidFill>
-            <a:prstDash val="solid"/>
-          </a:ln>
-        </p:spPr>
-      </p:sp>
-      <p:sp>
-        <p:nvSpPr>
-          <p:cNvPr id="29" name="Shape 27"/>
-          <p:cNvSpPr/>
-          <p:nvPr/>
-        </p:nvSpPr>
-        <p:spPr>
-          <a:xfrm>
-            <a:off x="2313432" y="3364992"/>
-            <a:ext cx="1645920" cy="475488"/>
+            <a:srgbClr val="FCE7F3"/>
+          </a:solidFill>
+          <a:ln w="12700">
+            <a:solidFill>
+              <a:srgbClr val="DB2777"/>
+            </a:solidFill>
+            <a:prstDash val="solid"/>
+          </a:ln>
+        </p:spPr>
+      </p:sp>
+      <p:sp>
+        <p:nvSpPr>
+          <p:cNvPr id="33" name="Shape 31"/>
+          <p:cNvSpPr/>
+          <p:nvPr/>
+        </p:nvSpPr>
+        <p:spPr>
+          <a:xfrm>
+            <a:off x="2254649" y="4169664"/>
+            <a:ext cx="685800" cy="475488"/>
           </a:xfrm>
           <a:prstGeom prst="rect">
             <a:avLst>
-              <a:gd name="adj" fmla="val 9615"/>
+              <a:gd name="adj" fmla="val 7692"/>
             </a:avLst>
           </a:prstGeom>
           <a:solidFill>
@@ -21692,22 +21398,22 @@
           </a:solidFill>
           <a:ln w="12700">
             <a:solidFill>
-              <a:srgbClr val="0D9488"/>
-            </a:solidFill>
-            <a:prstDash val="solid"/>
-          </a:ln>
-        </p:spPr>
-      </p:sp>
-      <p:sp>
-        <p:nvSpPr>
-          <p:cNvPr id="30" name="Text 28"/>
-          <p:cNvSpPr/>
-          <p:nvPr/>
-        </p:nvSpPr>
-        <p:spPr>
-          <a:xfrm>
-            <a:off x="2313432" y="3364992"/>
-            <a:ext cx="1645920" cy="475488"/>
+              <a:srgbClr val="DB2777"/>
+            </a:solidFill>
+            <a:prstDash val="solid"/>
+          </a:ln>
+        </p:spPr>
+      </p:sp>
+      <p:sp>
+        <p:nvSpPr>
+          <p:cNvPr id="34" name="Text 32"/>
+          <p:cNvSpPr/>
+          <p:nvPr/>
+        </p:nvSpPr>
+        <p:spPr>
+          <a:xfrm>
+            <a:off x="2254649" y="4169664"/>
+            <a:ext cx="685800" cy="475488"/>
           </a:xfrm>
           <a:prstGeom prst="rect">
             <a:avLst/>
@@ -21723,30 +21429,57 @@
               <a:buNone/>
             </a:pPr>
             <a:r>
-              <a:rPr lang="en-US" sz="1400" b="1" dirty="0">
-                <a:solidFill>
-                  <a:srgbClr val="0D9488"/>
+              <a:rPr lang="en-US" sz="900" b="1" dirty="0">
+                <a:solidFill>
+                  <a:srgbClr val="9D174D"/>
                 </a:solidFill>
                 <a:latin typeface="Trebuchet MS" pitchFamily="34" charset="0"/>
                 <a:ea typeface="Trebuchet MS" pitchFamily="34" charset="-122"/>
                 <a:cs typeface="Trebuchet MS" pitchFamily="34" charset="-120"/>
               </a:rPr>
-              <a:t>ex</a:t>
-            </a:r>
-            <a:endParaRPr lang="en-US" sz="1400" dirty="0"/>
-          </a:p>
-        </p:txBody>
-      </p:sp>
-      <p:sp>
-        <p:nvSpPr>
-          <p:cNvPr id="31" name="Text 29"/>
-          <p:cNvSpPr/>
-          <p:nvPr/>
-        </p:nvSpPr>
-        <p:spPr>
-          <a:xfrm>
-            <a:off x="3959352" y="3364992"/>
-            <a:ext cx="411480" cy="475488"/>
+              <a:t>e</a:t>
+            </a:r>
+            <a:endParaRPr lang="en-US" sz="900" dirty="0"/>
+          </a:p>
+        </p:txBody>
+      </p:sp>
+      <p:sp>
+        <p:nvSpPr>
+          <p:cNvPr id="35" name="Shape 33"/>
+          <p:cNvSpPr/>
+          <p:nvPr/>
+        </p:nvSpPr>
+        <p:spPr>
+          <a:xfrm>
+            <a:off x="3293146" y="4169664"/>
+            <a:ext cx="685800" cy="475488"/>
+          </a:xfrm>
+          <a:prstGeom prst="rect">
+            <a:avLst>
+              <a:gd name="adj" fmla="val 7692"/>
+            </a:avLst>
+          </a:prstGeom>
+          <a:solidFill>
+            <a:srgbClr val="FFFFFF"/>
+          </a:solidFill>
+          <a:ln w="12700">
+            <a:solidFill>
+              <a:srgbClr val="DB2777"/>
+            </a:solidFill>
+            <a:prstDash val="solid"/>
+          </a:ln>
+        </p:spPr>
+      </p:sp>
+      <p:sp>
+        <p:nvSpPr>
+          <p:cNvPr id="36" name="Text 34"/>
+          <p:cNvSpPr/>
+          <p:nvPr/>
+        </p:nvSpPr>
+        <p:spPr>
+          <a:xfrm>
+            <a:off x="3293146" y="4169664"/>
+            <a:ext cx="685800" cy="475488"/>
           </a:xfrm>
           <a:prstGeom prst="rect">
             <a:avLst/>
@@ -21762,34 +21495,34 @@
               <a:buNone/>
             </a:pPr>
             <a:r>
-              <a:rPr lang="en-US" sz="1600" b="1" dirty="0">
-                <a:solidFill>
-                  <a:srgbClr val="0D9488"/>
+              <a:rPr lang="en-US" sz="900" b="1" dirty="0">
+                <a:solidFill>
+                  <a:srgbClr val="9D174D"/>
                 </a:solidFill>
                 <a:latin typeface="Trebuchet MS" pitchFamily="34" charset="0"/>
                 <a:ea typeface="Trebuchet MS" pitchFamily="34" charset="-122"/>
                 <a:cs typeface="Trebuchet MS" pitchFamily="34" charset="-120"/>
               </a:rPr>
-              <a:t>·</a:t>
-            </a:r>
-            <a:endParaRPr lang="en-US" sz="1600" dirty="0"/>
-          </a:p>
-        </p:txBody>
-      </p:sp>
-      <p:sp>
-        <p:nvSpPr>
-          <p:cNvPr id="32" name="Shape 30"/>
-          <p:cNvSpPr/>
-          <p:nvPr/>
-        </p:nvSpPr>
-        <p:spPr>
-          <a:xfrm>
-            <a:off x="4370832" y="3364992"/>
-            <a:ext cx="1645920" cy="475488"/>
+              <a:t>x</a:t>
+            </a:r>
+            <a:endParaRPr lang="en-US" sz="900" dirty="0"/>
+          </a:p>
+        </p:txBody>
+      </p:sp>
+      <p:sp>
+        <p:nvSpPr>
+          <p:cNvPr id="37" name="Shape 35"/>
+          <p:cNvSpPr/>
+          <p:nvPr/>
+        </p:nvSpPr>
+        <p:spPr>
+          <a:xfrm>
+            <a:off x="4331643" y="4169664"/>
+            <a:ext cx="685800" cy="475488"/>
           </a:xfrm>
           <a:prstGeom prst="rect">
             <a:avLst>
-              <a:gd name="adj" fmla="val 9615"/>
+              <a:gd name="adj" fmla="val 7692"/>
             </a:avLst>
           </a:prstGeom>
           <a:solidFill>
@@ -21797,22 +21530,22 @@
           </a:solidFill>
           <a:ln w="12700">
             <a:solidFill>
-              <a:srgbClr val="0D9488"/>
-            </a:solidFill>
-            <a:prstDash val="solid"/>
-          </a:ln>
-        </p:spPr>
-      </p:sp>
-      <p:sp>
-        <p:nvSpPr>
-          <p:cNvPr id="33" name="Text 31"/>
-          <p:cNvSpPr/>
-          <p:nvPr/>
-        </p:nvSpPr>
-        <p:spPr>
-          <a:xfrm>
-            <a:off x="4370832" y="3364992"/>
-            <a:ext cx="1645920" cy="475488"/>
+              <a:srgbClr val="DB2777"/>
+            </a:solidFill>
+            <a:prstDash val="solid"/>
+          </a:ln>
+        </p:spPr>
+      </p:sp>
+      <p:sp>
+        <p:nvSpPr>
+          <p:cNvPr id="38" name="Text 36"/>
+          <p:cNvSpPr/>
+          <p:nvPr/>
+        </p:nvSpPr>
+        <p:spPr>
+          <a:xfrm>
+            <a:off x="4331643" y="4169664"/>
+            <a:ext cx="685800" cy="475488"/>
           </a:xfrm>
           <a:prstGeom prst="rect">
             <a:avLst/>
@@ -21828,30 +21561,57 @@
               <a:buNone/>
             </a:pPr>
             <a:r>
-              <a:rPr lang="en-US" sz="1400" b="1" dirty="0">
-                <a:solidFill>
-                  <a:srgbClr val="0D9488"/>
+              <a:rPr lang="en-US" sz="900" b="1" dirty="0">
+                <a:solidFill>
+                  <a:srgbClr val="9D174D"/>
                 </a:solidFill>
                 <a:latin typeface="Trebuchet MS" pitchFamily="34" charset="0"/>
                 <a:ea typeface="Trebuchet MS" pitchFamily="34" charset="-122"/>
                 <a:cs typeface="Trebuchet MS" pitchFamily="34" charset="-120"/>
               </a:rPr>
-              <a:t>ci</a:t>
-            </a:r>
-            <a:endParaRPr lang="en-US" sz="1400" dirty="0"/>
-          </a:p>
-        </p:txBody>
-      </p:sp>
-      <p:sp>
-        <p:nvSpPr>
-          <p:cNvPr id="34" name="Text 32"/>
-          <p:cNvSpPr/>
-          <p:nvPr/>
-        </p:nvSpPr>
-        <p:spPr>
-          <a:xfrm>
-            <a:off x="6016752" y="3364992"/>
-            <a:ext cx="411480" cy="475488"/>
+              <a:t>c</a:t>
+            </a:r>
+            <a:endParaRPr lang="en-US" sz="900" dirty="0"/>
+          </a:p>
+        </p:txBody>
+      </p:sp>
+      <p:sp>
+        <p:nvSpPr>
+          <p:cNvPr id="39" name="Shape 37"/>
+          <p:cNvSpPr/>
+          <p:nvPr/>
+        </p:nvSpPr>
+        <p:spPr>
+          <a:xfrm>
+            <a:off x="5370141" y="4169664"/>
+            <a:ext cx="685800" cy="475488"/>
+          </a:xfrm>
+          <a:prstGeom prst="rect">
+            <a:avLst>
+              <a:gd name="adj" fmla="val 7692"/>
+            </a:avLst>
+          </a:prstGeom>
+          <a:solidFill>
+            <a:srgbClr val="FFFFFF"/>
+          </a:solidFill>
+          <a:ln w="12700">
+            <a:solidFill>
+              <a:srgbClr val="DB2777"/>
+            </a:solidFill>
+            <a:prstDash val="solid"/>
+          </a:ln>
+        </p:spPr>
+      </p:sp>
+      <p:sp>
+        <p:nvSpPr>
+          <p:cNvPr id="40" name="Text 38"/>
+          <p:cNvSpPr/>
+          <p:nvPr/>
+        </p:nvSpPr>
+        <p:spPr>
+          <a:xfrm>
+            <a:off x="5370141" y="4169664"/>
+            <a:ext cx="685800" cy="475488"/>
           </a:xfrm>
           <a:prstGeom prst="rect">
             <a:avLst/>
@@ -21867,34 +21627,34 @@
               <a:buNone/>
             </a:pPr>
             <a:r>
-              <a:rPr lang="en-US" sz="1600" b="1" dirty="0">
-                <a:solidFill>
-                  <a:srgbClr val="0D9488"/>
+              <a:rPr lang="en-US" sz="900" b="1" dirty="0">
+                <a:solidFill>
+                  <a:srgbClr val="9D174D"/>
                 </a:solidFill>
                 <a:latin typeface="Trebuchet MS" pitchFamily="34" charset="0"/>
                 <a:ea typeface="Trebuchet MS" pitchFamily="34" charset="-122"/>
                 <a:cs typeface="Trebuchet MS" pitchFamily="34" charset="-120"/>
               </a:rPr>
-              <a:t>·</a:t>
-            </a:r>
-            <a:endParaRPr lang="en-US" sz="1600" dirty="0"/>
-          </a:p>
-        </p:txBody>
-      </p:sp>
-      <p:sp>
-        <p:nvSpPr>
-          <p:cNvPr id="35" name="Shape 33"/>
-          <p:cNvSpPr/>
-          <p:nvPr/>
-        </p:nvSpPr>
-        <p:spPr>
-          <a:xfrm>
-            <a:off x="6428232" y="3364992"/>
-            <a:ext cx="1645920" cy="475488"/>
+              <a:t>l</a:t>
+            </a:r>
+            <a:endParaRPr lang="en-US" sz="900" dirty="0"/>
+          </a:p>
+        </p:txBody>
+      </p:sp>
+      <p:sp>
+        <p:nvSpPr>
+          <p:cNvPr id="41" name="Shape 39"/>
+          <p:cNvSpPr/>
+          <p:nvPr/>
+        </p:nvSpPr>
+        <p:spPr>
+          <a:xfrm>
+            <a:off x="6408638" y="4169664"/>
+            <a:ext cx="685800" cy="475488"/>
           </a:xfrm>
           <a:prstGeom prst="rect">
             <a:avLst>
-              <a:gd name="adj" fmla="val 9615"/>
+              <a:gd name="adj" fmla="val 7692"/>
             </a:avLst>
           </a:prstGeom>
           <a:solidFill>
@@ -21902,22 +21662,22 @@
           </a:solidFill>
           <a:ln w="12700">
             <a:solidFill>
-              <a:srgbClr val="0D9488"/>
-            </a:solidFill>
-            <a:prstDash val="solid"/>
-          </a:ln>
-        </p:spPr>
-      </p:sp>
-      <p:sp>
-        <p:nvSpPr>
-          <p:cNvPr id="36" name="Text 34"/>
-          <p:cNvSpPr/>
-          <p:nvPr/>
-        </p:nvSpPr>
-        <p:spPr>
-          <a:xfrm>
-            <a:off x="6428232" y="3364992"/>
-            <a:ext cx="1645920" cy="475488"/>
+              <a:srgbClr val="DB2777"/>
+            </a:solidFill>
+            <a:prstDash val="solid"/>
+          </a:ln>
+        </p:spPr>
+      </p:sp>
+      <p:sp>
+        <p:nvSpPr>
+          <p:cNvPr id="42" name="Text 40"/>
+          <p:cNvSpPr/>
+          <p:nvPr/>
+        </p:nvSpPr>
+        <p:spPr>
+          <a:xfrm>
+            <a:off x="6408638" y="4169664"/>
+            <a:ext cx="685800" cy="475488"/>
           </a:xfrm>
           <a:prstGeom prst="rect">
             <a:avLst/>
@@ -21933,57 +21693,57 @@
               <a:buNone/>
             </a:pPr>
             <a:r>
-              <a:rPr lang="en-US" sz="1400" b="1" dirty="0">
-                <a:solidFill>
-                  <a:srgbClr val="0D9488"/>
+              <a:rPr lang="en-US" sz="900" b="1" dirty="0">
+                <a:solidFill>
+                  <a:srgbClr val="9D174D"/>
                 </a:solidFill>
                 <a:latin typeface="Trebuchet MS" pitchFamily="34" charset="0"/>
                 <a:ea typeface="Trebuchet MS" pitchFamily="34" charset="-122"/>
                 <a:cs typeface="Trebuchet MS" pitchFamily="34" charset="-120"/>
               </a:rPr>
-              <a:t>ted</a:t>
-            </a:r>
-            <a:endParaRPr lang="en-US" sz="1400" dirty="0"/>
-          </a:p>
-        </p:txBody>
-      </p:sp>
-      <p:sp>
-        <p:nvSpPr>
-          <p:cNvPr id="37" name="Shape 35"/>
-          <p:cNvSpPr/>
-          <p:nvPr/>
-        </p:nvSpPr>
-        <p:spPr>
-          <a:xfrm>
-            <a:off x="365760" y="4096512"/>
-            <a:ext cx="1371600" cy="804672"/>
+              <a:t>ai</a:t>
+            </a:r>
+            <a:endParaRPr lang="en-US" sz="900" dirty="0"/>
+          </a:p>
+        </p:txBody>
+      </p:sp>
+      <p:sp>
+        <p:nvSpPr>
+          <p:cNvPr id="43" name="Shape 41"/>
+          <p:cNvSpPr/>
+          <p:nvPr/>
+        </p:nvSpPr>
+        <p:spPr>
+          <a:xfrm>
+            <a:off x="7447135" y="4169664"/>
+            <a:ext cx="685800" cy="475488"/>
           </a:xfrm>
           <a:prstGeom prst="rect">
             <a:avLst>
-              <a:gd name="adj" fmla="val 6818"/>
+              <a:gd name="adj" fmla="val 7692"/>
             </a:avLst>
           </a:prstGeom>
           <a:solidFill>
-            <a:srgbClr val="E2E8F0"/>
-          </a:solidFill>
-          <a:ln w="12700">
-            <a:solidFill>
-              <a:srgbClr val="E2E8F0"/>
-            </a:solidFill>
-            <a:prstDash val="solid"/>
-          </a:ln>
-        </p:spPr>
-      </p:sp>
-      <p:sp>
-        <p:nvSpPr>
-          <p:cNvPr id="38" name="Text 36"/>
-          <p:cNvSpPr/>
-          <p:nvPr/>
-        </p:nvSpPr>
-        <p:spPr>
-          <a:xfrm>
-            <a:off x="365760" y="4096512"/>
-            <a:ext cx="1371600" cy="804672"/>
+            <a:srgbClr val="FFFFFF"/>
+          </a:solidFill>
+          <a:ln w="12700">
+            <a:solidFill>
+              <a:srgbClr val="DB2777"/>
+            </a:solidFill>
+            <a:prstDash val="solid"/>
+          </a:ln>
+        </p:spPr>
+      </p:sp>
+      <p:sp>
+        <p:nvSpPr>
+          <p:cNvPr id="44" name="Text 42"/>
+          <p:cNvSpPr/>
+          <p:nvPr/>
+        </p:nvSpPr>
+        <p:spPr>
+          <a:xfrm>
+            <a:off x="7447135" y="4169664"/>
+            <a:ext cx="685800" cy="475488"/>
           </a:xfrm>
           <a:prstGeom prst="rect">
             <a:avLst/>
@@ -21999,543 +21759,15 @@
               <a:buNone/>
             </a:pPr>
             <a:r>
-              <a:rPr lang="en-US" sz="1100" b="1" dirty="0">
-                <a:solidFill>
-                  <a:srgbClr val="475569"/>
+              <a:rPr lang="en-US" sz="900" b="1" dirty="0">
+                <a:solidFill>
+                  <a:srgbClr val="9D174D"/>
                 </a:solidFill>
                 <a:latin typeface="Trebuchet MS" pitchFamily="34" charset="0"/>
                 <a:ea typeface="Trebuchet MS" pitchFamily="34" charset="-122"/>
                 <a:cs typeface="Trebuchet MS" pitchFamily="34" charset="-120"/>
               </a:rPr>
-              <a:t>Phonemes</a:t>
-            </a:r>
-            <a:endParaRPr lang="en-US" sz="1100" dirty="0"/>
-          </a:p>
-        </p:txBody>
-      </p:sp>
-      <p:sp>
-        <p:nvSpPr>
-          <p:cNvPr id="39" name="Shape 37"/>
-          <p:cNvSpPr/>
-          <p:nvPr/>
-        </p:nvSpPr>
-        <p:spPr>
-          <a:xfrm>
-            <a:off x="1874520" y="4096512"/>
-            <a:ext cx="6903720" cy="804672"/>
-          </a:xfrm>
-          <a:prstGeom prst="rect">
-            <a:avLst>
-              <a:gd name="adj" fmla="val 6818"/>
-            </a:avLst>
-          </a:prstGeom>
-          <a:solidFill>
-            <a:srgbClr val="FCE7F3"/>
-          </a:solidFill>
-          <a:ln w="12700">
-            <a:solidFill>
-              <a:srgbClr val="DB2777"/>
-            </a:solidFill>
-            <a:prstDash val="solid"/>
-          </a:ln>
-        </p:spPr>
-      </p:sp>
-      <p:sp>
-        <p:nvSpPr>
-          <p:cNvPr id="40" name="Shape 38"/>
-          <p:cNvSpPr/>
-          <p:nvPr/>
-        </p:nvSpPr>
-        <p:spPr>
-          <a:xfrm>
-            <a:off x="2124837" y="4169664"/>
-            <a:ext cx="685800" cy="384048"/>
-          </a:xfrm>
-          <a:prstGeom prst="rect">
-            <a:avLst>
-              <a:gd name="adj" fmla="val 9524"/>
-            </a:avLst>
-          </a:prstGeom>
-          <a:solidFill>
-            <a:srgbClr val="FFFFFF"/>
-          </a:solidFill>
-          <a:ln w="12700">
-            <a:solidFill>
-              <a:srgbClr val="DB2777"/>
-            </a:solidFill>
-            <a:prstDash val="solid"/>
-          </a:ln>
-        </p:spPr>
-      </p:sp>
-      <p:sp>
-        <p:nvSpPr>
-          <p:cNvPr id="41" name="Text 39"/>
-          <p:cNvSpPr/>
-          <p:nvPr/>
-        </p:nvSpPr>
-        <p:spPr>
-          <a:xfrm>
-            <a:off x="2124837" y="4169664"/>
-            <a:ext cx="685800" cy="384048"/>
-          </a:xfrm>
-          <a:prstGeom prst="rect">
-            <a:avLst/>
-          </a:prstGeom>
-          <a:noFill/>
-          <a:ln/>
-        </p:spPr>
-        <p:txBody>
-          <a:bodyPr wrap="square" lIns="0" tIns="0" rIns="0" bIns="0" rtlCol="0" anchor="ctr"/>
-          <a:lstStyle/>
-          <a:p>
-            <a:pPr algn="ctr" indent="0" marL="0">
-              <a:buNone/>
-            </a:pPr>
-            <a:r>
-              <a:rPr lang="en-US" sz="900" b="1" dirty="0">
-                <a:solidFill>
-                  <a:srgbClr val="9D174D"/>
-                </a:solidFill>
-                <a:latin typeface="Trebuchet MS" pitchFamily="34" charset="0"/>
-                <a:ea typeface="Trebuchet MS" pitchFamily="34" charset="-122"/>
-                <a:cs typeface="Trebuchet MS" pitchFamily="34" charset="-120"/>
-              </a:rPr>
-              <a:t>e</a:t>
-            </a:r>
-            <a:endParaRPr lang="en-US" sz="900" dirty="0"/>
-          </a:p>
-        </p:txBody>
-      </p:sp>
-      <p:sp>
-        <p:nvSpPr>
-          <p:cNvPr id="42" name="Shape 40"/>
-          <p:cNvSpPr/>
-          <p:nvPr/>
-        </p:nvSpPr>
-        <p:spPr>
-          <a:xfrm>
-            <a:off x="3033522" y="4169664"/>
-            <a:ext cx="685800" cy="384048"/>
-          </a:xfrm>
-          <a:prstGeom prst="rect">
-            <a:avLst>
-              <a:gd name="adj" fmla="val 9524"/>
-            </a:avLst>
-          </a:prstGeom>
-          <a:solidFill>
-            <a:srgbClr val="FFFFFF"/>
-          </a:solidFill>
-          <a:ln w="12700">
-            <a:solidFill>
-              <a:srgbClr val="DB2777"/>
-            </a:solidFill>
-            <a:prstDash val="solid"/>
-          </a:ln>
-        </p:spPr>
-      </p:sp>
-      <p:sp>
-        <p:nvSpPr>
-          <p:cNvPr id="43" name="Text 41"/>
-          <p:cNvSpPr/>
-          <p:nvPr/>
-        </p:nvSpPr>
-        <p:spPr>
-          <a:xfrm>
-            <a:off x="3033522" y="4169664"/>
-            <a:ext cx="685800" cy="384048"/>
-          </a:xfrm>
-          <a:prstGeom prst="rect">
-            <a:avLst/>
-          </a:prstGeom>
-          <a:noFill/>
-          <a:ln/>
-        </p:spPr>
-        <p:txBody>
-          <a:bodyPr wrap="square" lIns="0" tIns="0" rIns="0" bIns="0" rtlCol="0" anchor="ctr"/>
-          <a:lstStyle/>
-          <a:p>
-            <a:pPr algn="ctr" indent="0" marL="0">
-              <a:buNone/>
-            </a:pPr>
-            <a:r>
-              <a:rPr lang="en-US" sz="900" b="1" dirty="0">
-                <a:solidFill>
-                  <a:srgbClr val="9D174D"/>
-                </a:solidFill>
-                <a:latin typeface="Trebuchet MS" pitchFamily="34" charset="0"/>
-                <a:ea typeface="Trebuchet MS" pitchFamily="34" charset="-122"/>
-                <a:cs typeface="Trebuchet MS" pitchFamily="34" charset="-120"/>
-              </a:rPr>
-              <a:t>x</a:t>
-            </a:r>
-            <a:endParaRPr lang="en-US" sz="900" dirty="0"/>
-          </a:p>
-        </p:txBody>
-      </p:sp>
-      <p:sp>
-        <p:nvSpPr>
-          <p:cNvPr id="44" name="Shape 42"/>
-          <p:cNvSpPr/>
-          <p:nvPr/>
-        </p:nvSpPr>
-        <p:spPr>
-          <a:xfrm>
-            <a:off x="3942207" y="4169664"/>
-            <a:ext cx="685800" cy="384048"/>
-          </a:xfrm>
-          <a:prstGeom prst="rect">
-            <a:avLst>
-              <a:gd name="adj" fmla="val 9524"/>
-            </a:avLst>
-          </a:prstGeom>
-          <a:solidFill>
-            <a:srgbClr val="FFFFFF"/>
-          </a:solidFill>
-          <a:ln w="12700">
-            <a:solidFill>
-              <a:srgbClr val="DB2777"/>
-            </a:solidFill>
-            <a:prstDash val="solid"/>
-          </a:ln>
-        </p:spPr>
-      </p:sp>
-      <p:sp>
-        <p:nvSpPr>
-          <p:cNvPr id="45" name="Text 43"/>
-          <p:cNvSpPr/>
-          <p:nvPr/>
-        </p:nvSpPr>
-        <p:spPr>
-          <a:xfrm>
-            <a:off x="3942207" y="4169664"/>
-            <a:ext cx="685800" cy="384048"/>
-          </a:xfrm>
-          <a:prstGeom prst="rect">
-            <a:avLst/>
-          </a:prstGeom>
-          <a:noFill/>
-          <a:ln/>
-        </p:spPr>
-        <p:txBody>
-          <a:bodyPr wrap="square" lIns="0" tIns="0" rIns="0" bIns="0" rtlCol="0" anchor="ctr"/>
-          <a:lstStyle/>
-          <a:p>
-            <a:pPr algn="ctr" indent="0" marL="0">
-              <a:buNone/>
-            </a:pPr>
-            <a:r>
-              <a:rPr lang="en-US" sz="900" b="1" dirty="0">
-                <a:solidFill>
-                  <a:srgbClr val="9D174D"/>
-                </a:solidFill>
-                <a:latin typeface="Trebuchet MS" pitchFamily="34" charset="0"/>
-                <a:ea typeface="Trebuchet MS" pitchFamily="34" charset="-122"/>
-                <a:cs typeface="Trebuchet MS" pitchFamily="34" charset="-120"/>
-              </a:rPr>
-              <a:t>c</a:t>
-            </a:r>
-            <a:endParaRPr lang="en-US" sz="900" dirty="0"/>
-          </a:p>
-        </p:txBody>
-      </p:sp>
-      <p:sp>
-        <p:nvSpPr>
-          <p:cNvPr id="46" name="Text 44"/>
-          <p:cNvSpPr/>
-          <p:nvPr/>
-        </p:nvSpPr>
-        <p:spPr>
-          <a:xfrm>
-            <a:off x="3942207" y="4572000"/>
-            <a:ext cx="685800" cy="219456"/>
-          </a:xfrm>
-          <a:prstGeom prst="rect">
-            <a:avLst/>
-          </a:prstGeom>
-          <a:noFill/>
-          <a:ln/>
-        </p:spPr>
-        <p:txBody>
-          <a:bodyPr wrap="square" lIns="0" tIns="0" rIns="0" bIns="0" rtlCol="0" anchor="t"/>
-          <a:lstStyle/>
-          <a:p>
-            <a:pPr algn="ctr" indent="0" marL="0">
-              <a:buNone/>
-            </a:pPr>
-            <a:r>
-              <a:rPr lang="en-US" sz="750" i="1" dirty="0">
-                <a:solidFill>
-                  <a:srgbClr val="94A3B8"/>
-                </a:solidFill>
-                <a:latin typeface="Calibri" pitchFamily="34" charset="0"/>
-                <a:ea typeface="Calibri" pitchFamily="34" charset="-122"/>
-                <a:cs typeface="Calibri" pitchFamily="34" charset="-120"/>
-              </a:rPr>
-              <a:t>/s/</a:t>
-            </a:r>
-            <a:endParaRPr lang="en-US" sz="750" dirty="0"/>
-          </a:p>
-        </p:txBody>
-      </p:sp>
-      <p:sp>
-        <p:nvSpPr>
-          <p:cNvPr id="47" name="Shape 45"/>
-          <p:cNvSpPr/>
-          <p:nvPr/>
-        </p:nvSpPr>
-        <p:spPr>
-          <a:xfrm>
-            <a:off x="4850892" y="4169664"/>
-            <a:ext cx="685800" cy="384048"/>
-          </a:xfrm>
-          <a:prstGeom prst="rect">
-            <a:avLst>
-              <a:gd name="adj" fmla="val 9524"/>
-            </a:avLst>
-          </a:prstGeom>
-          <a:solidFill>
-            <a:srgbClr val="FFFFFF"/>
-          </a:solidFill>
-          <a:ln w="12700">
-            <a:solidFill>
-              <a:srgbClr val="DB2777"/>
-            </a:solidFill>
-            <a:prstDash val="solid"/>
-          </a:ln>
-        </p:spPr>
-      </p:sp>
-      <p:sp>
-        <p:nvSpPr>
-          <p:cNvPr id="48" name="Text 46"/>
-          <p:cNvSpPr/>
-          <p:nvPr/>
-        </p:nvSpPr>
-        <p:spPr>
-          <a:xfrm>
-            <a:off x="4850892" y="4169664"/>
-            <a:ext cx="685800" cy="384048"/>
-          </a:xfrm>
-          <a:prstGeom prst="rect">
-            <a:avLst/>
-          </a:prstGeom>
-          <a:noFill/>
-          <a:ln/>
-        </p:spPr>
-        <p:txBody>
-          <a:bodyPr wrap="square" lIns="0" tIns="0" rIns="0" bIns="0" rtlCol="0" anchor="ctr"/>
-          <a:lstStyle/>
-          <a:p>
-            <a:pPr algn="ctr" indent="0" marL="0">
-              <a:buNone/>
-            </a:pPr>
-            <a:r>
-              <a:rPr lang="en-US" sz="900" b="1" dirty="0">
-                <a:solidFill>
-                  <a:srgbClr val="9D174D"/>
-                </a:solidFill>
-                <a:latin typeface="Trebuchet MS" pitchFamily="34" charset="0"/>
-                <a:ea typeface="Trebuchet MS" pitchFamily="34" charset="-122"/>
-                <a:cs typeface="Trebuchet MS" pitchFamily="34" charset="-120"/>
-              </a:rPr>
-              <a:t>i</a:t>
-            </a:r>
-            <a:endParaRPr lang="en-US" sz="900" dirty="0"/>
-          </a:p>
-        </p:txBody>
-      </p:sp>
-      <p:sp>
-        <p:nvSpPr>
-          <p:cNvPr id="49" name="Shape 47"/>
-          <p:cNvSpPr/>
-          <p:nvPr/>
-        </p:nvSpPr>
-        <p:spPr>
-          <a:xfrm>
-            <a:off x="5759577" y="4169664"/>
-            <a:ext cx="685800" cy="384048"/>
-          </a:xfrm>
-          <a:prstGeom prst="rect">
-            <a:avLst>
-              <a:gd name="adj" fmla="val 9524"/>
-            </a:avLst>
-          </a:prstGeom>
-          <a:solidFill>
-            <a:srgbClr val="FFFFFF"/>
-          </a:solidFill>
-          <a:ln w="12700">
-            <a:solidFill>
-              <a:srgbClr val="DB2777"/>
-            </a:solidFill>
-            <a:prstDash val="solid"/>
-          </a:ln>
-        </p:spPr>
-      </p:sp>
-      <p:sp>
-        <p:nvSpPr>
-          <p:cNvPr id="50" name="Text 48"/>
-          <p:cNvSpPr/>
-          <p:nvPr/>
-        </p:nvSpPr>
-        <p:spPr>
-          <a:xfrm>
-            <a:off x="5759577" y="4169664"/>
-            <a:ext cx="685800" cy="384048"/>
-          </a:xfrm>
-          <a:prstGeom prst="rect">
-            <a:avLst/>
-          </a:prstGeom>
-          <a:noFill/>
-          <a:ln/>
-        </p:spPr>
-        <p:txBody>
-          <a:bodyPr wrap="square" lIns="0" tIns="0" rIns="0" bIns="0" rtlCol="0" anchor="ctr"/>
-          <a:lstStyle/>
-          <a:p>
-            <a:pPr algn="ctr" indent="0" marL="0">
-              <a:buNone/>
-            </a:pPr>
-            <a:r>
-              <a:rPr lang="en-US" sz="900" b="1" dirty="0">
-                <a:solidFill>
-                  <a:srgbClr val="9D174D"/>
-                </a:solidFill>
-                <a:latin typeface="Trebuchet MS" pitchFamily="34" charset="0"/>
-                <a:ea typeface="Trebuchet MS" pitchFamily="34" charset="-122"/>
-                <a:cs typeface="Trebuchet MS" pitchFamily="34" charset="-120"/>
-              </a:rPr>
-              <a:t>t</a:t>
-            </a:r>
-            <a:endParaRPr lang="en-US" sz="900" dirty="0"/>
-          </a:p>
-        </p:txBody>
-      </p:sp>
-      <p:sp>
-        <p:nvSpPr>
-          <p:cNvPr id="51" name="Shape 49"/>
-          <p:cNvSpPr/>
-          <p:nvPr/>
-        </p:nvSpPr>
-        <p:spPr>
-          <a:xfrm>
-            <a:off x="6668262" y="4169664"/>
-            <a:ext cx="685800" cy="384048"/>
-          </a:xfrm>
-          <a:prstGeom prst="rect">
-            <a:avLst>
-              <a:gd name="adj" fmla="val 9524"/>
-            </a:avLst>
-          </a:prstGeom>
-          <a:solidFill>
-            <a:srgbClr val="FFFFFF"/>
-          </a:solidFill>
-          <a:ln w="12700">
-            <a:solidFill>
-              <a:srgbClr val="DB2777"/>
-            </a:solidFill>
-            <a:prstDash val="solid"/>
-          </a:ln>
-        </p:spPr>
-      </p:sp>
-      <p:sp>
-        <p:nvSpPr>
-          <p:cNvPr id="52" name="Text 50"/>
-          <p:cNvSpPr/>
-          <p:nvPr/>
-        </p:nvSpPr>
-        <p:spPr>
-          <a:xfrm>
-            <a:off x="6668262" y="4169664"/>
-            <a:ext cx="685800" cy="384048"/>
-          </a:xfrm>
-          <a:prstGeom prst="rect">
-            <a:avLst/>
-          </a:prstGeom>
-          <a:noFill/>
-          <a:ln/>
-        </p:spPr>
-        <p:txBody>
-          <a:bodyPr wrap="square" lIns="0" tIns="0" rIns="0" bIns="0" rtlCol="0" anchor="ctr"/>
-          <a:lstStyle/>
-          <a:p>
-            <a:pPr algn="ctr" indent="0" marL="0">
-              <a:buNone/>
-            </a:pPr>
-            <a:r>
-              <a:rPr lang="en-US" sz="900" b="1" dirty="0">
-                <a:solidFill>
-                  <a:srgbClr val="9D174D"/>
-                </a:solidFill>
-                <a:latin typeface="Trebuchet MS" pitchFamily="34" charset="0"/>
-                <a:ea typeface="Trebuchet MS" pitchFamily="34" charset="-122"/>
-                <a:cs typeface="Trebuchet MS" pitchFamily="34" charset="-120"/>
-              </a:rPr>
-              <a:t>e</a:t>
-            </a:r>
-            <a:endParaRPr lang="en-US" sz="900" dirty="0"/>
-          </a:p>
-        </p:txBody>
-      </p:sp>
-      <p:sp>
-        <p:nvSpPr>
-          <p:cNvPr id="53" name="Shape 51"/>
-          <p:cNvSpPr/>
-          <p:nvPr/>
-        </p:nvSpPr>
-        <p:spPr>
-          <a:xfrm>
-            <a:off x="7576947" y="4169664"/>
-            <a:ext cx="685800" cy="384048"/>
-          </a:xfrm>
-          <a:prstGeom prst="rect">
-            <a:avLst>
-              <a:gd name="adj" fmla="val 9524"/>
-            </a:avLst>
-          </a:prstGeom>
-          <a:solidFill>
-            <a:srgbClr val="FFFFFF"/>
-          </a:solidFill>
-          <a:ln w="12700">
-            <a:solidFill>
-              <a:srgbClr val="DB2777"/>
-            </a:solidFill>
-            <a:prstDash val="solid"/>
-          </a:ln>
-        </p:spPr>
-      </p:sp>
-      <p:sp>
-        <p:nvSpPr>
-          <p:cNvPr id="54" name="Text 52"/>
-          <p:cNvSpPr/>
-          <p:nvPr/>
-        </p:nvSpPr>
-        <p:spPr>
-          <a:xfrm>
-            <a:off x="7576947" y="4169664"/>
-            <a:ext cx="685800" cy="384048"/>
-          </a:xfrm>
-          <a:prstGeom prst="rect">
-            <a:avLst/>
-          </a:prstGeom>
-          <a:noFill/>
-          <a:ln/>
-        </p:spPr>
-        <p:txBody>
-          <a:bodyPr wrap="square" lIns="0" tIns="0" rIns="0" bIns="0" rtlCol="0" anchor="ctr"/>
-          <a:lstStyle/>
-          <a:p>
-            <a:pPr algn="ctr" indent="0" marL="0">
-              <a:buNone/>
-            </a:pPr>
-            <a:r>
-              <a:rPr lang="en-US" sz="900" b="1" dirty="0">
-                <a:solidFill>
-                  <a:srgbClr val="9D174D"/>
-                </a:solidFill>
-                <a:latin typeface="Trebuchet MS" pitchFamily="34" charset="0"/>
-                <a:ea typeface="Trebuchet MS" pitchFamily="34" charset="-122"/>
-                <a:cs typeface="Trebuchet MS" pitchFamily="34" charset="-120"/>
-              </a:rPr>
-              <a:t>d</a:t>
+              <a:t>m</a:t>
             </a:r>
             <a:endParaRPr lang="en-US" sz="900" dirty="0"/>
           </a:p>
@@ -22827,7 +22059,7 @@
                 <a:ea typeface="Calibri" pitchFamily="34" charset="-122"/>
                 <a:cs typeface="Calibri" pitchFamily="34" charset="-120"/>
               </a:rPr>
-              <a:t>Word Labs  •  wordlabs.app  •  Prefix: 'ex-' = out, out of, beyond</a:t>
+              <a:t>Word Labs  •  wordlabs.app  •  Prefix: 'ex-' = out, out of, away</a:t>
             </a:r>
             <a:endParaRPr lang="en-US" sz="800" dirty="0"/>
           </a:p>
@@ -22966,7 +22198,7 @@
                 <a:ea typeface="Trebuchet MS" pitchFamily="34" charset="-122"/>
                 <a:cs typeface="Trebuchet MS" pitchFamily="34" charset="-120"/>
               </a:rPr>
-              <a:t>extend</a:t>
+              <a:t>export</a:t>
             </a:r>
             <a:endParaRPr lang="en-US" sz="2800" dirty="0"/>
           </a:p>
@@ -23654,7 +22886,7 @@
                 <a:ea typeface="Calibri" pitchFamily="34" charset="-122"/>
                 <a:cs typeface="Calibri" pitchFamily="34" charset="-120"/>
               </a:rPr>
-              <a:t>Word Labs  •  wordlabs.app  •  Prefix: 'ex-' = out, out of, beyond</a:t>
+              <a:t>Word Labs  •  wordlabs.app  •  Prefix: 'ex-' = out, out of, away</a:t>
             </a:r>
             <a:endParaRPr lang="en-US" sz="800" dirty="0"/>
           </a:p>
@@ -23793,7 +23025,7 @@
                 <a:ea typeface="Trebuchet MS" pitchFamily="34" charset="-122"/>
                 <a:cs typeface="Trebuchet MS" pitchFamily="34" charset="-120"/>
               </a:rPr>
-              <a:t>extend</a:t>
+              <a:t>export</a:t>
             </a:r>
             <a:endParaRPr lang="en-US" sz="2800" dirty="0"/>
           </a:p>
@@ -24044,7 +23276,7 @@
                 <a:ea typeface="Trebuchet MS" pitchFamily="34" charset="-122"/>
                 <a:cs typeface="Trebuchet MS" pitchFamily="34" charset="-120"/>
               </a:rPr>
-              <a:t>tend</a:t>
+              <a:t>port</a:t>
             </a:r>
             <a:endParaRPr lang="en-US" sz="1300" dirty="0"/>
           </a:p>
@@ -24083,7 +23315,7 @@
                 <a:ea typeface="Calibri" pitchFamily="34" charset="-122"/>
                 <a:cs typeface="Calibri" pitchFamily="34" charset="-120"/>
               </a:rPr>
-              <a:t>stretch</a:t>
+              <a:t>carry</a:t>
             </a:r>
             <a:endParaRPr lang="en-US" sz="850" dirty="0"/>
           </a:p>
@@ -24639,7 +23871,7 @@
                 <a:ea typeface="Calibri" pitchFamily="34" charset="-122"/>
                 <a:cs typeface="Calibri" pitchFamily="34" charset="-120"/>
               </a:rPr>
-              <a:t>Word Labs  •  wordlabs.app  •  Prefix: 'ex-' = out, out of, beyond</a:t>
+              <a:t>Word Labs  •  wordlabs.app  •  Prefix: 'ex-' = out, out of, away</a:t>
             </a:r>
             <a:endParaRPr lang="en-US" sz="800" dirty="0"/>
           </a:p>
@@ -24712,7 +23944,7 @@
                 <a:ea typeface="Trebuchet MS" pitchFamily="34" charset="-122"/>
                 <a:cs typeface="Trebuchet MS" pitchFamily="34" charset="-120"/>
               </a:rPr>
-              <a:t>We are learning that the prefix 'ex-' means 'out, out of, beyond'.</a:t>
+              <a:t>We are learning that the prefix 'ex-' means 'out, out of, away'.</a:t>
             </a:r>
             <a:endParaRPr lang="en-US" sz="2000" dirty="0"/>
           </a:p>
@@ -25358,7 +24590,7 @@
                 <a:ea typeface="Calibri" pitchFamily="34" charset="-122"/>
                 <a:cs typeface="Calibri" pitchFamily="34" charset="-120"/>
               </a:rPr>
-              <a:t>Word Labs  •  wordlabs.app  •  Prefix: 'ex-' = out, out of, beyond</a:t>
+              <a:t>Word Labs  •  wordlabs.app  •  Prefix: 'ex-' = out, out of, away</a:t>
             </a:r>
             <a:endParaRPr lang="en-US" sz="800" dirty="0"/>
           </a:p>
@@ -25497,7 +24729,7 @@
                 <a:ea typeface="Trebuchet MS" pitchFamily="34" charset="-122"/>
                 <a:cs typeface="Trebuchet MS" pitchFamily="34" charset="-120"/>
               </a:rPr>
-              <a:t>extend</a:t>
+              <a:t>export</a:t>
             </a:r>
             <a:endParaRPr lang="en-US" sz="2800" dirty="0"/>
           </a:p>
@@ -25748,7 +24980,7 @@
                 <a:ea typeface="Trebuchet MS" pitchFamily="34" charset="-122"/>
                 <a:cs typeface="Trebuchet MS" pitchFamily="34" charset="-120"/>
               </a:rPr>
-              <a:t>tend</a:t>
+              <a:t>port</a:t>
             </a:r>
             <a:endParaRPr lang="en-US" sz="1300" dirty="0"/>
           </a:p>
@@ -25787,7 +25019,7 @@
                 <a:ea typeface="Calibri" pitchFamily="34" charset="-122"/>
                 <a:cs typeface="Calibri" pitchFamily="34" charset="-120"/>
               </a:rPr>
-              <a:t>stretch</a:t>
+              <a:t>carry</a:t>
             </a:r>
             <a:endParaRPr lang="en-US" sz="850" dirty="0"/>
           </a:p>
@@ -26051,7 +25283,7 @@
                 <a:ea typeface="Trebuchet MS" pitchFamily="34" charset="-122"/>
                 <a:cs typeface="Trebuchet MS" pitchFamily="34" charset="-120"/>
               </a:rPr>
-              <a:t>tend</a:t>
+              <a:t>port</a:t>
             </a:r>
             <a:endParaRPr lang="en-US" sz="1400" dirty="0"/>
           </a:p>
@@ -26475,7 +25707,7 @@
                 <a:ea typeface="Calibri" pitchFamily="34" charset="-122"/>
                 <a:cs typeface="Calibri" pitchFamily="34" charset="-120"/>
               </a:rPr>
-              <a:t>Word Labs  •  wordlabs.app  •  Prefix: 'ex-' = out, out of, beyond</a:t>
+              <a:t>Word Labs  •  wordlabs.app  •  Prefix: 'ex-' = out, out of, away</a:t>
             </a:r>
             <a:endParaRPr lang="en-US" sz="800" dirty="0"/>
           </a:p>
@@ -26614,7 +25846,7 @@
                 <a:ea typeface="Trebuchet MS" pitchFamily="34" charset="-122"/>
                 <a:cs typeface="Trebuchet MS" pitchFamily="34" charset="-120"/>
               </a:rPr>
-              <a:t>extend</a:t>
+              <a:t>export</a:t>
             </a:r>
             <a:endParaRPr lang="en-US" sz="2800" dirty="0"/>
           </a:p>
@@ -26865,7 +26097,7 @@
                 <a:ea typeface="Trebuchet MS" pitchFamily="34" charset="-122"/>
                 <a:cs typeface="Trebuchet MS" pitchFamily="34" charset="-120"/>
               </a:rPr>
-              <a:t>tend</a:t>
+              <a:t>port</a:t>
             </a:r>
             <a:endParaRPr lang="en-US" sz="1300" dirty="0"/>
           </a:p>
@@ -26904,7 +26136,7 @@
                 <a:ea typeface="Calibri" pitchFamily="34" charset="-122"/>
                 <a:cs typeface="Calibri" pitchFamily="34" charset="-120"/>
               </a:rPr>
-              <a:t>stretch</a:t>
+              <a:t>carry</a:t>
             </a:r>
             <a:endParaRPr lang="en-US" sz="850" dirty="0"/>
           </a:p>
@@ -27168,7 +26400,7 @@
                 <a:ea typeface="Trebuchet MS" pitchFamily="34" charset="-122"/>
                 <a:cs typeface="Trebuchet MS" pitchFamily="34" charset="-120"/>
               </a:rPr>
-              <a:t>tend</a:t>
+              <a:t>port</a:t>
             </a:r>
             <a:endParaRPr lang="en-US" sz="1400" dirty="0"/>
           </a:p>
@@ -27275,7 +26507,7 @@
         </p:nvSpPr>
         <p:spPr>
           <a:xfrm>
-            <a:off x="2254649" y="4169664"/>
+            <a:off x="2427732" y="4169664"/>
             <a:ext cx="685800" cy="475488"/>
           </a:xfrm>
           <a:prstGeom prst="rect">
@@ -27302,7 +26534,7 @@
         </p:nvSpPr>
         <p:spPr>
           <a:xfrm>
-            <a:off x="2254649" y="4169664"/>
+            <a:off x="2427732" y="4169664"/>
             <a:ext cx="685800" cy="475488"/>
           </a:xfrm>
           <a:prstGeom prst="rect">
@@ -27341,7 +26573,7 @@
         </p:nvSpPr>
         <p:spPr>
           <a:xfrm>
-            <a:off x="3293146" y="4169664"/>
+            <a:off x="3639312" y="4169664"/>
             <a:ext cx="685800" cy="475488"/>
           </a:xfrm>
           <a:prstGeom prst="rect">
@@ -27368,7 +26600,7 @@
         </p:nvSpPr>
         <p:spPr>
           <a:xfrm>
-            <a:off x="3293146" y="4169664"/>
+            <a:off x="3639312" y="4169664"/>
             <a:ext cx="685800" cy="475488"/>
           </a:xfrm>
           <a:prstGeom prst="rect">
@@ -27407,7 +26639,7 @@
         </p:nvSpPr>
         <p:spPr>
           <a:xfrm>
-            <a:off x="4331643" y="4169664"/>
+            <a:off x="4850892" y="4169664"/>
             <a:ext cx="685800" cy="475488"/>
           </a:xfrm>
           <a:prstGeom prst="rect">
@@ -27434,7 +26666,7 @@
         </p:nvSpPr>
         <p:spPr>
           <a:xfrm>
-            <a:off x="4331643" y="4169664"/>
+            <a:off x="4850892" y="4169664"/>
             <a:ext cx="685800" cy="475488"/>
           </a:xfrm>
           <a:prstGeom prst="rect">
@@ -27459,7 +26691,7 @@
                 <a:ea typeface="Trebuchet MS" pitchFamily="34" charset="-122"/>
                 <a:cs typeface="Trebuchet MS" pitchFamily="34" charset="-120"/>
               </a:rPr>
-              <a:t>t</a:t>
+              <a:t>p</a:t>
             </a:r>
             <a:endParaRPr lang="en-US" sz="900" dirty="0"/>
           </a:p>
@@ -27473,7 +26705,7 @@
         </p:nvSpPr>
         <p:spPr>
           <a:xfrm>
-            <a:off x="5370141" y="4169664"/>
+            <a:off x="6062472" y="4169664"/>
             <a:ext cx="685800" cy="475488"/>
           </a:xfrm>
           <a:prstGeom prst="rect">
@@ -27500,7 +26732,7 @@
         </p:nvSpPr>
         <p:spPr>
           <a:xfrm>
-            <a:off x="5370141" y="4169664"/>
+            <a:off x="6062472" y="4169664"/>
             <a:ext cx="685800" cy="475488"/>
           </a:xfrm>
           <a:prstGeom prst="rect">
@@ -27525,7 +26757,7 @@
                 <a:ea typeface="Trebuchet MS" pitchFamily="34" charset="-122"/>
                 <a:cs typeface="Trebuchet MS" pitchFamily="34" charset="-120"/>
               </a:rPr>
-              <a:t>e</a:t>
+              <a:t>or</a:t>
             </a:r>
             <a:endParaRPr lang="en-US" sz="900" dirty="0"/>
           </a:p>
@@ -27539,7 +26771,7 @@
         </p:nvSpPr>
         <p:spPr>
           <a:xfrm>
-            <a:off x="6408638" y="4169664"/>
+            <a:off x="7274052" y="4169664"/>
             <a:ext cx="685800" cy="475488"/>
           </a:xfrm>
           <a:prstGeom prst="rect">
@@ -27566,7 +26798,7 @@
         </p:nvSpPr>
         <p:spPr>
           <a:xfrm>
-            <a:off x="6408638" y="4169664"/>
+            <a:off x="7274052" y="4169664"/>
             <a:ext cx="685800" cy="475488"/>
           </a:xfrm>
           <a:prstGeom prst="rect">
@@ -27591,73 +26823,7 @@
                 <a:ea typeface="Trebuchet MS" pitchFamily="34" charset="-122"/>
                 <a:cs typeface="Trebuchet MS" pitchFamily="34" charset="-120"/>
               </a:rPr>
-              <a:t>n</a:t>
-            </a:r>
-            <a:endParaRPr lang="en-US" sz="900" dirty="0"/>
-          </a:p>
-        </p:txBody>
-      </p:sp>
-      <p:sp>
-        <p:nvSpPr>
-          <p:cNvPr id="43" name="Shape 41"/>
-          <p:cNvSpPr/>
-          <p:nvPr/>
-        </p:nvSpPr>
-        <p:spPr>
-          <a:xfrm>
-            <a:off x="7447135" y="4169664"/>
-            <a:ext cx="685800" cy="475488"/>
-          </a:xfrm>
-          <a:prstGeom prst="rect">
-            <a:avLst>
-              <a:gd name="adj" fmla="val 7692"/>
-            </a:avLst>
-          </a:prstGeom>
-          <a:solidFill>
-            <a:srgbClr val="FFFFFF"/>
-          </a:solidFill>
-          <a:ln w="12700">
-            <a:solidFill>
-              <a:srgbClr val="DB2777"/>
-            </a:solidFill>
-            <a:prstDash val="solid"/>
-          </a:ln>
-        </p:spPr>
-      </p:sp>
-      <p:sp>
-        <p:nvSpPr>
-          <p:cNvPr id="44" name="Text 42"/>
-          <p:cNvSpPr/>
-          <p:nvPr/>
-        </p:nvSpPr>
-        <p:spPr>
-          <a:xfrm>
-            <a:off x="7447135" y="4169664"/>
-            <a:ext cx="685800" cy="475488"/>
-          </a:xfrm>
-          <a:prstGeom prst="rect">
-            <a:avLst/>
-          </a:prstGeom>
-          <a:noFill/>
-          <a:ln/>
-        </p:spPr>
-        <p:txBody>
-          <a:bodyPr wrap="square" lIns="0" tIns="0" rIns="0" bIns="0" rtlCol="0" anchor="ctr"/>
-          <a:lstStyle/>
-          <a:p>
-            <a:pPr algn="ctr" indent="0" marL="0">
-              <a:buNone/>
-            </a:pPr>
-            <a:r>
-              <a:rPr lang="en-US" sz="900" b="1" dirty="0">
-                <a:solidFill>
-                  <a:srgbClr val="9D174D"/>
-                </a:solidFill>
-                <a:latin typeface="Trebuchet MS" pitchFamily="34" charset="0"/>
-                <a:ea typeface="Trebuchet MS" pitchFamily="34" charset="-122"/>
-                <a:cs typeface="Trebuchet MS" pitchFamily="34" charset="-120"/>
-              </a:rPr>
-              <a:t>d</a:t>
+              <a:t>t</a:t>
             </a:r>
             <a:endParaRPr lang="en-US" sz="900" dirty="0"/>
           </a:p>
@@ -27949,7 +27115,7 @@
                 <a:ea typeface="Calibri" pitchFamily="34" charset="-122"/>
                 <a:cs typeface="Calibri" pitchFamily="34" charset="-120"/>
               </a:rPr>
-              <a:t>Word Labs  •  wordlabs.app  •  Prefix: 'ex-' = out, out of, beyond</a:t>
+              <a:t>Word Labs  •  wordlabs.app  •  Prefix: 'ex-' = out, out of, away</a:t>
             </a:r>
             <a:endParaRPr lang="en-US" sz="800" dirty="0"/>
           </a:p>
@@ -28088,7 +27254,7 @@
                 <a:ea typeface="Trebuchet MS" pitchFamily="34" charset="-122"/>
                 <a:cs typeface="Trebuchet MS" pitchFamily="34" charset="-120"/>
               </a:rPr>
-              <a:t>exclaim</a:t>
+              <a:t>exclude</a:t>
             </a:r>
             <a:endParaRPr lang="en-US" sz="2800" dirty="0"/>
           </a:p>
@@ -28776,7 +27942,7 @@
                 <a:ea typeface="Calibri" pitchFamily="34" charset="-122"/>
                 <a:cs typeface="Calibri" pitchFamily="34" charset="-120"/>
               </a:rPr>
-              <a:t>Word Labs  •  wordlabs.app  •  Prefix: 'ex-' = out, out of, beyond</a:t>
+              <a:t>Word Labs  •  wordlabs.app  •  Prefix: 'ex-' = out, out of, away</a:t>
             </a:r>
             <a:endParaRPr lang="en-US" sz="800" dirty="0"/>
           </a:p>
@@ -28915,7 +28081,7 @@
                 <a:ea typeface="Trebuchet MS" pitchFamily="34" charset="-122"/>
                 <a:cs typeface="Trebuchet MS" pitchFamily="34" charset="-120"/>
               </a:rPr>
-              <a:t>exclaim</a:t>
+              <a:t>exclude</a:t>
             </a:r>
             <a:endParaRPr lang="en-US" sz="2800" dirty="0"/>
           </a:p>
@@ -28995,7 +28161,7 @@
         </p:nvSpPr>
         <p:spPr>
           <a:xfrm>
-            <a:off x="2938272" y="2258568"/>
+            <a:off x="2221992" y="2258568"/>
             <a:ext cx="1828800" cy="292608"/>
           </a:xfrm>
           <a:prstGeom prst="rect">
@@ -29029,7 +28195,7 @@
         </p:nvSpPr>
         <p:spPr>
           <a:xfrm>
-            <a:off x="2938272" y="2258568"/>
+            <a:off x="2221992" y="2258568"/>
             <a:ext cx="1828800" cy="292608"/>
           </a:xfrm>
           <a:prstGeom prst="rect">
@@ -29068,7 +28234,7 @@
         </p:nvSpPr>
         <p:spPr>
           <a:xfrm>
-            <a:off x="2938272" y="2569464"/>
+            <a:off x="2221992" y="2569464"/>
             <a:ext cx="1828800" cy="201168"/>
           </a:xfrm>
           <a:prstGeom prst="rect">
@@ -29107,7 +28273,7 @@
         </p:nvSpPr>
         <p:spPr>
           <a:xfrm>
-            <a:off x="5803392" y="2258568"/>
+            <a:off x="4370832" y="2258568"/>
             <a:ext cx="1828800" cy="292608"/>
           </a:xfrm>
           <a:prstGeom prst="rect">
@@ -29141,7 +28307,7 @@
         </p:nvSpPr>
         <p:spPr>
           <a:xfrm>
-            <a:off x="5803392" y="2258568"/>
+            <a:off x="4370832" y="2258568"/>
             <a:ext cx="1828800" cy="292608"/>
           </a:xfrm>
           <a:prstGeom prst="rect">
@@ -29166,7 +28332,7 @@
                 <a:ea typeface="Trebuchet MS" pitchFamily="34" charset="-122"/>
                 <a:cs typeface="Trebuchet MS" pitchFamily="34" charset="-120"/>
               </a:rPr>
-              <a:t>claim</a:t>
+              <a:t>clud</a:t>
             </a:r>
             <a:endParaRPr lang="en-US" sz="1300" dirty="0"/>
           </a:p>
@@ -29180,7 +28346,7 @@
         </p:nvSpPr>
         <p:spPr>
           <a:xfrm>
-            <a:off x="5803392" y="2569464"/>
+            <a:off x="4370832" y="2569464"/>
             <a:ext cx="1828800" cy="201168"/>
           </a:xfrm>
           <a:prstGeom prst="rect">
@@ -29205,7 +28371,7 @@
                 <a:ea typeface="Calibri" pitchFamily="34" charset="-122"/>
                 <a:cs typeface="Calibri" pitchFamily="34" charset="-120"/>
               </a:rPr>
-              <a:t>call out, shout</a:t>
+              <a:t>shut, close</a:t>
             </a:r>
             <a:endParaRPr lang="en-US" sz="850" dirty="0"/>
           </a:p>
@@ -29214,6 +28380,118 @@
       <p:sp>
         <p:nvSpPr>
           <p:cNvPr id="22" name="Shape 20"/>
+          <p:cNvSpPr/>
+          <p:nvPr/>
+        </p:nvSpPr>
+        <p:spPr>
+          <a:xfrm>
+            <a:off x="6519672" y="2258568"/>
+            <a:ext cx="1828800" cy="292608"/>
+          </a:xfrm>
+          <a:prstGeom prst="rect">
+            <a:avLst>
+              <a:gd name="adj" fmla="val 25000"/>
+            </a:avLst>
+          </a:prstGeom>
+          <a:solidFill>
+            <a:srgbClr val="FCE7F3"/>
+          </a:solidFill>
+          <a:ln w="19050">
+            <a:solidFill>
+              <a:srgbClr val="DB2777"/>
+            </a:solidFill>
+            <a:prstDash val="solid"/>
+          </a:ln>
+          <a:effectLst>
+            <a:outerShdw sx="100000" sy="100000" kx="0" ky="0" algn="bl" rotWithShape="0" blurRad="101600" dist="38100" dir="8100000">
+              <a:srgbClr val="000000">
+                <a:alpha val="12000"/>
+              </a:srgbClr>
+            </a:outerShdw>
+          </a:effectLst>
+        </p:spPr>
+      </p:sp>
+      <p:sp>
+        <p:nvSpPr>
+          <p:cNvPr id="23" name="Text 21"/>
+          <p:cNvSpPr/>
+          <p:nvPr/>
+        </p:nvSpPr>
+        <p:spPr>
+          <a:xfrm>
+            <a:off x="6519672" y="2258568"/>
+            <a:ext cx="1828800" cy="292608"/>
+          </a:xfrm>
+          <a:prstGeom prst="rect">
+            <a:avLst/>
+          </a:prstGeom>
+          <a:noFill/>
+          <a:ln/>
+        </p:spPr>
+        <p:txBody>
+          <a:bodyPr wrap="square" lIns="0" tIns="0" rIns="0" bIns="0" rtlCol="0" anchor="ctr"/>
+          <a:lstStyle/>
+          <a:p>
+            <a:pPr algn="ctr" indent="0" marL="0">
+              <a:buNone/>
+            </a:pPr>
+            <a:r>
+              <a:rPr lang="en-US" sz="1300" b="1" dirty="0">
+                <a:solidFill>
+                  <a:srgbClr val="9D174D"/>
+                </a:solidFill>
+                <a:latin typeface="Trebuchet MS" pitchFamily="34" charset="0"/>
+                <a:ea typeface="Trebuchet MS" pitchFamily="34" charset="-122"/>
+                <a:cs typeface="Trebuchet MS" pitchFamily="34" charset="-120"/>
+              </a:rPr>
+              <a:t>e</a:t>
+            </a:r>
+            <a:endParaRPr lang="en-US" sz="1300" dirty="0"/>
+          </a:p>
+        </p:txBody>
+      </p:sp>
+      <p:sp>
+        <p:nvSpPr>
+          <p:cNvPr id="24" name="Text 22"/>
+          <p:cNvSpPr/>
+          <p:nvPr/>
+        </p:nvSpPr>
+        <p:spPr>
+          <a:xfrm>
+            <a:off x="6519672" y="2569464"/>
+            <a:ext cx="1828800" cy="201168"/>
+          </a:xfrm>
+          <a:prstGeom prst="rect">
+            <a:avLst/>
+          </a:prstGeom>
+          <a:noFill/>
+          <a:ln/>
+        </p:spPr>
+        <p:txBody>
+          <a:bodyPr wrap="square" lIns="0" tIns="0" rIns="0" bIns="0" rtlCol="0" anchor="t"/>
+          <a:lstStyle/>
+          <a:p>
+            <a:pPr algn="ctr" indent="0" marL="0">
+              <a:buNone/>
+            </a:pPr>
+            <a:r>
+              <a:rPr lang="en-US" sz="850" dirty="0">
+                <a:solidFill>
+                  <a:srgbClr val="475569"/>
+                </a:solidFill>
+                <a:latin typeface="Calibri" pitchFamily="34" charset="0"/>
+                <a:ea typeface="Calibri" pitchFamily="34" charset="-122"/>
+                <a:cs typeface="Calibri" pitchFamily="34" charset="-120"/>
+              </a:rPr>
+              <a:t>silent e</a:t>
+            </a:r>
+            <a:endParaRPr lang="en-US" sz="850" dirty="0"/>
+          </a:p>
+        </p:txBody>
+      </p:sp>
+      <p:sp>
+        <p:nvSpPr>
+          <p:cNvPr id="25" name="Shape 23"/>
           <p:cNvSpPr/>
           <p:nvPr/>
         </p:nvSpPr>
@@ -29240,7 +28518,7 @@
       </p:sp>
       <p:sp>
         <p:nvSpPr>
-          <p:cNvPr id="23" name="Text 21"/>
+          <p:cNvPr id="26" name="Text 24"/>
           <p:cNvSpPr/>
           <p:nvPr/>
         </p:nvSpPr>
@@ -29279,7 +28557,7 @@
       </p:sp>
       <p:sp>
         <p:nvSpPr>
-          <p:cNvPr id="24" name="Shape 22"/>
+          <p:cNvPr id="27" name="Shape 25"/>
           <p:cNvSpPr/>
           <p:nvPr/>
         </p:nvSpPr>
@@ -29306,7 +28584,7 @@
       </p:sp>
       <p:sp>
         <p:nvSpPr>
-          <p:cNvPr id="25" name="Text 23"/>
+          <p:cNvPr id="28" name="Text 26"/>
           <p:cNvSpPr/>
           <p:nvPr/>
         </p:nvSpPr>
@@ -29345,7 +28623,7 @@
       </p:sp>
       <p:sp>
         <p:nvSpPr>
-          <p:cNvPr id="26" name="Shape 24"/>
+          <p:cNvPr id="29" name="Shape 27"/>
           <p:cNvSpPr/>
           <p:nvPr/>
         </p:nvSpPr>
@@ -29372,7 +28650,7 @@
       </p:sp>
       <p:sp>
         <p:nvSpPr>
-          <p:cNvPr id="27" name="Text 25"/>
+          <p:cNvPr id="30" name="Text 28"/>
           <p:cNvSpPr/>
           <p:nvPr/>
         </p:nvSpPr>
@@ -29411,7 +28689,7 @@
       </p:sp>
       <p:sp>
         <p:nvSpPr>
-          <p:cNvPr id="28" name="Shape 26"/>
+          <p:cNvPr id="31" name="Shape 29"/>
           <p:cNvSpPr/>
           <p:nvPr/>
         </p:nvSpPr>
@@ -29438,7 +28716,7 @@
       </p:sp>
       <p:sp>
         <p:nvSpPr>
-          <p:cNvPr id="29" name="Text 27"/>
+          <p:cNvPr id="32" name="Text 30"/>
           <p:cNvSpPr/>
           <p:nvPr/>
         </p:nvSpPr>
@@ -29761,7 +29039,7 @@
                 <a:ea typeface="Calibri" pitchFamily="34" charset="-122"/>
                 <a:cs typeface="Calibri" pitchFamily="34" charset="-120"/>
               </a:rPr>
-              <a:t>Word Labs  •  wordlabs.app  •  Prefix: 'ex-' = out, out of, beyond</a:t>
+              <a:t>Word Labs  •  wordlabs.app  •  Prefix: 'ex-' = out, out of, away</a:t>
             </a:r>
             <a:endParaRPr lang="en-US" sz="800" dirty="0"/>
           </a:p>
@@ -29900,7 +29178,7 @@
                 <a:ea typeface="Trebuchet MS" pitchFamily="34" charset="-122"/>
                 <a:cs typeface="Trebuchet MS" pitchFamily="34" charset="-120"/>
               </a:rPr>
-              <a:t>exclaim</a:t>
+              <a:t>exclude</a:t>
             </a:r>
             <a:endParaRPr lang="en-US" sz="2800" dirty="0"/>
           </a:p>
@@ -29980,7 +29258,7 @@
         </p:nvSpPr>
         <p:spPr>
           <a:xfrm>
-            <a:off x="2938272" y="2258568"/>
+            <a:off x="2221992" y="2258568"/>
             <a:ext cx="1828800" cy="292608"/>
           </a:xfrm>
           <a:prstGeom prst="rect">
@@ -30014,7 +29292,7 @@
         </p:nvSpPr>
         <p:spPr>
           <a:xfrm>
-            <a:off x="2938272" y="2258568"/>
+            <a:off x="2221992" y="2258568"/>
             <a:ext cx="1828800" cy="292608"/>
           </a:xfrm>
           <a:prstGeom prst="rect">
@@ -30053,7 +29331,7 @@
         </p:nvSpPr>
         <p:spPr>
           <a:xfrm>
-            <a:off x="2938272" y="2569464"/>
+            <a:off x="2221992" y="2569464"/>
             <a:ext cx="1828800" cy="201168"/>
           </a:xfrm>
           <a:prstGeom prst="rect">
@@ -30092,7 +29370,7 @@
         </p:nvSpPr>
         <p:spPr>
           <a:xfrm>
-            <a:off x="5803392" y="2258568"/>
+            <a:off x="4370832" y="2258568"/>
             <a:ext cx="1828800" cy="292608"/>
           </a:xfrm>
           <a:prstGeom prst="rect">
@@ -30126,7 +29404,7 @@
         </p:nvSpPr>
         <p:spPr>
           <a:xfrm>
-            <a:off x="5803392" y="2258568"/>
+            <a:off x="4370832" y="2258568"/>
             <a:ext cx="1828800" cy="292608"/>
           </a:xfrm>
           <a:prstGeom prst="rect">
@@ -30151,7 +29429,7 @@
                 <a:ea typeface="Trebuchet MS" pitchFamily="34" charset="-122"/>
                 <a:cs typeface="Trebuchet MS" pitchFamily="34" charset="-120"/>
               </a:rPr>
-              <a:t>claim</a:t>
+              <a:t>clud</a:t>
             </a:r>
             <a:endParaRPr lang="en-US" sz="1300" dirty="0"/>
           </a:p>
@@ -30165,7 +29443,7 @@
         </p:nvSpPr>
         <p:spPr>
           <a:xfrm>
-            <a:off x="5803392" y="2569464"/>
+            <a:off x="4370832" y="2569464"/>
             <a:ext cx="1828800" cy="201168"/>
           </a:xfrm>
           <a:prstGeom prst="rect">
@@ -30190,7 +29468,7 @@
                 <a:ea typeface="Calibri" pitchFamily="34" charset="-122"/>
                 <a:cs typeface="Calibri" pitchFamily="34" charset="-120"/>
               </a:rPr>
-              <a:t>call out, shout</a:t>
+              <a:t>shut, close</a:t>
             </a:r>
             <a:endParaRPr lang="en-US" sz="850" dirty="0"/>
           </a:p>
@@ -30199,6 +29477,118 @@
       <p:sp>
         <p:nvSpPr>
           <p:cNvPr id="22" name="Shape 20"/>
+          <p:cNvSpPr/>
+          <p:nvPr/>
+        </p:nvSpPr>
+        <p:spPr>
+          <a:xfrm>
+            <a:off x="6519672" y="2258568"/>
+            <a:ext cx="1828800" cy="292608"/>
+          </a:xfrm>
+          <a:prstGeom prst="rect">
+            <a:avLst>
+              <a:gd name="adj" fmla="val 25000"/>
+            </a:avLst>
+          </a:prstGeom>
+          <a:solidFill>
+            <a:srgbClr val="FCE7F3"/>
+          </a:solidFill>
+          <a:ln w="19050">
+            <a:solidFill>
+              <a:srgbClr val="DB2777"/>
+            </a:solidFill>
+            <a:prstDash val="solid"/>
+          </a:ln>
+          <a:effectLst>
+            <a:outerShdw sx="100000" sy="100000" kx="0" ky="0" algn="bl" rotWithShape="0" blurRad="101600" dist="38100" dir="8100000">
+              <a:srgbClr val="000000">
+                <a:alpha val="12000"/>
+              </a:srgbClr>
+            </a:outerShdw>
+          </a:effectLst>
+        </p:spPr>
+      </p:sp>
+      <p:sp>
+        <p:nvSpPr>
+          <p:cNvPr id="23" name="Text 21"/>
+          <p:cNvSpPr/>
+          <p:nvPr/>
+        </p:nvSpPr>
+        <p:spPr>
+          <a:xfrm>
+            <a:off x="6519672" y="2258568"/>
+            <a:ext cx="1828800" cy="292608"/>
+          </a:xfrm>
+          <a:prstGeom prst="rect">
+            <a:avLst/>
+          </a:prstGeom>
+          <a:noFill/>
+          <a:ln/>
+        </p:spPr>
+        <p:txBody>
+          <a:bodyPr wrap="square" lIns="0" tIns="0" rIns="0" bIns="0" rtlCol="0" anchor="ctr"/>
+          <a:lstStyle/>
+          <a:p>
+            <a:pPr algn="ctr" indent="0" marL="0">
+              <a:buNone/>
+            </a:pPr>
+            <a:r>
+              <a:rPr lang="en-US" sz="1300" b="1" dirty="0">
+                <a:solidFill>
+                  <a:srgbClr val="9D174D"/>
+                </a:solidFill>
+                <a:latin typeface="Trebuchet MS" pitchFamily="34" charset="0"/>
+                <a:ea typeface="Trebuchet MS" pitchFamily="34" charset="-122"/>
+                <a:cs typeface="Trebuchet MS" pitchFamily="34" charset="-120"/>
+              </a:rPr>
+              <a:t>e</a:t>
+            </a:r>
+            <a:endParaRPr lang="en-US" sz="1300" dirty="0"/>
+          </a:p>
+        </p:txBody>
+      </p:sp>
+      <p:sp>
+        <p:nvSpPr>
+          <p:cNvPr id="24" name="Text 22"/>
+          <p:cNvSpPr/>
+          <p:nvPr/>
+        </p:nvSpPr>
+        <p:spPr>
+          <a:xfrm>
+            <a:off x="6519672" y="2569464"/>
+            <a:ext cx="1828800" cy="201168"/>
+          </a:xfrm>
+          <a:prstGeom prst="rect">
+            <a:avLst/>
+          </a:prstGeom>
+          <a:noFill/>
+          <a:ln/>
+        </p:spPr>
+        <p:txBody>
+          <a:bodyPr wrap="square" lIns="0" tIns="0" rIns="0" bIns="0" rtlCol="0" anchor="t"/>
+          <a:lstStyle/>
+          <a:p>
+            <a:pPr algn="ctr" indent="0" marL="0">
+              <a:buNone/>
+            </a:pPr>
+            <a:r>
+              <a:rPr lang="en-US" sz="850" dirty="0">
+                <a:solidFill>
+                  <a:srgbClr val="475569"/>
+                </a:solidFill>
+                <a:latin typeface="Calibri" pitchFamily="34" charset="0"/>
+                <a:ea typeface="Calibri" pitchFamily="34" charset="-122"/>
+                <a:cs typeface="Calibri" pitchFamily="34" charset="-120"/>
+              </a:rPr>
+              <a:t>silent e</a:t>
+            </a:r>
+            <a:endParaRPr lang="en-US" sz="850" dirty="0"/>
+          </a:p>
+        </p:txBody>
+      </p:sp>
+      <p:sp>
+        <p:nvSpPr>
+          <p:cNvPr id="25" name="Shape 23"/>
           <p:cNvSpPr/>
           <p:nvPr/>
         </p:nvSpPr>
@@ -30225,7 +29615,7 @@
       </p:sp>
       <p:sp>
         <p:nvSpPr>
-          <p:cNvPr id="23" name="Text 21"/>
+          <p:cNvPr id="26" name="Text 24"/>
           <p:cNvSpPr/>
           <p:nvPr/>
         </p:nvSpPr>
@@ -30264,7 +29654,7 @@
       </p:sp>
       <p:sp>
         <p:nvSpPr>
-          <p:cNvPr id="24" name="Shape 22"/>
+          <p:cNvPr id="27" name="Shape 25"/>
           <p:cNvSpPr/>
           <p:nvPr/>
         </p:nvSpPr>
@@ -30291,7 +29681,7 @@
       </p:sp>
       <p:sp>
         <p:nvSpPr>
-          <p:cNvPr id="25" name="Shape 23"/>
+          <p:cNvPr id="28" name="Shape 26"/>
           <p:cNvSpPr/>
           <p:nvPr/>
         </p:nvSpPr>
@@ -30318,7 +29708,7 @@
       </p:sp>
       <p:sp>
         <p:nvSpPr>
-          <p:cNvPr id="26" name="Text 24"/>
+          <p:cNvPr id="29" name="Text 27"/>
           <p:cNvSpPr/>
           <p:nvPr/>
         </p:nvSpPr>
@@ -30357,7 +29747,7 @@
       </p:sp>
       <p:sp>
         <p:nvSpPr>
-          <p:cNvPr id="27" name="Text 25"/>
+          <p:cNvPr id="30" name="Text 28"/>
           <p:cNvSpPr/>
           <p:nvPr/>
         </p:nvSpPr>
@@ -30396,7 +29786,7 @@
       </p:sp>
       <p:sp>
         <p:nvSpPr>
-          <p:cNvPr id="28" name="Shape 26"/>
+          <p:cNvPr id="31" name="Shape 29"/>
           <p:cNvSpPr/>
           <p:nvPr/>
         </p:nvSpPr>
@@ -30423,7 +29813,7 @@
       </p:sp>
       <p:sp>
         <p:nvSpPr>
-          <p:cNvPr id="29" name="Text 27"/>
+          <p:cNvPr id="32" name="Text 30"/>
           <p:cNvSpPr/>
           <p:nvPr/>
         </p:nvSpPr>
@@ -30454,7 +29844,7 @@
                 <a:ea typeface="Trebuchet MS" pitchFamily="34" charset="-122"/>
                 <a:cs typeface="Trebuchet MS" pitchFamily="34" charset="-120"/>
               </a:rPr>
-              <a:t>claim</a:t>
+              <a:t>clude</a:t>
             </a:r>
             <a:endParaRPr lang="en-US" sz="1400" dirty="0"/>
           </a:p>
@@ -30462,7 +29852,7 @@
       </p:sp>
       <p:sp>
         <p:nvSpPr>
-          <p:cNvPr id="30" name="Shape 28"/>
+          <p:cNvPr id="33" name="Shape 31"/>
           <p:cNvSpPr/>
           <p:nvPr/>
         </p:nvSpPr>
@@ -30489,7 +29879,7 @@
       </p:sp>
       <p:sp>
         <p:nvSpPr>
-          <p:cNvPr id="31" name="Text 29"/>
+          <p:cNvPr id="34" name="Text 32"/>
           <p:cNvSpPr/>
           <p:nvPr/>
         </p:nvSpPr>
@@ -30528,7 +29918,7 @@
       </p:sp>
       <p:sp>
         <p:nvSpPr>
-          <p:cNvPr id="32" name="Shape 30"/>
+          <p:cNvPr id="35" name="Shape 33"/>
           <p:cNvSpPr/>
           <p:nvPr/>
         </p:nvSpPr>
@@ -30555,7 +29945,7 @@
       </p:sp>
       <p:sp>
         <p:nvSpPr>
-          <p:cNvPr id="33" name="Text 31"/>
+          <p:cNvPr id="36" name="Text 34"/>
           <p:cNvSpPr/>
           <p:nvPr/>
         </p:nvSpPr>
@@ -30878,7 +30268,7 @@
                 <a:ea typeface="Calibri" pitchFamily="34" charset="-122"/>
                 <a:cs typeface="Calibri" pitchFamily="34" charset="-120"/>
               </a:rPr>
-              <a:t>Word Labs  •  wordlabs.app  •  Prefix: 'ex-' = out, out of, beyond</a:t>
+              <a:t>Word Labs  •  wordlabs.app  •  Prefix: 'ex-' = out, out of, away</a:t>
             </a:r>
             <a:endParaRPr lang="en-US" sz="800" dirty="0"/>
           </a:p>
@@ -31017,7 +30407,7 @@
                 <a:ea typeface="Trebuchet MS" pitchFamily="34" charset="-122"/>
                 <a:cs typeface="Trebuchet MS" pitchFamily="34" charset="-120"/>
               </a:rPr>
-              <a:t>exclaim</a:t>
+              <a:t>exclude</a:t>
             </a:r>
             <a:endParaRPr lang="en-US" sz="2800" dirty="0"/>
           </a:p>
@@ -31097,7 +30487,7 @@
         </p:nvSpPr>
         <p:spPr>
           <a:xfrm>
-            <a:off x="2938272" y="2258568"/>
+            <a:off x="2221992" y="2258568"/>
             <a:ext cx="1828800" cy="292608"/>
           </a:xfrm>
           <a:prstGeom prst="rect">
@@ -31131,7 +30521,7 @@
         </p:nvSpPr>
         <p:spPr>
           <a:xfrm>
-            <a:off x="2938272" y="2258568"/>
+            <a:off x="2221992" y="2258568"/>
             <a:ext cx="1828800" cy="292608"/>
           </a:xfrm>
           <a:prstGeom prst="rect">
@@ -31170,7 +30560,7 @@
         </p:nvSpPr>
         <p:spPr>
           <a:xfrm>
-            <a:off x="2938272" y="2569464"/>
+            <a:off x="2221992" y="2569464"/>
             <a:ext cx="1828800" cy="201168"/>
           </a:xfrm>
           <a:prstGeom prst="rect">
@@ -31209,7 +30599,7 @@
         </p:nvSpPr>
         <p:spPr>
           <a:xfrm>
-            <a:off x="5803392" y="2258568"/>
+            <a:off x="4370832" y="2258568"/>
             <a:ext cx="1828800" cy="292608"/>
           </a:xfrm>
           <a:prstGeom prst="rect">
@@ -31243,7 +30633,7 @@
         </p:nvSpPr>
         <p:spPr>
           <a:xfrm>
-            <a:off x="5803392" y="2258568"/>
+            <a:off x="4370832" y="2258568"/>
             <a:ext cx="1828800" cy="292608"/>
           </a:xfrm>
           <a:prstGeom prst="rect">
@@ -31268,7 +30658,7 @@
                 <a:ea typeface="Trebuchet MS" pitchFamily="34" charset="-122"/>
                 <a:cs typeface="Trebuchet MS" pitchFamily="34" charset="-120"/>
               </a:rPr>
-              <a:t>claim</a:t>
+              <a:t>clud</a:t>
             </a:r>
             <a:endParaRPr lang="en-US" sz="1300" dirty="0"/>
           </a:p>
@@ -31282,7 +30672,7 @@
         </p:nvSpPr>
         <p:spPr>
           <a:xfrm>
-            <a:off x="5803392" y="2569464"/>
+            <a:off x="4370832" y="2569464"/>
             <a:ext cx="1828800" cy="201168"/>
           </a:xfrm>
           <a:prstGeom prst="rect">
@@ -31307,7 +30697,7 @@
                 <a:ea typeface="Calibri" pitchFamily="34" charset="-122"/>
                 <a:cs typeface="Calibri" pitchFamily="34" charset="-120"/>
               </a:rPr>
-              <a:t>call out, shout</a:t>
+              <a:t>shut, close</a:t>
             </a:r>
             <a:endParaRPr lang="en-US" sz="850" dirty="0"/>
           </a:p>
@@ -31316,6 +30706,118 @@
       <p:sp>
         <p:nvSpPr>
           <p:cNvPr id="22" name="Shape 20"/>
+          <p:cNvSpPr/>
+          <p:nvPr/>
+        </p:nvSpPr>
+        <p:spPr>
+          <a:xfrm>
+            <a:off x="6519672" y="2258568"/>
+            <a:ext cx="1828800" cy="292608"/>
+          </a:xfrm>
+          <a:prstGeom prst="rect">
+            <a:avLst>
+              <a:gd name="adj" fmla="val 25000"/>
+            </a:avLst>
+          </a:prstGeom>
+          <a:solidFill>
+            <a:srgbClr val="FCE7F3"/>
+          </a:solidFill>
+          <a:ln w="19050">
+            <a:solidFill>
+              <a:srgbClr val="DB2777"/>
+            </a:solidFill>
+            <a:prstDash val="solid"/>
+          </a:ln>
+          <a:effectLst>
+            <a:outerShdw sx="100000" sy="100000" kx="0" ky="0" algn="bl" rotWithShape="0" blurRad="101600" dist="38100" dir="8100000">
+              <a:srgbClr val="000000">
+                <a:alpha val="12000"/>
+              </a:srgbClr>
+            </a:outerShdw>
+          </a:effectLst>
+        </p:spPr>
+      </p:sp>
+      <p:sp>
+        <p:nvSpPr>
+          <p:cNvPr id="23" name="Text 21"/>
+          <p:cNvSpPr/>
+          <p:nvPr/>
+        </p:nvSpPr>
+        <p:spPr>
+          <a:xfrm>
+            <a:off x="6519672" y="2258568"/>
+            <a:ext cx="1828800" cy="292608"/>
+          </a:xfrm>
+          <a:prstGeom prst="rect">
+            <a:avLst/>
+          </a:prstGeom>
+          <a:noFill/>
+          <a:ln/>
+        </p:spPr>
+        <p:txBody>
+          <a:bodyPr wrap="square" lIns="0" tIns="0" rIns="0" bIns="0" rtlCol="0" anchor="ctr"/>
+          <a:lstStyle/>
+          <a:p>
+            <a:pPr algn="ctr" indent="0" marL="0">
+              <a:buNone/>
+            </a:pPr>
+            <a:r>
+              <a:rPr lang="en-US" sz="1300" b="1" dirty="0">
+                <a:solidFill>
+                  <a:srgbClr val="9D174D"/>
+                </a:solidFill>
+                <a:latin typeface="Trebuchet MS" pitchFamily="34" charset="0"/>
+                <a:ea typeface="Trebuchet MS" pitchFamily="34" charset="-122"/>
+                <a:cs typeface="Trebuchet MS" pitchFamily="34" charset="-120"/>
+              </a:rPr>
+              <a:t>e</a:t>
+            </a:r>
+            <a:endParaRPr lang="en-US" sz="1300" dirty="0"/>
+          </a:p>
+        </p:txBody>
+      </p:sp>
+      <p:sp>
+        <p:nvSpPr>
+          <p:cNvPr id="24" name="Text 22"/>
+          <p:cNvSpPr/>
+          <p:nvPr/>
+        </p:nvSpPr>
+        <p:spPr>
+          <a:xfrm>
+            <a:off x="6519672" y="2569464"/>
+            <a:ext cx="1828800" cy="201168"/>
+          </a:xfrm>
+          <a:prstGeom prst="rect">
+            <a:avLst/>
+          </a:prstGeom>
+          <a:noFill/>
+          <a:ln/>
+        </p:spPr>
+        <p:txBody>
+          <a:bodyPr wrap="square" lIns="0" tIns="0" rIns="0" bIns="0" rtlCol="0" anchor="t"/>
+          <a:lstStyle/>
+          <a:p>
+            <a:pPr algn="ctr" indent="0" marL="0">
+              <a:buNone/>
+            </a:pPr>
+            <a:r>
+              <a:rPr lang="en-US" sz="850" dirty="0">
+                <a:solidFill>
+                  <a:srgbClr val="475569"/>
+                </a:solidFill>
+                <a:latin typeface="Calibri" pitchFamily="34" charset="0"/>
+                <a:ea typeface="Calibri" pitchFamily="34" charset="-122"/>
+                <a:cs typeface="Calibri" pitchFamily="34" charset="-120"/>
+              </a:rPr>
+              <a:t>silent e</a:t>
+            </a:r>
+            <a:endParaRPr lang="en-US" sz="850" dirty="0"/>
+          </a:p>
+        </p:txBody>
+      </p:sp>
+      <p:sp>
+        <p:nvSpPr>
+          <p:cNvPr id="25" name="Shape 23"/>
           <p:cNvSpPr/>
           <p:nvPr/>
         </p:nvSpPr>
@@ -31342,7 +30844,7 @@
       </p:sp>
       <p:sp>
         <p:nvSpPr>
-          <p:cNvPr id="23" name="Text 21"/>
+          <p:cNvPr id="26" name="Text 24"/>
           <p:cNvSpPr/>
           <p:nvPr/>
         </p:nvSpPr>
@@ -31381,7 +30883,7 @@
       </p:sp>
       <p:sp>
         <p:nvSpPr>
-          <p:cNvPr id="24" name="Shape 22"/>
+          <p:cNvPr id="27" name="Shape 25"/>
           <p:cNvSpPr/>
           <p:nvPr/>
         </p:nvSpPr>
@@ -31408,7 +30910,7 @@
       </p:sp>
       <p:sp>
         <p:nvSpPr>
-          <p:cNvPr id="25" name="Shape 23"/>
+          <p:cNvPr id="28" name="Shape 26"/>
           <p:cNvSpPr/>
           <p:nvPr/>
         </p:nvSpPr>
@@ -31435,7 +30937,7 @@
       </p:sp>
       <p:sp>
         <p:nvSpPr>
-          <p:cNvPr id="26" name="Text 24"/>
+          <p:cNvPr id="29" name="Text 27"/>
           <p:cNvSpPr/>
           <p:nvPr/>
         </p:nvSpPr>
@@ -31474,7 +30976,7 @@
       </p:sp>
       <p:sp>
         <p:nvSpPr>
-          <p:cNvPr id="27" name="Text 25"/>
+          <p:cNvPr id="30" name="Text 28"/>
           <p:cNvSpPr/>
           <p:nvPr/>
         </p:nvSpPr>
@@ -31513,7 +31015,7 @@
       </p:sp>
       <p:sp>
         <p:nvSpPr>
-          <p:cNvPr id="28" name="Shape 26"/>
+          <p:cNvPr id="31" name="Shape 29"/>
           <p:cNvSpPr/>
           <p:nvPr/>
         </p:nvSpPr>
@@ -31540,7 +31042,7 @@
       </p:sp>
       <p:sp>
         <p:nvSpPr>
-          <p:cNvPr id="29" name="Text 27"/>
+          <p:cNvPr id="32" name="Text 30"/>
           <p:cNvSpPr/>
           <p:nvPr/>
         </p:nvSpPr>
@@ -31571,7 +31073,7 @@
                 <a:ea typeface="Trebuchet MS" pitchFamily="34" charset="-122"/>
                 <a:cs typeface="Trebuchet MS" pitchFamily="34" charset="-120"/>
               </a:rPr>
-              <a:t>claim</a:t>
+              <a:t>clude</a:t>
             </a:r>
             <a:endParaRPr lang="en-US" sz="1400" dirty="0"/>
           </a:p>
@@ -31579,7 +31081,7 @@
       </p:sp>
       <p:sp>
         <p:nvSpPr>
-          <p:cNvPr id="30" name="Shape 28"/>
+          <p:cNvPr id="33" name="Shape 31"/>
           <p:cNvSpPr/>
           <p:nvPr/>
         </p:nvSpPr>
@@ -31606,7 +31108,7 @@
       </p:sp>
       <p:sp>
         <p:nvSpPr>
-          <p:cNvPr id="31" name="Text 29"/>
+          <p:cNvPr id="34" name="Text 32"/>
           <p:cNvSpPr/>
           <p:nvPr/>
         </p:nvSpPr>
@@ -31645,18 +31147,18 @@
       </p:sp>
       <p:sp>
         <p:nvSpPr>
-          <p:cNvPr id="32" name="Shape 30"/>
+          <p:cNvPr id="35" name="Shape 33"/>
           <p:cNvSpPr/>
           <p:nvPr/>
         </p:nvSpPr>
         <p:spPr>
           <a:xfrm>
             <a:off x="1874520" y="4096512"/>
-            <a:ext cx="6903720" cy="658368"/>
+            <a:ext cx="6903720" cy="804672"/>
           </a:xfrm>
           <a:prstGeom prst="rect">
             <a:avLst>
-              <a:gd name="adj" fmla="val 8333"/>
+              <a:gd name="adj" fmla="val 6818"/>
             </a:avLst>
           </a:prstGeom>
           <a:solidFill>
@@ -31672,18 +31174,18 @@
       </p:sp>
       <p:sp>
         <p:nvSpPr>
-          <p:cNvPr id="33" name="Shape 31"/>
-          <p:cNvSpPr/>
-          <p:nvPr/>
-        </p:nvSpPr>
-        <p:spPr>
-          <a:xfrm>
-            <a:off x="2427732" y="4169664"/>
-            <a:ext cx="685800" cy="475488"/>
+          <p:cNvPr id="36" name="Shape 34"/>
+          <p:cNvSpPr/>
+          <p:nvPr/>
+        </p:nvSpPr>
+        <p:spPr>
+          <a:xfrm>
+            <a:off x="2254649" y="4169664"/>
+            <a:ext cx="685800" cy="384048"/>
           </a:xfrm>
           <a:prstGeom prst="rect">
             <a:avLst>
-              <a:gd name="adj" fmla="val 7692"/>
+              <a:gd name="adj" fmla="val 9524"/>
             </a:avLst>
           </a:prstGeom>
           <a:solidFill>
@@ -31699,14 +31201,14 @@
       </p:sp>
       <p:sp>
         <p:nvSpPr>
-          <p:cNvPr id="34" name="Text 32"/>
-          <p:cNvSpPr/>
-          <p:nvPr/>
-        </p:nvSpPr>
-        <p:spPr>
-          <a:xfrm>
-            <a:off x="2427732" y="4169664"/>
-            <a:ext cx="685800" cy="475488"/>
+          <p:cNvPr id="37" name="Text 35"/>
+          <p:cNvSpPr/>
+          <p:nvPr/>
+        </p:nvSpPr>
+        <p:spPr>
+          <a:xfrm>
+            <a:off x="2254649" y="4169664"/>
+            <a:ext cx="685800" cy="384048"/>
           </a:xfrm>
           <a:prstGeom prst="rect">
             <a:avLst/>
@@ -31738,18 +31240,18 @@
       </p:sp>
       <p:sp>
         <p:nvSpPr>
-          <p:cNvPr id="35" name="Shape 33"/>
-          <p:cNvSpPr/>
-          <p:nvPr/>
-        </p:nvSpPr>
-        <p:spPr>
-          <a:xfrm>
-            <a:off x="3639312" y="4169664"/>
-            <a:ext cx="685800" cy="475488"/>
+          <p:cNvPr id="38" name="Shape 36"/>
+          <p:cNvSpPr/>
+          <p:nvPr/>
+        </p:nvSpPr>
+        <p:spPr>
+          <a:xfrm>
+            <a:off x="3293146" y="4169664"/>
+            <a:ext cx="685800" cy="384048"/>
           </a:xfrm>
           <a:prstGeom prst="rect">
             <a:avLst>
-              <a:gd name="adj" fmla="val 7692"/>
+              <a:gd name="adj" fmla="val 9524"/>
             </a:avLst>
           </a:prstGeom>
           <a:solidFill>
@@ -31765,14 +31267,14 @@
       </p:sp>
       <p:sp>
         <p:nvSpPr>
-          <p:cNvPr id="36" name="Text 34"/>
-          <p:cNvSpPr/>
-          <p:nvPr/>
-        </p:nvSpPr>
-        <p:spPr>
-          <a:xfrm>
-            <a:off x="3639312" y="4169664"/>
-            <a:ext cx="685800" cy="475488"/>
+          <p:cNvPr id="39" name="Text 37"/>
+          <p:cNvSpPr/>
+          <p:nvPr/>
+        </p:nvSpPr>
+        <p:spPr>
+          <a:xfrm>
+            <a:off x="3293146" y="4169664"/>
+            <a:ext cx="685800" cy="384048"/>
           </a:xfrm>
           <a:prstGeom prst="rect">
             <a:avLst/>
@@ -31804,18 +31306,18 @@
       </p:sp>
       <p:sp>
         <p:nvSpPr>
-          <p:cNvPr id="37" name="Shape 35"/>
-          <p:cNvSpPr/>
-          <p:nvPr/>
-        </p:nvSpPr>
-        <p:spPr>
-          <a:xfrm>
-            <a:off x="4850892" y="4169664"/>
-            <a:ext cx="685800" cy="475488"/>
+          <p:cNvPr id="40" name="Shape 38"/>
+          <p:cNvSpPr/>
+          <p:nvPr/>
+        </p:nvSpPr>
+        <p:spPr>
+          <a:xfrm>
+            <a:off x="4331643" y="4169664"/>
+            <a:ext cx="685800" cy="384048"/>
           </a:xfrm>
           <a:prstGeom prst="rect">
             <a:avLst>
-              <a:gd name="adj" fmla="val 7692"/>
+              <a:gd name="adj" fmla="val 9524"/>
             </a:avLst>
           </a:prstGeom>
           <a:solidFill>
@@ -31831,14 +31333,14 @@
       </p:sp>
       <p:sp>
         <p:nvSpPr>
-          <p:cNvPr id="38" name="Text 36"/>
-          <p:cNvSpPr/>
-          <p:nvPr/>
-        </p:nvSpPr>
-        <p:spPr>
-          <a:xfrm>
-            <a:off x="4850892" y="4169664"/>
-            <a:ext cx="685800" cy="475488"/>
+          <p:cNvPr id="41" name="Text 39"/>
+          <p:cNvSpPr/>
+          <p:nvPr/>
+        </p:nvSpPr>
+        <p:spPr>
+          <a:xfrm>
+            <a:off x="4331643" y="4169664"/>
+            <a:ext cx="685800" cy="384048"/>
           </a:xfrm>
           <a:prstGeom prst="rect">
             <a:avLst/>
@@ -31862,7 +31364,7 @@
                 <a:ea typeface="Trebuchet MS" pitchFamily="34" charset="-122"/>
                 <a:cs typeface="Trebuchet MS" pitchFamily="34" charset="-120"/>
               </a:rPr>
-              <a:t>cl</a:t>
+              <a:t>c</a:t>
             </a:r>
             <a:endParaRPr lang="en-US" sz="900" dirty="0"/>
           </a:p>
@@ -31870,18 +31372,18 @@
       </p:sp>
       <p:sp>
         <p:nvSpPr>
-          <p:cNvPr id="39" name="Shape 37"/>
-          <p:cNvSpPr/>
-          <p:nvPr/>
-        </p:nvSpPr>
-        <p:spPr>
-          <a:xfrm>
-            <a:off x="6062472" y="4169664"/>
-            <a:ext cx="685800" cy="475488"/>
+          <p:cNvPr id="42" name="Shape 40"/>
+          <p:cNvSpPr/>
+          <p:nvPr/>
+        </p:nvSpPr>
+        <p:spPr>
+          <a:xfrm>
+            <a:off x="5370141" y="4169664"/>
+            <a:ext cx="685800" cy="384048"/>
           </a:xfrm>
           <a:prstGeom prst="rect">
             <a:avLst>
-              <a:gd name="adj" fmla="val 7692"/>
+              <a:gd name="adj" fmla="val 9524"/>
             </a:avLst>
           </a:prstGeom>
           <a:solidFill>
@@ -31897,14 +31399,14 @@
       </p:sp>
       <p:sp>
         <p:nvSpPr>
-          <p:cNvPr id="40" name="Text 38"/>
-          <p:cNvSpPr/>
-          <p:nvPr/>
-        </p:nvSpPr>
-        <p:spPr>
-          <a:xfrm>
-            <a:off x="6062472" y="4169664"/>
-            <a:ext cx="685800" cy="475488"/>
+          <p:cNvPr id="43" name="Text 41"/>
+          <p:cNvSpPr/>
+          <p:nvPr/>
+        </p:nvSpPr>
+        <p:spPr>
+          <a:xfrm>
+            <a:off x="5370141" y="4169664"/>
+            <a:ext cx="685800" cy="384048"/>
           </a:xfrm>
           <a:prstGeom prst="rect">
             <a:avLst/>
@@ -31928,7 +31430,7 @@
                 <a:ea typeface="Trebuchet MS" pitchFamily="34" charset="-122"/>
                 <a:cs typeface="Trebuchet MS" pitchFamily="34" charset="-120"/>
               </a:rPr>
-              <a:t>ai</a:t>
+              <a:t>l</a:t>
             </a:r>
             <a:endParaRPr lang="en-US" sz="900" dirty="0"/>
           </a:p>
@@ -31936,18 +31438,18 @@
       </p:sp>
       <p:sp>
         <p:nvSpPr>
-          <p:cNvPr id="41" name="Shape 39"/>
-          <p:cNvSpPr/>
-          <p:nvPr/>
-        </p:nvSpPr>
-        <p:spPr>
-          <a:xfrm>
-            <a:off x="7274052" y="4169664"/>
-            <a:ext cx="685800" cy="475488"/>
+          <p:cNvPr id="44" name="Shape 42"/>
+          <p:cNvSpPr/>
+          <p:nvPr/>
+        </p:nvSpPr>
+        <p:spPr>
+          <a:xfrm>
+            <a:off x="6408638" y="4169664"/>
+            <a:ext cx="685800" cy="384048"/>
           </a:xfrm>
           <a:prstGeom prst="rect">
             <a:avLst>
-              <a:gd name="adj" fmla="val 7692"/>
+              <a:gd name="adj" fmla="val 9524"/>
             </a:avLst>
           </a:prstGeom>
           <a:solidFill>
@@ -31963,14 +31465,14 @@
       </p:sp>
       <p:sp>
         <p:nvSpPr>
-          <p:cNvPr id="42" name="Text 40"/>
-          <p:cNvSpPr/>
-          <p:nvPr/>
-        </p:nvSpPr>
-        <p:spPr>
-          <a:xfrm>
-            <a:off x="7274052" y="4169664"/>
-            <a:ext cx="685800" cy="475488"/>
+          <p:cNvPr id="45" name="Text 43"/>
+          <p:cNvSpPr/>
+          <p:nvPr/>
+        </p:nvSpPr>
+        <p:spPr>
+          <a:xfrm>
+            <a:off x="6408638" y="4169664"/>
+            <a:ext cx="685800" cy="384048"/>
           </a:xfrm>
           <a:prstGeom prst="rect">
             <a:avLst/>
@@ -31994,9 +31496,114 @@
                 <a:ea typeface="Trebuchet MS" pitchFamily="34" charset="-122"/>
                 <a:cs typeface="Trebuchet MS" pitchFamily="34" charset="-120"/>
               </a:rPr>
-              <a:t>m</a:t>
+              <a:t>u</a:t>
             </a:r>
             <a:endParaRPr lang="en-US" sz="900" dirty="0"/>
+          </a:p>
+        </p:txBody>
+      </p:sp>
+      <p:sp>
+        <p:nvSpPr>
+          <p:cNvPr id="46" name="Shape 44"/>
+          <p:cNvSpPr/>
+          <p:nvPr/>
+        </p:nvSpPr>
+        <p:spPr>
+          <a:xfrm>
+            <a:off x="7447135" y="4169664"/>
+            <a:ext cx="685800" cy="384048"/>
+          </a:xfrm>
+          <a:prstGeom prst="rect">
+            <a:avLst>
+              <a:gd name="adj" fmla="val 9524"/>
+            </a:avLst>
+          </a:prstGeom>
+          <a:solidFill>
+            <a:srgbClr val="FFFFFF"/>
+          </a:solidFill>
+          <a:ln w="12700">
+            <a:solidFill>
+              <a:srgbClr val="DB2777"/>
+            </a:solidFill>
+            <a:prstDash val="solid"/>
+          </a:ln>
+        </p:spPr>
+      </p:sp>
+      <p:sp>
+        <p:nvSpPr>
+          <p:cNvPr id="47" name="Text 45"/>
+          <p:cNvSpPr/>
+          <p:nvPr/>
+        </p:nvSpPr>
+        <p:spPr>
+          <a:xfrm>
+            <a:off x="7447135" y="4169664"/>
+            <a:ext cx="685800" cy="384048"/>
+          </a:xfrm>
+          <a:prstGeom prst="rect">
+            <a:avLst/>
+          </a:prstGeom>
+          <a:noFill/>
+          <a:ln/>
+        </p:spPr>
+        <p:txBody>
+          <a:bodyPr wrap="square" lIns="0" tIns="0" rIns="0" bIns="0" rtlCol="0" anchor="ctr"/>
+          <a:lstStyle/>
+          <a:p>
+            <a:pPr algn="ctr" indent="0" marL="0">
+              <a:buNone/>
+            </a:pPr>
+            <a:r>
+              <a:rPr lang="en-US" sz="900" b="1" dirty="0">
+                <a:solidFill>
+                  <a:srgbClr val="9D174D"/>
+                </a:solidFill>
+                <a:latin typeface="Trebuchet MS" pitchFamily="34" charset="0"/>
+                <a:ea typeface="Trebuchet MS" pitchFamily="34" charset="-122"/>
+                <a:cs typeface="Trebuchet MS" pitchFamily="34" charset="-120"/>
+              </a:rPr>
+              <a:t>de</a:t>
+            </a:r>
+            <a:endParaRPr lang="en-US" sz="900" dirty="0"/>
+          </a:p>
+        </p:txBody>
+      </p:sp>
+      <p:sp>
+        <p:nvSpPr>
+          <p:cNvPr id="48" name="Text 46"/>
+          <p:cNvSpPr/>
+          <p:nvPr/>
+        </p:nvSpPr>
+        <p:spPr>
+          <a:xfrm>
+            <a:off x="7447135" y="4572000"/>
+            <a:ext cx="685800" cy="219456"/>
+          </a:xfrm>
+          <a:prstGeom prst="rect">
+            <a:avLst/>
+          </a:prstGeom>
+          <a:noFill/>
+          <a:ln/>
+        </p:spPr>
+        <p:txBody>
+          <a:bodyPr wrap="square" lIns="0" tIns="0" rIns="0" bIns="0" rtlCol="0" anchor="t"/>
+          <a:lstStyle/>
+          <a:p>
+            <a:pPr algn="ctr" indent="0" marL="0">
+              <a:buNone/>
+            </a:pPr>
+            <a:r>
+              <a:rPr lang="en-US" sz="750" i="1" dirty="0">
+                <a:solidFill>
+                  <a:srgbClr val="94A3B8"/>
+                </a:solidFill>
+                <a:latin typeface="Calibri" pitchFamily="34" charset="0"/>
+                <a:ea typeface="Calibri" pitchFamily="34" charset="-122"/>
+                <a:cs typeface="Calibri" pitchFamily="34" charset="-120"/>
+              </a:rPr>
+              <a:t>/d/</a:t>
+            </a:r>
+            <a:endParaRPr lang="en-US" sz="750" dirty="0"/>
           </a:p>
         </p:txBody>
       </p:sp>
@@ -32286,7 +31893,7 @@
                 <a:ea typeface="Calibri" pitchFamily="34" charset="-122"/>
                 <a:cs typeface="Calibri" pitchFamily="34" charset="-120"/>
               </a:rPr>
-              <a:t>Word Labs  •  wordlabs.app  •  Prefix: 'ex-' = out, out of, beyond</a:t>
+              <a:t>Word Labs  •  wordlabs.app  •  Prefix: 'ex-' = out, out of, away</a:t>
             </a:r>
             <a:endParaRPr lang="en-US" sz="800" dirty="0"/>
           </a:p>
@@ -33455,7 +33062,7 @@
                 <a:ea typeface="Calibri" pitchFamily="34" charset="-122"/>
                 <a:cs typeface="Calibri" pitchFamily="34" charset="-120"/>
               </a:rPr>
-              <a:t>Word Labs  •  wordlabs.app  •  Prefix: 'ex-' = out, out of, beyond</a:t>
+              <a:t>Word Labs  •  wordlabs.app  •  Prefix: 'ex-' = out, out of, away</a:t>
             </a:r>
             <a:endParaRPr lang="en-US" sz="800" dirty="0"/>
           </a:p>
@@ -33884,7 +33491,7 @@
                 <a:ea typeface="Trebuchet MS" pitchFamily="34" charset="-122"/>
                 <a:cs typeface="Trebuchet MS" pitchFamily="34" charset="-120"/>
               </a:rPr>
-              <a:t>-ion</a:t>
+              <a:t>-ed</a:t>
             </a:r>
             <a:endParaRPr lang="en-US" sz="1300" dirty="0"/>
           </a:p>
@@ -34126,7 +33733,7 @@
                 <a:ea typeface="Trebuchet MS" pitchFamily="34" charset="-122"/>
                 <a:cs typeface="Trebuchet MS" pitchFamily="34" charset="-120"/>
               </a:rPr>
-              <a:t>press</a:t>
+              <a:t>tend</a:t>
             </a:r>
             <a:endParaRPr lang="en-US" sz="1300" dirty="0"/>
           </a:p>
@@ -34190,7 +33797,7 @@
                 <a:ea typeface="Trebuchet MS" pitchFamily="34" charset="-122"/>
                 <a:cs typeface="Trebuchet MS" pitchFamily="34" charset="-120"/>
               </a:rPr>
-              <a:t>-ed</a:t>
+              <a:t>-ion</a:t>
             </a:r>
             <a:endParaRPr lang="en-US" sz="1300" dirty="0"/>
           </a:p>
@@ -34279,7 +33886,7 @@
                 <a:ea typeface="Trebuchet MS" pitchFamily="34" charset="-122"/>
                 <a:cs typeface="Trebuchet MS" pitchFamily="34" charset="-120"/>
               </a:rPr>
-              <a:t>tend</a:t>
+              <a:t>claim</a:t>
             </a:r>
             <a:endParaRPr lang="en-US" sz="1300" dirty="0"/>
           </a:p>
@@ -34343,7 +33950,7 @@
                 <a:ea typeface="Trebuchet MS" pitchFamily="34" charset="-122"/>
                 <a:cs typeface="Trebuchet MS" pitchFamily="34" charset="-120"/>
               </a:rPr>
-              <a:t>-tion</a:t>
+              <a:t>-ment</a:t>
             </a:r>
             <a:endParaRPr lang="en-US" sz="1300" dirty="0"/>
           </a:p>
@@ -34432,7 +34039,7 @@
                 <a:ea typeface="Trebuchet MS" pitchFamily="34" charset="-122"/>
                 <a:cs typeface="Trebuchet MS" pitchFamily="34" charset="-120"/>
               </a:rPr>
-              <a:t>claim</a:t>
+              <a:t>press</a:t>
             </a:r>
             <a:endParaRPr lang="en-US" sz="1300" dirty="0"/>
           </a:p>
@@ -34496,7 +34103,7 @@
                 <a:ea typeface="Trebuchet MS" pitchFamily="34" charset="-122"/>
                 <a:cs typeface="Trebuchet MS" pitchFamily="34" charset="-120"/>
               </a:rPr>
-              <a:t>-ment</a:t>
+              <a:t>-ive</a:t>
             </a:r>
             <a:endParaRPr lang="en-US" sz="1300" dirty="0"/>
           </a:p>
@@ -34601,7 +34208,7 @@
                 <a:ea typeface="Trebuchet MS" pitchFamily="34" charset="-122"/>
                 <a:cs typeface="Trebuchet MS" pitchFamily="34" charset="-120"/>
               </a:rPr>
-              <a:t>exit</a:t>
+              <a:t>explore</a:t>
             </a:r>
             <a:endParaRPr lang="en-US" sz="1200" dirty="0"/>
           </a:p>
@@ -34667,7 +34274,7 @@
                 <a:ea typeface="Trebuchet MS" pitchFamily="34" charset="-122"/>
                 <a:cs typeface="Trebuchet MS" pitchFamily="34" charset="-120"/>
               </a:rPr>
-              <a:t>explore</a:t>
+              <a:t>explain</a:t>
             </a:r>
             <a:endParaRPr lang="en-US" sz="1200" dirty="0"/>
           </a:p>
@@ -34733,7 +34340,7 @@
                 <a:ea typeface="Trebuchet MS" pitchFamily="34" charset="-122"/>
                 <a:cs typeface="Trebuchet MS" pitchFamily="34" charset="-120"/>
               </a:rPr>
-              <a:t>expand</a:t>
+              <a:t>exit</a:t>
             </a:r>
             <a:endParaRPr lang="en-US" sz="1200" dirty="0"/>
           </a:p>
@@ -34799,7 +34406,7 @@
                 <a:ea typeface="Trebuchet MS" pitchFamily="34" charset="-122"/>
                 <a:cs typeface="Trebuchet MS" pitchFamily="34" charset="-120"/>
               </a:rPr>
-              <a:t>express</a:t>
+              <a:t>exclaim</a:t>
             </a:r>
             <a:endParaRPr lang="en-US" sz="1200" dirty="0"/>
           </a:p>
@@ -34931,7 +34538,7 @@
                 <a:ea typeface="Trebuchet MS" pitchFamily="34" charset="-122"/>
                 <a:cs typeface="Trebuchet MS" pitchFamily="34" charset="-120"/>
               </a:rPr>
-              <a:t>exclaim</a:t>
+              <a:t>extend</a:t>
             </a:r>
             <a:endParaRPr lang="en-US" sz="1200" dirty="0"/>
           </a:p>
@@ -34997,7 +34604,7 @@
                 <a:ea typeface="Trebuchet MS" pitchFamily="34" charset="-122"/>
                 <a:cs typeface="Trebuchet MS" pitchFamily="34" charset="-120"/>
               </a:rPr>
-              <a:t>extend</a:t>
+              <a:t>express</a:t>
             </a:r>
             <a:endParaRPr lang="en-US" sz="1200" dirty="0"/>
           </a:p>
@@ -35355,7 +34962,7 @@
                 <a:ea typeface="Calibri" pitchFamily="34" charset="-122"/>
                 <a:cs typeface="Calibri" pitchFamily="34" charset="-120"/>
               </a:rPr>
-              <a:t>Word Labs  •  wordlabs.app  •  Prefix: 'ex-' = out, out of, beyond</a:t>
+              <a:t>Word Labs  •  wordlabs.app  •  Prefix: 'ex-' = out, out of, away</a:t>
             </a:r>
             <a:endParaRPr lang="en-US" sz="800" dirty="0"/>
           </a:p>
@@ -35519,7 +35126,7 @@
                 <a:ea typeface="Calibri" pitchFamily="34" charset="-122"/>
                 <a:cs typeface="Calibri" pitchFamily="34" charset="-120"/>
               </a:rPr>
-              <a:t>A meaningful word part added to the beginning of a root to change its meaning. The prefix 'ex-' means 'out, out of, beyond'.</a:t>
+              <a:t>A meaningful word part added to the beginning of a root to change its meaning. The prefix 'ex-' means 'out, out of, away'.</a:t>
             </a:r>
             <a:endParaRPr lang="en-US" sz="1350" dirty="0"/>
           </a:p>
@@ -35683,7 +35290,7 @@
                 <a:ea typeface="Calibri" pitchFamily="34" charset="-122"/>
                 <a:cs typeface="Calibri" pitchFamily="34" charset="-120"/>
               </a:rPr>
-              <a:t>The core part of a word carrying its basic meaning. In 'exit', the root is the part after the prefix 'ex-'.</a:t>
+              <a:t>The core part of a word carrying its basic meaning. In 'explore', the root is the part after the prefix 'ex-'.</a:t>
             </a:r>
             <a:endParaRPr lang="en-US" sz="1350" dirty="0"/>
           </a:p>
@@ -36139,7 +35746,7 @@
                 <a:ea typeface="Calibri" pitchFamily="34" charset="-122"/>
                 <a:cs typeface="Calibri" pitchFamily="34" charset="-120"/>
               </a:rPr>
-              <a:t>Word Labs  •  wordlabs.app  •  Prefix: 'ex-' = out, out of, beyond</a:t>
+              <a:t>Word Labs  •  wordlabs.app  •  Prefix: 'ex-' = out, out of, away</a:t>
             </a:r>
             <a:endParaRPr lang="en-US" sz="800" dirty="0"/>
           </a:p>
@@ -36251,7 +35858,7 @@
                 <a:ea typeface="Calibri" pitchFamily="34" charset="-122"/>
                 <a:cs typeface="Calibri" pitchFamily="34" charset="-120"/>
               </a:rPr>
-              <a:t>1.  The prefix 'ex-' means 'out' or 'out of'.</a:t>
+              <a:t>1.  The word 'example' uses 'ex-' to mean 'inside'.</a:t>
             </a:r>
             <a:endParaRPr lang="en-US" sz="1300" dirty="0"/>
           </a:p>
@@ -36274,11 +35881,11 @@
             </a:avLst>
           </a:prstGeom>
           <a:solidFill>
-            <a:srgbClr val="DCFCE7"/>
-          </a:solidFill>
-          <a:ln w="12700">
-            <a:solidFill>
-              <a:srgbClr val="16A34A"/>
+            <a:srgbClr val="FEE2E2"/>
+          </a:solidFill>
+          <a:ln w="12700">
+            <a:solidFill>
+              <a:srgbClr val="DC2626"/>
             </a:solidFill>
             <a:prstDash val="solid"/>
           </a:ln>
@@ -36311,13 +35918,13 @@
             <a:r>
               <a:rPr lang="en-US" sz="1100" b="1" dirty="0">
                 <a:solidFill>
-                  <a:srgbClr val="16A34A"/>
+                  <a:srgbClr val="DC2626"/>
                 </a:solidFill>
                 <a:latin typeface="Trebuchet MS" pitchFamily="34" charset="0"/>
                 <a:ea typeface="Trebuchet MS" pitchFamily="34" charset="-122"/>
                 <a:cs typeface="Trebuchet MS" pitchFamily="34" charset="-120"/>
               </a:rPr>
-              <a:t>TRUE</a:t>
+              <a:t>FALSE</a:t>
             </a:r>
             <a:endParaRPr lang="en-US" sz="1100" dirty="0"/>
           </a:p>
@@ -36390,7 +35997,7 @@
                 <a:ea typeface="Calibri" pitchFamily="34" charset="-122"/>
                 <a:cs typeface="Calibri" pitchFamily="34" charset="-120"/>
               </a:rPr>
-              <a:t>2.  The prefix 'ex-' means 'again' or 'back'.</a:t>
+              <a:t>2.  Adding 'ex-' to a word always makes it mean the opposite.</a:t>
             </a:r>
             <a:endParaRPr lang="en-US" sz="1300" dirty="0"/>
           </a:p>
@@ -36529,7 +36136,7 @@
                 <a:ea typeface="Calibri" pitchFamily="34" charset="-122"/>
                 <a:cs typeface="Calibri" pitchFamily="34" charset="-120"/>
               </a:rPr>
-              <a:t>3.  The word 'export' uses the prefix 'ex-' meaning to send something out.</a:t>
+              <a:t>3.  The prefix 'ex-' can mean 'out of' or 'away from'.</a:t>
             </a:r>
             <a:endParaRPr lang="en-US" sz="1300" dirty="0"/>
           </a:p>
@@ -36668,7 +36275,7 @@
                 <a:ea typeface="Calibri" pitchFamily="34" charset="-122"/>
                 <a:cs typeface="Calibri" pitchFamily="34" charset="-120"/>
               </a:rPr>
-              <a:t>4.  The prefix 'ex-' comes from Latin.</a:t>
+              <a:t>4.  'Ex-' comes from Latin.</a:t>
             </a:r>
             <a:endParaRPr lang="en-US" sz="1300" dirty="0"/>
           </a:p>
@@ -36807,7 +36414,7 @@
                 <a:ea typeface="Calibri" pitchFamily="34" charset="-122"/>
                 <a:cs typeface="Calibri" pitchFamily="34" charset="-120"/>
               </a:rPr>
-              <a:t>5.  The prefix 'ex-' means 'inside' or 'within'.</a:t>
+              <a:t>5.  The word 'exit' uses the prefix 'ex-' meaning 'out'.</a:t>
             </a:r>
             <a:endParaRPr lang="en-US" sz="1300" dirty="0"/>
           </a:p>
@@ -36830,11 +36437,11 @@
             </a:avLst>
           </a:prstGeom>
           <a:solidFill>
-            <a:srgbClr val="FEE2E2"/>
-          </a:solidFill>
-          <a:ln w="12700">
-            <a:solidFill>
-              <a:srgbClr val="DC2626"/>
+            <a:srgbClr val="DCFCE7"/>
+          </a:solidFill>
+          <a:ln w="12700">
+            <a:solidFill>
+              <a:srgbClr val="16A34A"/>
             </a:solidFill>
             <a:prstDash val="solid"/>
           </a:ln>
@@ -36867,13 +36474,13 @@
             <a:r>
               <a:rPr lang="en-US" sz="1100" b="1" dirty="0">
                 <a:solidFill>
-                  <a:srgbClr val="DC2626"/>
+                  <a:srgbClr val="16A34A"/>
                 </a:solidFill>
                 <a:latin typeface="Trebuchet MS" pitchFamily="34" charset="0"/>
                 <a:ea typeface="Trebuchet MS" pitchFamily="34" charset="-122"/>
                 <a:cs typeface="Trebuchet MS" pitchFamily="34" charset="-120"/>
               </a:rPr>
-              <a:t>FALSE</a:t>
+              <a:t>TRUE</a:t>
             </a:r>
             <a:endParaRPr lang="en-US" sz="1100" dirty="0"/>
           </a:p>
@@ -37165,7 +36772,7 @@
                 <a:ea typeface="Calibri" pitchFamily="34" charset="-122"/>
                 <a:cs typeface="Calibri" pitchFamily="34" charset="-120"/>
               </a:rPr>
-              <a:t>Word Labs  •  wordlabs.app  •  Prefix: 'ex-' = out, out of, beyond</a:t>
+              <a:t>Word Labs  •  wordlabs.app  •  Prefix: 'ex-' = out, out of, away</a:t>
             </a:r>
             <a:endParaRPr lang="en-US" sz="800" dirty="0"/>
           </a:p>
@@ -37302,7 +36909,7 @@
                 <a:ea typeface="Trebuchet MS" pitchFamily="34" charset="-122"/>
                 <a:cs typeface="Trebuchet MS" pitchFamily="34" charset="-120"/>
               </a:rPr>
-              <a:t>out, out of, beyond</a:t>
+              <a:t>out, out of, away</a:t>
             </a:r>
             <a:endParaRPr lang="en-US" sz="2000" dirty="0"/>
           </a:p>
@@ -37446,7 +37053,7 @@
                 <a:ea typeface="Trebuchet MS" pitchFamily="34" charset="-122"/>
                 <a:cs typeface="Trebuchet MS" pitchFamily="34" charset="-120"/>
               </a:rPr>
-              <a:t>exit</a:t>
+              <a:t>explore</a:t>
             </a:r>
             <a:endParaRPr lang="en-US" sz="1300" dirty="0"/>
           </a:p>
@@ -37512,7 +37119,7 @@
                 <a:ea typeface="Trebuchet MS" pitchFamily="34" charset="-122"/>
                 <a:cs typeface="Trebuchet MS" pitchFamily="34" charset="-120"/>
               </a:rPr>
-              <a:t>explore</a:t>
+              <a:t>explain</a:t>
             </a:r>
             <a:endParaRPr lang="en-US" sz="1300" dirty="0"/>
           </a:p>
@@ -37578,7 +37185,7 @@
                 <a:ea typeface="Trebuchet MS" pitchFamily="34" charset="-122"/>
                 <a:cs typeface="Trebuchet MS" pitchFamily="34" charset="-120"/>
               </a:rPr>
-              <a:t>expand</a:t>
+              <a:t>exit</a:t>
             </a:r>
             <a:endParaRPr lang="en-US" sz="1300" dirty="0"/>
           </a:p>
@@ -37644,7 +37251,7 @@
                 <a:ea typeface="Trebuchet MS" pitchFamily="34" charset="-122"/>
                 <a:cs typeface="Trebuchet MS" pitchFamily="34" charset="-120"/>
               </a:rPr>
-              <a:t>express</a:t>
+              <a:t>exclaim</a:t>
             </a:r>
             <a:endParaRPr lang="en-US" sz="1300" dirty="0"/>
           </a:p>
@@ -37776,7 +37383,7 @@
                 <a:ea typeface="Trebuchet MS" pitchFamily="34" charset="-122"/>
                 <a:cs typeface="Trebuchet MS" pitchFamily="34" charset="-120"/>
               </a:rPr>
-              <a:t>exclaim</a:t>
+              <a:t>extend</a:t>
             </a:r>
             <a:endParaRPr lang="en-US" sz="1300" dirty="0"/>
           </a:p>
@@ -37842,7 +37449,7 @@
                 <a:ea typeface="Trebuchet MS" pitchFamily="34" charset="-122"/>
                 <a:cs typeface="Trebuchet MS" pitchFamily="34" charset="-120"/>
               </a:rPr>
-              <a:t>extend</a:t>
+              <a:t>express</a:t>
             </a:r>
             <a:endParaRPr lang="en-US" sz="1300" dirty="0"/>
           </a:p>
@@ -38134,7 +37741,7 @@
                 <a:ea typeface="Calibri" pitchFamily="34" charset="-122"/>
                 <a:cs typeface="Calibri" pitchFamily="34" charset="-120"/>
               </a:rPr>
-              <a:t>Word Labs  •  wordlabs.app  •  Prefix: 'ex-' = out, out of, beyond</a:t>
+              <a:t>Word Labs  •  wordlabs.app  •  Prefix: 'ex-' = out, out of, away</a:t>
             </a:r>
             <a:endParaRPr lang="en-US" sz="800" dirty="0"/>
           </a:p>
@@ -38563,7 +38170,7 @@
                 <a:ea typeface="Trebuchet MS" pitchFamily="34" charset="-122"/>
                 <a:cs typeface="Trebuchet MS" pitchFamily="34" charset="-120"/>
               </a:rPr>
-              <a:t>-ion</a:t>
+              <a:t>-ed</a:t>
             </a:r>
             <a:endParaRPr lang="en-US" sz="1300" dirty="0"/>
           </a:p>
@@ -38805,7 +38412,7 @@
                 <a:ea typeface="Trebuchet MS" pitchFamily="34" charset="-122"/>
                 <a:cs typeface="Trebuchet MS" pitchFamily="34" charset="-120"/>
               </a:rPr>
-              <a:t>press</a:t>
+              <a:t>tend</a:t>
             </a:r>
             <a:endParaRPr lang="en-US" sz="1300" dirty="0"/>
           </a:p>
@@ -38869,7 +38476,7 @@
                 <a:ea typeface="Trebuchet MS" pitchFamily="34" charset="-122"/>
                 <a:cs typeface="Trebuchet MS" pitchFamily="34" charset="-120"/>
               </a:rPr>
-              <a:t>-ed</a:t>
+              <a:t>-ion</a:t>
             </a:r>
             <a:endParaRPr lang="en-US" sz="1300" dirty="0"/>
           </a:p>
@@ -38958,7 +38565,7 @@
                 <a:ea typeface="Trebuchet MS" pitchFamily="34" charset="-122"/>
                 <a:cs typeface="Trebuchet MS" pitchFamily="34" charset="-120"/>
               </a:rPr>
-              <a:t>tend</a:t>
+              <a:t>claim</a:t>
             </a:r>
             <a:endParaRPr lang="en-US" sz="1300" dirty="0"/>
           </a:p>
@@ -39022,7 +38629,7 @@
                 <a:ea typeface="Trebuchet MS" pitchFamily="34" charset="-122"/>
                 <a:cs typeface="Trebuchet MS" pitchFamily="34" charset="-120"/>
               </a:rPr>
-              <a:t>-tion</a:t>
+              <a:t>-ment</a:t>
             </a:r>
             <a:endParaRPr lang="en-US" sz="1300" dirty="0"/>
           </a:p>
@@ -39111,7 +38718,7 @@
                 <a:ea typeface="Trebuchet MS" pitchFamily="34" charset="-122"/>
                 <a:cs typeface="Trebuchet MS" pitchFamily="34" charset="-120"/>
               </a:rPr>
-              <a:t>claim</a:t>
+              <a:t>press</a:t>
             </a:r>
             <a:endParaRPr lang="en-US" sz="1300" dirty="0"/>
           </a:p>
@@ -39175,7 +38782,7 @@
                 <a:ea typeface="Trebuchet MS" pitchFamily="34" charset="-122"/>
                 <a:cs typeface="Trebuchet MS" pitchFamily="34" charset="-120"/>
               </a:rPr>
-              <a:t>-ment</a:t>
+              <a:t>-ive</a:t>
             </a:r>
             <a:endParaRPr lang="en-US" sz="1300" dirty="0"/>
           </a:p>
@@ -39453,7 +39060,7 @@
         <p:spPr>
           <a:xfrm>
             <a:off x="4032504" y="4178808"/>
-            <a:ext cx="950976" cy="420624"/>
+            <a:ext cx="822960" cy="420624"/>
           </a:xfrm>
           <a:prstGeom prst="rect">
             <a:avLst>
@@ -39487,7 +39094,7 @@
         <p:spPr>
           <a:xfrm>
             <a:off x="4032504" y="4178808"/>
-            <a:ext cx="950976" cy="420624"/>
+            <a:ext cx="822960" cy="420624"/>
           </a:xfrm>
           <a:prstGeom prst="rect">
             <a:avLst/>
@@ -39511,7 +39118,7 @@
                 <a:ea typeface="Trebuchet MS" pitchFamily="34" charset="-122"/>
                 <a:cs typeface="Trebuchet MS" pitchFamily="34" charset="-120"/>
               </a:rPr>
-              <a:t>-ion</a:t>
+              <a:t>-ed</a:t>
             </a:r>
             <a:endParaRPr lang="en-US" sz="1300" dirty="0"/>
           </a:p>
@@ -39525,7 +39132,7 @@
         </p:nvSpPr>
         <p:spPr>
           <a:xfrm>
-            <a:off x="5056632" y="4178808"/>
+            <a:off x="4928616" y="4178808"/>
             <a:ext cx="365760" cy="420624"/>
           </a:xfrm>
           <a:prstGeom prst="rect">
@@ -39564,7 +39171,7 @@
         </p:nvSpPr>
         <p:spPr>
           <a:xfrm>
-            <a:off x="5468112" y="4178808"/>
+            <a:off x="5340096" y="4178808"/>
             <a:ext cx="2194560" cy="420624"/>
           </a:xfrm>
           <a:prstGeom prst="rect">
@@ -39591,7 +39198,7 @@
         </p:nvSpPr>
         <p:spPr>
           <a:xfrm>
-            <a:off x="5468112" y="4178808"/>
+            <a:off x="5340096" y="4178808"/>
             <a:ext cx="2194560" cy="420624"/>
           </a:xfrm>
           <a:prstGeom prst="rect">
@@ -39616,7 +39223,7 @@
                 <a:ea typeface="Trebuchet MS" pitchFamily="34" charset="-122"/>
                 <a:cs typeface="Trebuchet MS" pitchFamily="34" charset="-120"/>
               </a:rPr>
-              <a:t>exit</a:t>
+              <a:t>explore</a:t>
             </a:r>
             <a:endParaRPr lang="en-US" sz="1400" dirty="0"/>
           </a:p>
@@ -39908,7 +39515,7 @@
                 <a:ea typeface="Calibri" pitchFamily="34" charset="-122"/>
                 <a:cs typeface="Calibri" pitchFamily="34" charset="-120"/>
               </a:rPr>
-              <a:t>Word Labs  •  wordlabs.app  •  Prefix: 'ex-' = out, out of, beyond</a:t>
+              <a:t>Word Labs  •  wordlabs.app  •  Prefix: 'ex-' = out, out of, away</a:t>
             </a:r>
             <a:endParaRPr lang="en-US" sz="800" dirty="0"/>
           </a:p>
@@ -40020,7 +39627,7 @@
                 <a:ea typeface="Trebuchet MS" pitchFamily="34" charset="-122"/>
                 <a:cs typeface="Trebuchet MS" pitchFamily="34" charset="-120"/>
               </a:rPr>
-              <a:t>exit</a:t>
+              <a:t>explore</a:t>
             </a:r>
             <a:endParaRPr lang="en-US" sz="1200" dirty="0"/>
           </a:p>
@@ -40086,7 +39693,7 @@
                 <a:ea typeface="Calibri" pitchFamily="34" charset="-122"/>
                 <a:cs typeface="Calibri" pitchFamily="34" charset="-120"/>
               </a:rPr>
-              <a:t>To show or share your thoughts and feelings.</a:t>
+              <a:t>To say something suddenly and loudly, often with strong feeling.</a:t>
             </a:r>
             <a:endParaRPr lang="en-US" sz="1200" dirty="0"/>
           </a:p>
@@ -40159,7 +39766,7 @@
                 <a:ea typeface="Trebuchet MS" pitchFamily="34" charset="-122"/>
                 <a:cs typeface="Trebuchet MS" pitchFamily="34" charset="-120"/>
               </a:rPr>
-              <a:t>explore</a:t>
+              <a:t>explain</a:t>
             </a:r>
             <a:endParaRPr lang="en-US" sz="1200" dirty="0"/>
           </a:p>
@@ -40225,7 +39832,7 @@
                 <a:ea typeface="Calibri" pitchFamily="34" charset="-122"/>
                 <a:cs typeface="Calibri" pitchFamily="34" charset="-120"/>
               </a:rPr>
-              <a:t>The way out of a building or room.</a:t>
+              <a:t>To travel around and discover new places or ideas.</a:t>
             </a:r>
             <a:endParaRPr lang="en-US" sz="1200" dirty="0"/>
           </a:p>
@@ -40298,7 +39905,7 @@
                 <a:ea typeface="Trebuchet MS" pitchFamily="34" charset="-122"/>
                 <a:cs typeface="Trebuchet MS" pitchFamily="34" charset="-120"/>
               </a:rPr>
-              <a:t>expand</a:t>
+              <a:t>exit</a:t>
             </a:r>
             <a:endParaRPr lang="en-US" sz="1200" dirty="0"/>
           </a:p>
@@ -40364,7 +39971,7 @@
                 <a:ea typeface="Calibri" pitchFamily="34" charset="-122"/>
                 <a:cs typeface="Calibri" pitchFamily="34" charset="-120"/>
               </a:rPr>
-              <a:t>To stretch out further or make something longer.</a:t>
+              <a:t>To show your feelings or ideas through words, art, or actions.</a:t>
             </a:r>
             <a:endParaRPr lang="en-US" sz="1200" dirty="0"/>
           </a:p>
@@ -40437,7 +40044,7 @@
                 <a:ea typeface="Trebuchet MS" pitchFamily="34" charset="-122"/>
                 <a:cs typeface="Trebuchet MS" pitchFamily="34" charset="-120"/>
               </a:rPr>
-              <a:t>express</a:t>
+              <a:t>exclaim</a:t>
             </a:r>
             <a:endParaRPr lang="en-US" sz="1200" dirty="0"/>
           </a:p>
@@ -40503,7 +40110,7 @@
                 <a:ea typeface="Calibri" pitchFamily="34" charset="-122"/>
                 <a:cs typeface="Calibri" pitchFamily="34" charset="-120"/>
               </a:rPr>
-              <a:t>To grow bigger or spread out.</a:t>
+              <a:t>A way out of a building or room.</a:t>
             </a:r>
             <a:endParaRPr lang="en-US" sz="1200" dirty="0"/>
           </a:p>
@@ -40642,7 +40249,7 @@
                 <a:ea typeface="Calibri" pitchFamily="34" charset="-122"/>
                 <a:cs typeface="Calibri" pitchFamily="34" charset="-120"/>
               </a:rPr>
-              <a:t>To suddenly call out or shout something with strong feeling.</a:t>
+              <a:t>To stretch or make something longer or bigger.</a:t>
             </a:r>
             <a:endParaRPr lang="en-US" sz="1200" dirty="0"/>
           </a:p>
@@ -40715,7 +40322,7 @@
                 <a:ea typeface="Trebuchet MS" pitchFamily="34" charset="-122"/>
                 <a:cs typeface="Trebuchet MS" pitchFamily="34" charset="-120"/>
               </a:rPr>
-              <a:t>exclaim</a:t>
+              <a:t>extend</a:t>
             </a:r>
             <a:endParaRPr lang="en-US" sz="1200" dirty="0"/>
           </a:p>
@@ -40781,7 +40388,7 @@
                 <a:ea typeface="Calibri" pitchFamily="34" charset="-122"/>
                 <a:cs typeface="Calibri" pitchFamily="34" charset="-120"/>
               </a:rPr>
-              <a:t>To send goods out of one country to another.</a:t>
+              <a:t>To send goods out of a country to sell somewhere else.</a:t>
             </a:r>
             <a:endParaRPr lang="en-US" sz="1200" dirty="0"/>
           </a:p>
@@ -40854,7 +40461,7 @@
                 <a:ea typeface="Trebuchet MS" pitchFamily="34" charset="-122"/>
                 <a:cs typeface="Trebuchet MS" pitchFamily="34" charset="-120"/>
               </a:rPr>
-              <a:t>extend</a:t>
+              <a:t>express</a:t>
             </a:r>
             <a:endParaRPr lang="en-US" sz="1200" dirty="0"/>
           </a:p>
@@ -40920,7 +40527,7 @@
                 <a:ea typeface="Calibri" pitchFamily="34" charset="-122"/>
                 <a:cs typeface="Calibri" pitchFamily="34" charset="-120"/>
               </a:rPr>
-              <a:t>To travel around a new place to find out what is there.</a:t>
+              <a:t>To make something clear so others can understand it.</a:t>
             </a:r>
             <a:endParaRPr lang="en-US" sz="1200" dirty="0"/>
           </a:p>
@@ -41212,7 +40819,7 @@
                 <a:ea typeface="Calibri" pitchFamily="34" charset="-122"/>
                 <a:cs typeface="Calibri" pitchFamily="34" charset="-120"/>
               </a:rPr>
-              <a:t>Word Labs  •  wordlabs.app  •  Prefix: 'ex-' = out, out of, beyond</a:t>
+              <a:t>Word Labs  •  wordlabs.app  •  Prefix: 'ex-' = out, out of, away</a:t>
             </a:r>
             <a:endParaRPr lang="en-US" sz="800" dirty="0"/>
           </a:p>
@@ -41415,7 +41022,7 @@
                 <a:ea typeface="Calibri" pitchFamily="34" charset="-122"/>
                 <a:cs typeface="Calibri" pitchFamily="34" charset="-120"/>
               </a:rPr>
-              <a:t>The explorer set out to discover new lands beyond the mountains.</a:t>
+              <a:t>The scientist decided to explore the deep cave to find new fossils.</a:t>
             </a:r>
             <a:endParaRPr lang="en-US" sz="1500" dirty="0"/>
           </a:p>
@@ -41579,7 +41186,7 @@
                 <a:ea typeface="Calibri" pitchFamily="34" charset="-122"/>
                 <a:cs typeface="Calibri" pitchFamily="34" charset="-120"/>
               </a:rPr>
-              <a:t>Please exit the building quietly when the bell rings.</a:t>
+              <a:t>Can you explain how the water cycle works to the rest of the class?</a:t>
             </a:r>
             <a:endParaRPr lang="en-US" sz="1500" dirty="0"/>
           </a:p>
@@ -41743,7 +41350,7 @@
                 <a:ea typeface="Calibri" pitchFamily="34" charset="-122"/>
                 <a:cs typeface="Calibri" pitchFamily="34" charset="-120"/>
               </a:rPr>
-              <a:t>She used bright colours to express her feelings in the painting.</a:t>
+              <a:t>We had to exit the building quickly when the fire alarm went off.</a:t>
             </a:r>
             <a:endParaRPr lang="en-US" sz="1500" dirty="0"/>
           </a:p>
